--- a/Quarto/presentation.pptx
+++ b/Quarto/presentation.pptx
@@ -22,6 +22,14 @@
     <p:sldId id="270" r:id="rId16"/>
     <p:sldId id="271" r:id="rId17"/>
     <p:sldId id="272" r:id="rId18"/>
+    <p:sldId id="273" r:id="rId19"/>
+    <p:sldId id="274" r:id="rId20"/>
+    <p:sldId id="275" r:id="rId21"/>
+    <p:sldId id="276" r:id="rId22"/>
+    <p:sldId id="277" r:id="rId23"/>
+    <p:sldId id="278" r:id="rId24"/>
+    <p:sldId id="279" r:id="rId25"/>
+    <p:sldId id="280" r:id="rId26"/>
   </p:sldIdLst>
   <p:sldSz cx="9144000" cy="5143500" type="screen16x9"/>
   <p:notesSz cx="6858000" cy="9144000"/>
@@ -3131,47 +3139,71 @@
             </a:pPr>
             <a:r>
               <a:rPr/>
-              <a:t>Investigation of Current-Phase Relationship in 1T-Phase Platinum Ditelluride Josephson Junctions under In-Plane Magnetic Field</a:t>
+              <a:t>面內磁場下1T相二碲化鉑約瑟夫森接面之電流－相位關係研究</a:t>
             </a:r>
           </a:p>
         </p:txBody>
       </p:sp>
-      <p:sp>
-        <p:nvSpPr>
-          <p:cNvPr id="3" name="Subtitle 2"/>
-          <p:cNvSpPr>
-            <a:spLocks noGrp="1"/>
-          </p:cNvSpPr>
-          <p:nvPr>
-            <p:ph idx="1" type="subTitle"/>
-          </p:nvPr>
-        </p:nvSpPr>
-        <p:spPr>
-          <a:xfrm>
-            <a:off x="1371600" y="2914650"/>
-            <a:ext cx="6400800" cy="1314450"/>
-          </a:xfrm>
-        </p:spPr>
-        <p:txBody>
-          <a:bodyPr/>
-          <a:lstStyle/>
-          <a:p>
-            <a:pPr lvl="0" indent="0" marL="0">
-              <a:buNone/>
-            </a:pPr>
-            <a:r>
-              <a:rPr/>
-              <a:t>面內磁場下 1T 相二碲化鉑約瑟夫森接面之電流-相位關係研究</a:t>
-            </a:r>
-            <a:br/>
-            <a:br/>
-            <a:r>
-              <a:rPr/>
-              <a:t>Tao-Yi Hsu (徐道宜)</a:t>
-            </a:r>
-          </a:p>
-        </p:txBody>
-      </p:sp>
+      <mc:AlternateContent xmlns:mc="http://schemas.openxmlformats.org/markup-compatibility/2006">
+        <mc:Choice xmlns:a14="http://schemas.microsoft.com/office/drawing/2010/main" Requires="a14">
+          <p:sp>
+            <p:nvSpPr>
+              <p:cNvPr id="3" name="Subtitle 2"/>
+              <p:cNvSpPr>
+                <a:spLocks noGrp="1"/>
+              </p:cNvSpPr>
+              <p:nvPr>
+                <p:ph idx="1" type="subTitle"/>
+              </p:nvPr>
+            </p:nvSpPr>
+            <p:spPr>
+              <a:xfrm>
+                <a:off x="1371600" y="2914650"/>
+                <a:ext cx="6400800" cy="1314450"/>
+              </a:xfrm>
+            </p:spPr>
+            <p:txBody>
+              <a:bodyPr/>
+              <a:lstStyle/>
+              <a:p>
+                <a:pPr lvl="0" indent="0" marL="0">
+                  <a:buNone/>
+                </a:pPr>
+                <a:r>
+                  <a:rPr/>
+                  <a:t>Study of the Current–Phase Relation of a 1T-PtTe</a:t>
+                </a:r>
+                <a14:m>
+                  <m:oMath xmlns:m="http://schemas.openxmlformats.org/officeDocument/2006/math">
+                    <m:sSub>
+                      <m:e>
+                        <m:r>
+                          <m:t>​</m:t>
+                        </m:r>
+                      </m:e>
+                      <m:sub>
+                        <m:r>
+                          <m:t>2</m:t>
+                        </m:r>
+                      </m:sub>
+                    </m:sSub>
+                  </m:oMath>
+                </a14:m>
+                <a:r>
+                  <a:rPr/>
+                  <a:t> Josephson Junction Under an In-Plane Magnetic Field</a:t>
+                </a:r>
+                <a:br/>
+                <a:br/>
+                <a:r>
+                  <a:rPr/>
+                  <a:t>Student: Tao-Yi Hsu (徐道宜)  Advisor: Dr. Kuei-Lin Chiu (邱奎霖 博士)</a:t>
+                </a:r>
+              </a:p>
+            </p:txBody>
+          </p:sp>
+        </mc:Choice>
+      </mc:AlternateContent>
       <p:sp>
         <p:nvSpPr>
           <p:cNvPr id="4" name="Date Placeholder 3"/>
@@ -3192,7 +3224,7 @@
             </a:pPr>
             <a:r>
               <a:rPr/>
-              <a:t>2024-06-20</a:t>
+              <a:t>2026-01-05</a:t>
             </a:r>
           </a:p>
         </p:txBody>
@@ -3203,6 +3235,4624 @@
 </file>
 
 <file path=ppt/slides/slide10.xml><?xml version="1.0" encoding="utf-8"?>
+<p:sld xmlns:a="http://schemas.openxmlformats.org/drawingml/2006/main" xmlns:r="http://schemas.openxmlformats.org/officeDocument/2006/relationships" xmlns:p="http://schemas.openxmlformats.org/presentationml/2006/main">
+  <p:cSld>
+    <p:spTree>
+      <p:nvGrpSpPr>
+        <p:cNvPr id="1" name=""/>
+        <p:cNvGrpSpPr/>
+        <p:nvPr/>
+      </p:nvGrpSpPr>
+      <p:grpSpPr>
+        <a:xfrm>
+          <a:off x="0" y="0"/>
+          <a:ext cx="0" cy="0"/>
+          <a:chOff x="0" y="0"/>
+          <a:chExt cx="0" cy="0"/>
+        </a:xfrm>
+      </p:grpSpPr>
+      <p:sp>
+        <p:nvSpPr>
+          <p:cNvPr id="3" name="Content Placeholder 2"/>
+          <p:cNvSpPr>
+            <a:spLocks noGrp="1"/>
+          </p:cNvSpPr>
+          <p:nvPr>
+            <p:ph idx="1"/>
+          </p:nvPr>
+        </p:nvSpPr>
+        <p:spPr/>
+        <p:txBody>
+          <a:bodyPr/>
+          <a:lstStyle/>
+          <a:p>
+            <a:pPr lvl="0" indent="0" marL="0">
+              <a:spcBef>
+                <a:spcPts val="3000"/>
+              </a:spcBef>
+              <a:buNone/>
+            </a:pPr>
+            <a:r>
+              <a:rPr b="1"/>
+              <a:t>Josephson Diode Effect (Concept)</a:t>
+            </a:r>
+          </a:p>
+        </p:txBody>
+      </p:sp>
+    </p:spTree>
+  </p:cSld>
+</p:sld>
+</file>
+
+<file path=ppt/slides/slide11.xml><?xml version="1.0" encoding="utf-8"?>
+<p:sld xmlns:a="http://schemas.openxmlformats.org/drawingml/2006/main" xmlns:r="http://schemas.openxmlformats.org/officeDocument/2006/relationships" xmlns:p="http://schemas.openxmlformats.org/presentationml/2006/main">
+  <p:cSld>
+    <p:spTree>
+      <p:nvGrpSpPr>
+        <p:cNvPr id="1" name=""/>
+        <p:cNvGrpSpPr/>
+        <p:nvPr/>
+      </p:nvGrpSpPr>
+      <p:grpSpPr>
+        <a:xfrm>
+          <a:off x="0" y="0"/>
+          <a:ext cx="0" cy="0"/>
+          <a:chOff x="0" y="0"/>
+          <a:chExt cx="0" cy="0"/>
+        </a:xfrm>
+      </p:grpSpPr>
+      <mc:AlternateContent xmlns:mc="http://schemas.openxmlformats.org/markup-compatibility/2006">
+        <mc:Choice xmlns:a14="http://schemas.microsoft.com/office/drawing/2010/main" Requires="a14">
+          <p:sp>
+            <p:nvSpPr>
+              <p:cNvPr id="3" name="Content Placeholder 2"/>
+              <p:cNvSpPr>
+                <a:spLocks noGrp="1"/>
+              </p:cNvSpPr>
+              <p:nvPr>
+                <p:ph idx="1" sz="half"/>
+              </p:nvPr>
+            </p:nvSpPr>
+            <p:spPr/>
+            <p:txBody>
+              <a:bodyPr/>
+              <a:lstStyle/>
+              <a:p>
+                <a:pPr lvl="0" indent="0" marL="0">
+                  <a:spcBef>
+                    <a:spcPts val="3000"/>
+                  </a:spcBef>
+                  <a:buNone/>
+                </a:pPr>
+                <a:r>
+                  <a:rPr b="1"/>
+                  <a:t>Definition</a:t>
+                </a:r>
+              </a:p>
+              <a:p>
+                <a:pPr lvl="0"/>
+                <a:r>
+                  <a:rPr/>
+                  <a:t>Non‑reciprocal critical current</a:t>
+                </a:r>
+                <a:br/>
+                <a14:m>
+                  <m:oMath xmlns:m="http://schemas.openxmlformats.org/officeDocument/2006/math">
+                    <m:sSubSup>
+                      <m:e>
+                        <m:r>
+                          <m:t>I</m:t>
+                        </m:r>
+                      </m:e>
+                      <m:sub>
+                        <m:r>
+                          <m:t>c</m:t>
+                        </m:r>
+                      </m:sub>
+                      <m:sup>
+                        <m:r>
+                          <m:rPr>
+                            <m:sty m:val="p"/>
+                          </m:rPr>
+                          <m:t>+</m:t>
+                        </m:r>
+                      </m:sup>
+                    </m:sSubSup>
+                    <m:r>
+                      <m:rPr>
+                        <m:sty m:val="p"/>
+                      </m:rPr>
+                      <m:t>≠</m:t>
+                    </m:r>
+                    <m:d>
+                      <m:dPr>
+                        <m:begChr m:val="|"/>
+                        <m:sepChr m:val=""/>
+                        <m:endChr m:val="|"/>
+                        <m:grow/>
+                      </m:dPr>
+                      <m:e>
+                        <m:sSubSup>
+                          <m:e>
+                            <m:r>
+                              <m:t>I</m:t>
+                            </m:r>
+                          </m:e>
+                          <m:sub>
+                            <m:r>
+                              <m:t>c</m:t>
+                            </m:r>
+                          </m:sub>
+                          <m:sup>
+                            <m:r>
+                              <m:rPr>
+                                <m:sty m:val="p"/>
+                              </m:rPr>
+                              <m:t>−</m:t>
+                            </m:r>
+                          </m:sup>
+                        </m:sSubSup>
+                      </m:e>
+                    </m:d>
+                  </m:oMath>
+                </a14:m>
+              </a:p>
+              <a:p>
+                <a:pPr lvl="0"/>
+                <a:r>
+                  <a:rPr/>
+                  <a:t>Superconducting rectification without Joule heating</a:t>
+                </a:r>
+              </a:p>
+            </p:txBody>
+          </p:sp>
+        </mc:Choice>
+      </mc:AlternateContent>
+      <mc:AlternateContent xmlns:mc="http://schemas.openxmlformats.org/markup-compatibility/2006">
+        <mc:Choice xmlns:a14="http://schemas.microsoft.com/office/drawing/2010/main" Requires="a14">
+          <p:sp>
+            <p:nvSpPr>
+              <p:cNvPr id="4" name="Content Placeholder 3"/>
+              <p:cNvSpPr>
+                <a:spLocks noGrp="1"/>
+              </p:cNvSpPr>
+              <p:nvPr>
+                <p:ph idx="2" sz="half"/>
+              </p:nvPr>
+            </p:nvSpPr>
+            <p:spPr/>
+            <p:txBody>
+              <a:bodyPr/>
+              <a:lstStyle/>
+              <a:p>
+                <a:pPr lvl="0" indent="0" marL="0">
+                  <a:spcBef>
+                    <a:spcPts val="3000"/>
+                  </a:spcBef>
+                  <a:buNone/>
+                </a:pPr>
+                <a:r>
+                  <a:rPr b="1"/>
+                  <a:t>Typical ingredients</a:t>
+                </a:r>
+              </a:p>
+              <a:p>
+                <a:pPr lvl="0"/>
+                <a:r>
+                  <a:rPr/>
+                  <a:t>Broken inversion symmetry + broken time‑reversal symmetry</a:t>
+                </a:r>
+              </a:p>
+              <a:p>
+                <a:pPr lvl="0"/>
+                <a:r>
+                  <a:rPr/>
+                  <a:t>Often tuned by </a:t>
+                </a:r>
+                <a14:m>
+                  <m:oMath xmlns:m="http://schemas.openxmlformats.org/officeDocument/2006/math">
+                    <m:sSub>
+                      <m:e>
+                        <m:r>
+                          <m:t>B</m:t>
+                        </m:r>
+                      </m:e>
+                      <m:sub>
+                        <m:r>
+                          <m:rPr>
+                            <m:sty m:val="p"/>
+                          </m:rPr>
+                          <m:t>∥</m:t>
+                        </m:r>
+                      </m:sub>
+                    </m:sSub>
+                  </m:oMath>
+                </a14:m>
+                <a:r>
+                  <a:rPr/>
+                  <a:t> with strong spin–orbit coupling</a:t>
+                </a:r>
+              </a:p>
+            </p:txBody>
+          </p:sp>
+        </mc:Choice>
+      </mc:AlternateContent>
+    </p:spTree>
+  </p:cSld>
+</p:sld>
+</file>
+
+<file path=ppt/slides/slide12.xml><?xml version="1.0" encoding="utf-8"?>
+<p:sld xmlns:a="http://schemas.openxmlformats.org/drawingml/2006/main" xmlns:r="http://schemas.openxmlformats.org/officeDocument/2006/relationships" xmlns:p="http://schemas.openxmlformats.org/presentationml/2006/main">
+  <p:cSld>
+    <p:spTree>
+      <p:nvGrpSpPr>
+        <p:cNvPr id="1" name=""/>
+        <p:cNvGrpSpPr/>
+        <p:nvPr/>
+      </p:nvGrpSpPr>
+      <p:grpSpPr>
+        <a:xfrm>
+          <a:off x="0" y="0"/>
+          <a:ext cx="0" cy="0"/>
+          <a:chOff x="0" y="0"/>
+          <a:chExt cx="0" cy="0"/>
+        </a:xfrm>
+      </p:grpSpPr>
+      <p:sp>
+        <p:nvSpPr>
+          <p:cNvPr id="2" name="Title 1"/>
+          <p:cNvSpPr>
+            <a:spLocks noGrp="1"/>
+          </p:cNvSpPr>
+          <p:nvPr>
+            <p:ph type="title"/>
+          </p:nvPr>
+        </p:nvSpPr>
+        <p:spPr/>
+        <p:txBody>
+          <a:bodyPr/>
+          <a:lstStyle/>
+          <a:p>
+            <a:pPr lvl="0" indent="0" marL="0">
+              <a:buNone/>
+            </a:pPr>
+            <a:r>
+              <a:rPr/>
+              <a:t>Theoretical Model: Rashba + Zeeman</a:t>
+            </a:r>
+          </a:p>
+        </p:txBody>
+      </p:sp>
+      <mc:AlternateContent xmlns:mc="http://schemas.openxmlformats.org/markup-compatibility/2006">
+        <mc:Choice xmlns:a14="http://schemas.microsoft.com/office/drawing/2010/main" Requires="a14">
+          <p:sp>
+            <p:nvSpPr>
+              <p:cNvPr id="3" name="Content Placeholder 2"/>
+              <p:cNvSpPr>
+                <a:spLocks noGrp="1"/>
+              </p:cNvSpPr>
+              <p:nvPr>
+                <p:ph idx="1"/>
+              </p:nvPr>
+            </p:nvSpPr>
+            <p:spPr/>
+            <p:txBody>
+              <a:bodyPr/>
+              <a:lstStyle/>
+              <a:p>
+                <a:pPr lvl="0" indent="0" marL="0">
+                  <a:spcBef>
+                    <a:spcPts val="3000"/>
+                  </a:spcBef>
+                  <a:buNone/>
+                </a:pPr>
+                <a:r>
+                  <a:rPr b="1"/>
+                  <a:t>Rashba + Zeeman: Why We Care</a:t>
+                </a:r>
+              </a:p>
+              <a:p>
+                <a:pPr lvl="0"/>
+                <a:r>
+                  <a:rPr/>
+                  <a:t>Platform: 2D electron system at an interface (e.g. PtTe</a:t>
+                </a:r>
+                <a14:m>
+                  <m:oMath xmlns:m="http://schemas.openxmlformats.org/officeDocument/2006/math">
+                    <m:sSub>
+                      <m:e>
+                        <m:r>
+                          <m:t>​</m:t>
+                        </m:r>
+                      </m:e>
+                      <m:sub>
+                        <m:r>
+                          <m:t>2</m:t>
+                        </m:r>
+                      </m:sub>
+                    </m:sSub>
+                  </m:oMath>
+                </a14:m>
+                <a:r>
+                  <a:rPr/>
+                  <a:t> surface / S–PtTe</a:t>
+                </a:r>
+                <a14:m>
+                  <m:oMath xmlns:m="http://schemas.openxmlformats.org/officeDocument/2006/math">
+                    <m:sSub>
+                      <m:e>
+                        <m:r>
+                          <m:t>​</m:t>
+                        </m:r>
+                      </m:e>
+                      <m:sub>
+                        <m:r>
+                          <m:t>2</m:t>
+                        </m:r>
+                      </m:sub>
+                    </m:sSub>
+                  </m:oMath>
+                </a14:m>
+                <a:r>
+                  <a:rPr/>
+                  <a:t> junction)</a:t>
+                </a:r>
+              </a:p>
+              <a:p>
+                <a:pPr lvl="0"/>
+                <a:r>
+                  <a:rPr/>
+                  <a:t>Key ingredients:</a:t>
+                </a:r>
+              </a:p>
+              <a:p>
+                <a:pPr lvl="1"/>
+                <a:r>
+                  <a:rPr/>
+                  <a:t>Strong spin–orbit coupling (SOC) → Rashba effect</a:t>
+                </a:r>
+              </a:p>
+              <a:p>
+                <a:pPr lvl="1"/>
+                <a:r>
+                  <a:rPr/>
+                  <a:t>External magnetic field → Zeeman effect</a:t>
+                </a:r>
+              </a:p>
+              <a:p>
+                <a:pPr lvl="0"/>
+                <a:r>
+                  <a:rPr/>
+                  <a:t>Combined effect:</a:t>
+                </a:r>
+              </a:p>
+              <a:p>
+                <a:pPr lvl="1"/>
+                <a:r>
+                  <a:rPr/>
+                  <a:t>Generates </a:t>
+                </a:r>
+                <a:r>
+                  <a:rPr b="1"/>
+                  <a:t>helical spin–momentum locking + spin splitting</a:t>
+                </a:r>
+              </a:p>
+              <a:p>
+                <a:pPr lvl="1"/>
+                <a:r>
+                  <a:rPr/>
+                  <a:t>Breaks </a:t>
+                </a:r>
+                <a:r>
+                  <a:rPr b="1"/>
+                  <a:t>inversion</a:t>
+                </a:r>
+                <a:r>
+                  <a:rPr/>
+                  <a:t> and </a:t>
+                </a:r>
+                <a:r>
+                  <a:rPr b="1"/>
+                  <a:t>time-reversal</a:t>
+                </a:r>
+                <a:r>
+                  <a:rPr/>
+                  <a:t> symmetries → allows </a:t>
+                </a:r>
+                <a:r>
+                  <a:rPr b="1"/>
+                  <a:t>finite-momentum pairing</a:t>
+                </a:r>
+                <a:r>
+                  <a:rPr/>
+                  <a:t> and </a:t>
+                </a:r>
+                <a:r>
+                  <a:rPr b="1"/>
+                  <a:t>Josephson diode effect (JDE)</a:t>
+                </a:r>
+              </a:p>
+              <a:p>
+                <a:pPr lvl="0" indent="0" marL="0">
+                  <a:spcBef>
+                    <a:spcPts val="3000"/>
+                  </a:spcBef>
+                  <a:buNone/>
+                </a:pPr>
+                <a:r>
+                  <a:rPr b="1"/>
+                  <a:t>Minimal 2D Model (Rashba + Zeeman)</a:t>
+                </a:r>
+              </a:p>
+              <a:p>
+                <a:pPr lvl="0"/>
+                <a:r>
+                  <a:rPr/>
+                  <a:t>Momentum in plane: </a:t>
+                </a:r>
+                <a14:m>
+                  <m:oMath xmlns:m="http://schemas.openxmlformats.org/officeDocument/2006/math">
+                    <m:r>
+                      <m:rPr>
+                        <m:sty m:val="b"/>
+                      </m:rPr>
+                      <m:t>k</m:t>
+                    </m:r>
+                    <m:r>
+                      <m:rPr>
+                        <m:sty m:val="p"/>
+                      </m:rPr>
+                      <m:t>=</m:t>
+                    </m:r>
+                    <m:d>
+                      <m:dPr>
+                        <m:begChr m:val="("/>
+                        <m:sepChr m:val=""/>
+                        <m:endChr m:val=")"/>
+                        <m:grow/>
+                      </m:dPr>
+                      <m:e>
+                        <m:sSub>
+                          <m:e>
+                            <m:r>
+                              <m:t>k</m:t>
+                            </m:r>
+                          </m:e>
+                          <m:sub>
+                            <m:r>
+                              <m:t>x</m:t>
+                            </m:r>
+                          </m:sub>
+                        </m:sSub>
+                        <m:r>
+                          <m:rPr>
+                            <m:sty m:val="p"/>
+                          </m:rPr>
+                          <m:t>,</m:t>
+                        </m:r>
+                        <m:sSub>
+                          <m:e>
+                            <m:r>
+                              <m:t>k</m:t>
+                            </m:r>
+                          </m:e>
+                          <m:sub>
+                            <m:r>
+                              <m:t>y</m:t>
+                            </m:r>
+                          </m:sub>
+                        </m:sSub>
+                      </m:e>
+                    </m:d>
+                  </m:oMath>
+                </a14:m>
+              </a:p>
+              <a:p>
+                <a:pPr lvl="0"/>
+                <a:r>
+                  <a:rPr/>
+                  <a:t>Spin Pauli matrices: </a:t>
+                </a:r>
+                <a14:m>
+                  <m:oMath xmlns:m="http://schemas.openxmlformats.org/officeDocument/2006/math">
+                    <m:r>
+                      <m:rPr>
+                        <m:sty m:val="b"/>
+                      </m:rPr>
+                      <m:t>σ</m:t>
+                    </m:r>
+                    <m:r>
+                      <m:rPr>
+                        <m:sty m:val="p"/>
+                      </m:rPr>
+                      <m:t>=</m:t>
+                    </m:r>
+                    <m:d>
+                      <m:dPr>
+                        <m:begChr m:val="("/>
+                        <m:sepChr m:val=""/>
+                        <m:endChr m:val=")"/>
+                        <m:grow/>
+                      </m:dPr>
+                      <m:e>
+                        <m:sSub>
+                          <m:e>
+                            <m:r>
+                              <m:t>σ</m:t>
+                            </m:r>
+                          </m:e>
+                          <m:sub>
+                            <m:r>
+                              <m:t>x</m:t>
+                            </m:r>
+                          </m:sub>
+                        </m:sSub>
+                        <m:r>
+                          <m:rPr>
+                            <m:sty m:val="p"/>
+                          </m:rPr>
+                          <m:t>,</m:t>
+                        </m:r>
+                        <m:sSub>
+                          <m:e>
+                            <m:r>
+                              <m:t>σ</m:t>
+                            </m:r>
+                          </m:e>
+                          <m:sub>
+                            <m:r>
+                              <m:t>y</m:t>
+                            </m:r>
+                          </m:sub>
+                        </m:sSub>
+                        <m:r>
+                          <m:rPr>
+                            <m:sty m:val="p"/>
+                          </m:rPr>
+                          <m:t>,</m:t>
+                        </m:r>
+                        <m:sSub>
+                          <m:e>
+                            <m:r>
+                              <m:t>σ</m:t>
+                            </m:r>
+                          </m:e>
+                          <m:sub>
+                            <m:r>
+                              <m:t>z</m:t>
+                            </m:r>
+                          </m:sub>
+                        </m:sSub>
+                      </m:e>
+                    </m:d>
+                  </m:oMath>
+                </a14:m>
+              </a:p>
+              <a:p>
+                <a:pPr lvl="0"/>
+                <a:r>
+                  <a:rPr/>
+                  <a:t>Total Hamiltonian:</a:t>
+                </a:r>
+              </a:p>
+              <a:p>
+                <a:pPr lvl="0"/>
+                <a14:m>
+                  <m:oMathPara xmlns:m="http://schemas.openxmlformats.org/officeDocument/2006/math">
+                    <m:oMathParaPr>
+                      <m:jc m:val="center"/>
+                    </m:oMathParaPr>
+                    <m:oMath>
+                      <m:r>
+                        <m:t>H</m:t>
+                      </m:r>
+                      <m:d>
+                        <m:dPr>
+                          <m:begChr m:val="("/>
+                          <m:sepChr m:val=""/>
+                          <m:endChr m:val=")"/>
+                          <m:grow/>
+                        </m:dPr>
+                        <m:e>
+                          <m:r>
+                            <m:rPr>
+                              <m:sty m:val="b"/>
+                            </m:rPr>
+                            <m:t>k</m:t>
+                          </m:r>
+                        </m:e>
+                      </m:d>
+                      <m:r>
+                        <m:rPr>
+                          <m:sty m:val="p"/>
+                        </m:rPr>
+                        <m:t>=</m:t>
+                      </m:r>
+                      <m:limLow>
+                        <m:e>
+                          <m:limLow>
+                            <m:e>
+                              <m:f>
+                                <m:fPr>
+                                  <m:type m:val="bar"/>
+                                </m:fPr>
+                                <m:num>
+                                  <m:sSup>
+                                    <m:e>
+                                      <m:r>
+                                        <m:rPr>
+                                          <m:sty m:val="p"/>
+                                        </m:rPr>
+                                        <m:t>ℏ</m:t>
+                                      </m:r>
+                                    </m:e>
+                                    <m:sup>
+                                      <m:r>
+                                        <m:t>2</m:t>
+                                      </m:r>
+                                    </m:sup>
+                                  </m:sSup>
+                                  <m:sSup>
+                                    <m:e>
+                                      <m:r>
+                                        <m:t>k</m:t>
+                                      </m:r>
+                                    </m:e>
+                                    <m:sup>
+                                      <m:r>
+                                        <m:t>2</m:t>
+                                      </m:r>
+                                    </m:sup>
+                                  </m:sSup>
+                                </m:num>
+                                <m:den>
+                                  <m:r>
+                                    <m:t>2</m:t>
+                                  </m:r>
+                                  <m:r>
+                                    <m:t>m</m:t>
+                                  </m:r>
+                                </m:den>
+                              </m:f>
+                              <m:r>
+                                <m:rPr>
+                                  <m:sty m:val="p"/>
+                                </m:rPr>
+                                <m:t>−</m:t>
+                              </m:r>
+                              <m:r>
+                                <m:t>μ</m:t>
+                              </m:r>
+                            </m:e>
+                            <m:lim>
+                              <m:r>
+                                <m:rPr>
+                                  <m:sty m:val="p"/>
+                                </m:rPr>
+                                <m:t>⏟</m:t>
+                              </m:r>
+                            </m:lim>
+                          </m:limLow>
+                        </m:e>
+                        <m:lim>
+                          <m:sSub>
+                            <m:e>
+                              <m:r>
+                                <m:t>H</m:t>
+                              </m:r>
+                            </m:e>
+                            <m:sub>
+                              <m:r>
+                                <m:t>0</m:t>
+                              </m:r>
+                            </m:sub>
+                          </m:sSub>
+                        </m:lim>
+                      </m:limLow>
+                      <m:r>
+                        <m:rPr>
+                          <m:sty m:val="p"/>
+                        </m:rPr>
+                        <m:t>+</m:t>
+                      </m:r>
+                      <m:limLow>
+                        <m:e>
+                          <m:limLow>
+                            <m:e>
+                              <m:sSub>
+                                <m:e>
+                                  <m:r>
+                                    <m:t>α</m:t>
+                                  </m:r>
+                                </m:e>
+                                <m:sub>
+                                  <m:r>
+                                    <m:t>R</m:t>
+                                  </m:r>
+                                </m:sub>
+                              </m:sSub>
+                              <m:d>
+                                <m:dPr>
+                                  <m:begChr m:val="("/>
+                                  <m:sepChr m:val=""/>
+                                  <m:endChr m:val=")"/>
+                                  <m:grow/>
+                                </m:dPr>
+                                <m:e>
+                                  <m:sSub>
+                                    <m:e>
+                                      <m:r>
+                                        <m:t>k</m:t>
+                                      </m:r>
+                                    </m:e>
+                                    <m:sub>
+                                      <m:r>
+                                        <m:t>y</m:t>
+                                      </m:r>
+                                    </m:sub>
+                                  </m:sSub>
+                                  <m:sSub>
+                                    <m:e>
+                                      <m:r>
+                                        <m:t>σ</m:t>
+                                      </m:r>
+                                    </m:e>
+                                    <m:sub>
+                                      <m:r>
+                                        <m:t>x</m:t>
+                                      </m:r>
+                                    </m:sub>
+                                  </m:sSub>
+                                  <m:r>
+                                    <m:rPr>
+                                      <m:sty m:val="p"/>
+                                    </m:rPr>
+                                    <m:t>−</m:t>
+                                  </m:r>
+                                  <m:sSub>
+                                    <m:e>
+                                      <m:r>
+                                        <m:t>k</m:t>
+                                      </m:r>
+                                    </m:e>
+                                    <m:sub>
+                                      <m:r>
+                                        <m:t>x</m:t>
+                                      </m:r>
+                                    </m:sub>
+                                  </m:sSub>
+                                  <m:sSub>
+                                    <m:e>
+                                      <m:r>
+                                        <m:t>σ</m:t>
+                                      </m:r>
+                                    </m:e>
+                                    <m:sub>
+                                      <m:r>
+                                        <m:t>y</m:t>
+                                      </m:r>
+                                    </m:sub>
+                                  </m:sSub>
+                                </m:e>
+                              </m:d>
+                            </m:e>
+                            <m:lim>
+                              <m:r>
+                                <m:rPr>
+                                  <m:sty m:val="p"/>
+                                </m:rPr>
+                                <m:t>⏟</m:t>
+                              </m:r>
+                            </m:lim>
+                          </m:limLow>
+                        </m:e>
+                        <m:lim>
+                          <m:sSub>
+                            <m:e>
+                              <m:r>
+                                <m:t>H</m:t>
+                              </m:r>
+                            </m:e>
+                            <m:sub>
+                              <m:r>
+                                <m:t>R</m:t>
+                              </m:r>
+                            </m:sub>
+                          </m:sSub>
+                        </m:lim>
+                      </m:limLow>
+                      <m:r>
+                        <m:rPr>
+                          <m:sty m:val="p"/>
+                        </m:rPr>
+                        <m:t>+</m:t>
+                      </m:r>
+                      <m:limLow>
+                        <m:e>
+                          <m:limLow>
+                            <m:e>
+                              <m:f>
+                                <m:fPr>
+                                  <m:type m:val="lin"/>
+                                </m:fPr>
+                                <m:num>
+                                  <m:r>
+                                    <m:t>1</m:t>
+                                  </m:r>
+                                </m:num>
+                                <m:den>
+                                  <m:r>
+                                    <m:t>2</m:t>
+                                  </m:r>
+                                </m:den>
+                              </m:f>
+                              <m:r>
+                                <m:t>g</m:t>
+                              </m:r>
+                              <m:sSub>
+                                <m:e>
+                                  <m:r>
+                                    <m:t>μ</m:t>
+                                  </m:r>
+                                </m:e>
+                                <m:sub>
+                                  <m:r>
+                                    <m:t>B</m:t>
+                                  </m:r>
+                                </m:sub>
+                              </m:sSub>
+                              <m:r>
+                                <m:rPr>
+                                  <m:sty m:val="b"/>
+                                </m:rPr>
+                                <m:t>B</m:t>
+                              </m:r>
+                              <m:r>
+                                <m:rPr>
+                                  <m:sty m:val="p"/>
+                                </m:rPr>
+                                <m:t>⋅</m:t>
+                              </m:r>
+                              <m:r>
+                                <m:rPr>
+                                  <m:sty m:val="b"/>
+                                </m:rPr>
+                                <m:t>σ</m:t>
+                              </m:r>
+                            </m:e>
+                            <m:lim>
+                              <m:r>
+                                <m:rPr>
+                                  <m:sty m:val="p"/>
+                                </m:rPr>
+                                <m:t>⏟</m:t>
+                              </m:r>
+                            </m:lim>
+                          </m:limLow>
+                        </m:e>
+                        <m:lim>
+                          <m:sSub>
+                            <m:e>
+                              <m:r>
+                                <m:t>H</m:t>
+                              </m:r>
+                            </m:e>
+                            <m:sub>
+                              <m:r>
+                                <m:t>Z</m:t>
+                              </m:r>
+                            </m:sub>
+                          </m:sSub>
+                        </m:lim>
+                      </m:limLow>
+                      <m:r>
+                        <m:rPr>
+                          <m:sty m:val="p"/>
+                        </m:rPr>
+                        <m:t>.</m:t>
+                      </m:r>
+                    </m:oMath>
+                  </m:oMathPara>
+                </a14:m>
+              </a:p>
+              <a:p>
+                <a:pPr lvl="0"/>
+                <a:r>
+                  <a:rPr/>
+                  <a:t>We will discuss:</a:t>
+                </a:r>
+              </a:p>
+              <a:p>
+                <a:pPr lvl="1"/>
+                <a14:m>
+                  <m:oMath xmlns:m="http://schemas.openxmlformats.org/officeDocument/2006/math">
+                    <m:sSub>
+                      <m:e>
+                        <m:r>
+                          <m:t>H</m:t>
+                        </m:r>
+                      </m:e>
+                      <m:sub>
+                        <m:r>
+                          <m:t>0</m:t>
+                        </m:r>
+                      </m:sub>
+                    </m:sSub>
+                  </m:oMath>
+                </a14:m>
+                <a:r>
+                  <a:rPr/>
+                  <a:t>: Free 2D electron gas</a:t>
+                </a:r>
+              </a:p>
+              <a:p>
+                <a:pPr lvl="1"/>
+                <a14:m>
+                  <m:oMath xmlns:m="http://schemas.openxmlformats.org/officeDocument/2006/math">
+                    <m:sSub>
+                      <m:e>
+                        <m:r>
+                          <m:t>H</m:t>
+                        </m:r>
+                      </m:e>
+                      <m:sub>
+                        <m:r>
+                          <m:t>R</m:t>
+                        </m:r>
+                      </m:sub>
+                    </m:sSub>
+                  </m:oMath>
+                </a14:m>
+                <a:r>
+                  <a:rPr/>
+                  <a:t>: Rashba spin–orbit coupling</a:t>
+                </a:r>
+              </a:p>
+              <a:p>
+                <a:pPr lvl="1"/>
+                <a14:m>
+                  <m:oMath xmlns:m="http://schemas.openxmlformats.org/officeDocument/2006/math">
+                    <m:sSub>
+                      <m:e>
+                        <m:r>
+                          <m:t>H</m:t>
+                        </m:r>
+                      </m:e>
+                      <m:sub>
+                        <m:r>
+                          <m:t>Z</m:t>
+                        </m:r>
+                      </m:sub>
+                    </m:sSub>
+                  </m:oMath>
+                </a14:m>
+                <a:r>
+                  <a:rPr/>
+                  <a:t>: Zeeman coupling to external magnetic field</a:t>
+                </a:r>
+              </a:p>
+              <a:p>
+                <a:pPr lvl="0" indent="0" marL="0">
+                  <a:spcBef>
+                    <a:spcPts val="3000"/>
+                  </a:spcBef>
+                  <a:buNone/>
+                </a:pPr>
+                <a:r>
+                  <a:rPr b="1"/>
+                  <a:t>Free 2D Electron Gas (</a:t>
+                </a:r>
+                <a14:m>
+                  <m:oMath xmlns:m="http://schemas.openxmlformats.org/officeDocument/2006/math">
+                    <m:sSub>
+                      <m:e>
+                        <m:r>
+                          <m:t>H</m:t>
+                        </m:r>
+                      </m:e>
+                      <m:sub>
+                        <m:r>
+                          <m:t>0</m:t>
+                        </m:r>
+                      </m:sub>
+                    </m:sSub>
+                  </m:oMath>
+                </a14:m>
+                <a:r>
+                  <a:rPr b="1"/>
+                  <a:t>)</a:t>
+                </a:r>
+              </a:p>
+              <a:p>
+                <a:pPr lvl="0"/>
+                <a:r>
+                  <a:rPr/>
+                  <a:t>Hamiltonian:</a:t>
+                </a:r>
+              </a:p>
+              <a:p>
+                <a:pPr lvl="0"/>
+                <a14:m>
+                  <m:oMathPara xmlns:m="http://schemas.openxmlformats.org/officeDocument/2006/math">
+                    <m:oMathParaPr>
+                      <m:jc m:val="center"/>
+                    </m:oMathParaPr>
+                    <m:oMath>
+                      <m:sSub>
+                        <m:e>
+                          <m:r>
+                            <m:t>H</m:t>
+                          </m:r>
+                        </m:e>
+                        <m:sub>
+                          <m:r>
+                            <m:t>0</m:t>
+                          </m:r>
+                        </m:sub>
+                      </m:sSub>
+                      <m:r>
+                        <m:rPr>
+                          <m:sty m:val="p"/>
+                        </m:rPr>
+                        <m:t>=</m:t>
+                      </m:r>
+                      <m:f>
+                        <m:fPr>
+                          <m:type m:val="bar"/>
+                        </m:fPr>
+                        <m:num>
+                          <m:sSup>
+                            <m:e>
+                              <m:r>
+                                <m:rPr>
+                                  <m:sty m:val="p"/>
+                                </m:rPr>
+                                <m:t>ℏ</m:t>
+                              </m:r>
+                            </m:e>
+                            <m:sup>
+                              <m:r>
+                                <m:t>2</m:t>
+                              </m:r>
+                            </m:sup>
+                          </m:sSup>
+                          <m:sSup>
+                            <m:e>
+                              <m:r>
+                                <m:t>k</m:t>
+                              </m:r>
+                            </m:e>
+                            <m:sup>
+                              <m:r>
+                                <m:t>2</m:t>
+                              </m:r>
+                            </m:sup>
+                          </m:sSup>
+                        </m:num>
+                        <m:den>
+                          <m:r>
+                            <m:t>2</m:t>
+                          </m:r>
+                          <m:r>
+                            <m:t>m</m:t>
+                          </m:r>
+                        </m:den>
+                      </m:f>
+                      <m:r>
+                        <m:rPr>
+                          <m:sty m:val="p"/>
+                        </m:rPr>
+                        <m:t>−</m:t>
+                      </m:r>
+                      <m:r>
+                        <m:t>μ</m:t>
+                      </m:r>
+                      <m:r>
+                        <m:rPr>
+                          <m:sty m:val="p"/>
+                        </m:rPr>
+                        <m:t>,</m:t>
+                      </m:r>
+                      <m:r>
+                        <m:t> </m:t>
+                      </m:r>
+                      <m:sSup>
+                        <m:e>
+                          <m:r>
+                            <m:t>k</m:t>
+                          </m:r>
+                        </m:e>
+                        <m:sup>
+                          <m:r>
+                            <m:t>2</m:t>
+                          </m:r>
+                        </m:sup>
+                      </m:sSup>
+                      <m:r>
+                        <m:rPr>
+                          <m:sty m:val="p"/>
+                        </m:rPr>
+                        <m:t>=</m:t>
+                      </m:r>
+                      <m:sSubSup>
+                        <m:e>
+                          <m:r>
+                            <m:t>k</m:t>
+                          </m:r>
+                        </m:e>
+                        <m:sub>
+                          <m:r>
+                            <m:t>x</m:t>
+                          </m:r>
+                        </m:sub>
+                        <m:sup>
+                          <m:r>
+                            <m:t>2</m:t>
+                          </m:r>
+                        </m:sup>
+                      </m:sSubSup>
+                      <m:r>
+                        <m:rPr>
+                          <m:sty m:val="p"/>
+                        </m:rPr>
+                        <m:t>+</m:t>
+                      </m:r>
+                      <m:sSubSup>
+                        <m:e>
+                          <m:r>
+                            <m:t>k</m:t>
+                          </m:r>
+                        </m:e>
+                        <m:sub>
+                          <m:r>
+                            <m:t>y</m:t>
+                          </m:r>
+                        </m:sub>
+                        <m:sup>
+                          <m:r>
+                            <m:t>2</m:t>
+                          </m:r>
+                        </m:sup>
+                      </m:sSubSup>
+                      <m:r>
+                        <m:rPr>
+                          <m:sty m:val="p"/>
+                        </m:rPr>
+                        <m:t>.</m:t>
+                      </m:r>
+                    </m:oMath>
+                  </m:oMathPara>
+                </a14:m>
+              </a:p>
+              <a:p>
+                <a:pPr lvl="0"/>
+                <a:r>
+                  <a:rPr/>
+                  <a:t>Symmetries:</a:t>
+                </a:r>
+              </a:p>
+              <a:p>
+                <a:pPr lvl="1"/>
+                <a:r>
+                  <a:rPr b="1"/>
+                  <a:t>Time-reversal symmetry (TRS)</a:t>
+                </a:r>
+                <a:r>
+                  <a:rPr/>
+                  <a:t>: preserved</a:t>
+                </a:r>
+              </a:p>
+              <a:p>
+                <a:pPr lvl="1"/>
+                <a:r>
+                  <a:rPr b="1"/>
+                  <a:t>Inversion / mirror symmetry</a:t>
+                </a:r>
+                <a:r>
+                  <a:rPr/>
+                  <a:t> (including </a:t>
+                </a:r>
+                <a14:m>
+                  <m:oMath xmlns:m="http://schemas.openxmlformats.org/officeDocument/2006/math">
+                    <m:r>
+                      <m:t>z</m:t>
+                    </m:r>
+                    <m:r>
+                      <m:rPr>
+                        <m:sty m:val="p"/>
+                      </m:rPr>
+                      <m:t>→</m:t>
+                    </m:r>
+                    <m:r>
+                      <m:rPr>
+                        <m:sty m:val="p"/>
+                      </m:rPr>
+                      <m:t>−</m:t>
+                    </m:r>
+                    <m:r>
+                      <m:t>z</m:t>
+                    </m:r>
+                  </m:oMath>
+                </a14:m>
+                <a:r>
+                  <a:rPr/>
+                  <a:t>): preserved if structure is centrosymmetric</a:t>
+                </a:r>
+              </a:p>
+              <a:p>
+                <a:pPr lvl="1"/>
+                <a:r>
+                  <a:rPr b="1"/>
+                  <a:t>Spin SU(2) symmetry</a:t>
+                </a:r>
+                <a:r>
+                  <a:rPr/>
+                  <a:t>: full spin-rotation invariance</a:t>
+                </a:r>
+              </a:p>
+              <a:p>
+                <a:pPr lvl="1"/>
+                <a:r>
+                  <a:rPr b="1"/>
+                  <a:t>In-plane rotational symmetry</a:t>
+                </a:r>
+                <a:r>
+                  <a:rPr/>
+                  <a:t> (if effective mass isotropic): approx. preserved</a:t>
+                </a:r>
+              </a:p>
+              <a:p>
+                <a:pPr lvl="0"/>
+                <a:r>
+                  <a:rPr/>
+                  <a:t>Physical picture:</a:t>
+                </a:r>
+              </a:p>
+              <a:p>
+                <a:pPr lvl="1"/>
+                <a:r>
+                  <a:rPr/>
+                  <a:t>Spin-degenerate parabolic bands</a:t>
+                </a:r>
+              </a:p>
+              <a:p>
+                <a:pPr lvl="1"/>
+                <a:r>
+                  <a:rPr/>
+                  <a:t>No spin–momentum locking; spin and momentum are independent</a:t>
+                </a:r>
+              </a:p>
+              <a:p>
+                <a:pPr lvl="0" indent="0" marL="0">
+                  <a:spcBef>
+                    <a:spcPts val="3000"/>
+                  </a:spcBef>
+                  <a:buNone/>
+                </a:pPr>
+                <a:r>
+                  <a:rPr b="1"/>
+                  <a:t>Rashba Term (</a:t>
+                </a:r>
+                <a14:m>
+                  <m:oMath xmlns:m="http://schemas.openxmlformats.org/officeDocument/2006/math">
+                    <m:sSub>
+                      <m:e>
+                        <m:r>
+                          <m:t>H</m:t>
+                        </m:r>
+                      </m:e>
+                      <m:sub>
+                        <m:r>
+                          <m:t>R</m:t>
+                        </m:r>
+                      </m:sub>
+                    </m:sSub>
+                  </m:oMath>
+                </a14:m>
+                <a:r>
+                  <a:rPr b="1"/>
+                  <a:t>): Origin and Form</a:t>
+                </a:r>
+              </a:p>
+              <a:p>
+                <a:pPr lvl="0"/>
+                <a:r>
+                  <a:rPr/>
+                  <a:t>Requires </a:t>
+                </a:r>
+                <a:r>
+                  <a:rPr b="1"/>
+                  <a:t>structural inversion asymmetry (SIA)</a:t>
+                </a:r>
+                <a:r>
+                  <a:rPr/>
+                  <a:t> + strong SOC</a:t>
+                </a:r>
+              </a:p>
+              <a:p>
+                <a:pPr lvl="0"/>
+                <a:r>
+                  <a:rPr/>
+                  <a:t>Rashba Hamiltonian:</a:t>
+                </a:r>
+              </a:p>
+              <a:p>
+                <a:pPr lvl="0"/>
+                <a14:m>
+                  <m:oMathPara xmlns:m="http://schemas.openxmlformats.org/officeDocument/2006/math">
+                    <m:oMathParaPr>
+                      <m:jc m:val="center"/>
+                    </m:oMathParaPr>
+                    <m:oMath>
+                      <m:sSub>
+                        <m:e>
+                          <m:r>
+                            <m:t>H</m:t>
+                          </m:r>
+                        </m:e>
+                        <m:sub>
+                          <m:r>
+                            <m:t>R</m:t>
+                          </m:r>
+                        </m:sub>
+                      </m:sSub>
+                      <m:r>
+                        <m:rPr>
+                          <m:sty m:val="p"/>
+                        </m:rPr>
+                        <m:t>=</m:t>
+                      </m:r>
+                      <m:sSub>
+                        <m:e>
+                          <m:r>
+                            <m:t>α</m:t>
+                          </m:r>
+                        </m:e>
+                        <m:sub>
+                          <m:r>
+                            <m:t>R</m:t>
+                          </m:r>
+                        </m:sub>
+                      </m:sSub>
+                      <m:d>
+                        <m:dPr>
+                          <m:begChr m:val="("/>
+                          <m:sepChr m:val=""/>
+                          <m:endChr m:val=")"/>
+                          <m:grow/>
+                        </m:dPr>
+                        <m:e>
+                          <m:r>
+                            <m:rPr>
+                              <m:sty m:val="b"/>
+                            </m:rPr>
+                            <m:t>σ</m:t>
+                          </m:r>
+                          <m:r>
+                            <m:rPr>
+                              <m:sty m:val="p"/>
+                            </m:rPr>
+                            <m:t>×</m:t>
+                          </m:r>
+                          <m:r>
+                            <m:rPr>
+                              <m:sty m:val="b"/>
+                            </m:rPr>
+                            <m:t>k</m:t>
+                          </m:r>
+                        </m:e>
+                      </m:d>
+                      <m:r>
+                        <m:rPr>
+                          <m:sty m:val="p"/>
+                        </m:rPr>
+                        <m:t>⋅</m:t>
+                      </m:r>
+                      <m:acc>
+                        <m:accPr>
+                          <m:chr m:val="̂"/>
+                        </m:accPr>
+                        <m:e>
+                          <m:r>
+                            <m:rPr>
+                              <m:sty m:val="b"/>
+                            </m:rPr>
+                            <m:t>z</m:t>
+                          </m:r>
+                        </m:e>
+                      </m:acc>
+                      <m:r>
+                        <m:rPr>
+                          <m:sty m:val="p"/>
+                        </m:rPr>
+                        <m:t>=</m:t>
+                      </m:r>
+                      <m:sSub>
+                        <m:e>
+                          <m:r>
+                            <m:t>α</m:t>
+                          </m:r>
+                        </m:e>
+                        <m:sub>
+                          <m:r>
+                            <m:t>R</m:t>
+                          </m:r>
+                        </m:sub>
+                      </m:sSub>
+                      <m:d>
+                        <m:dPr>
+                          <m:begChr m:val="("/>
+                          <m:sepChr m:val=""/>
+                          <m:endChr m:val=")"/>
+                          <m:grow/>
+                        </m:dPr>
+                        <m:e>
+                          <m:sSub>
+                            <m:e>
+                              <m:r>
+                                <m:t>k</m:t>
+                              </m:r>
+                            </m:e>
+                            <m:sub>
+                              <m:r>
+                                <m:t>y</m:t>
+                              </m:r>
+                            </m:sub>
+                          </m:sSub>
+                          <m:sSub>
+                            <m:e>
+                              <m:r>
+                                <m:t>σ</m:t>
+                              </m:r>
+                            </m:e>
+                            <m:sub>
+                              <m:r>
+                                <m:t>x</m:t>
+                              </m:r>
+                            </m:sub>
+                          </m:sSub>
+                          <m:r>
+                            <m:rPr>
+                              <m:sty m:val="p"/>
+                            </m:rPr>
+                            <m:t>−</m:t>
+                          </m:r>
+                          <m:sSub>
+                            <m:e>
+                              <m:r>
+                                <m:t>k</m:t>
+                              </m:r>
+                            </m:e>
+                            <m:sub>
+                              <m:r>
+                                <m:t>x</m:t>
+                              </m:r>
+                            </m:sub>
+                          </m:sSub>
+                          <m:sSub>
+                            <m:e>
+                              <m:r>
+                                <m:t>σ</m:t>
+                              </m:r>
+                            </m:e>
+                            <m:sub>
+                              <m:r>
+                                <m:t>y</m:t>
+                              </m:r>
+                            </m:sub>
+                          </m:sSub>
+                        </m:e>
+                      </m:d>
+                      <m:r>
+                        <m:rPr>
+                          <m:sty m:val="p"/>
+                        </m:rPr>
+                        <m:t>.</m:t>
+                      </m:r>
+                    </m:oMath>
+                  </m:oMathPara>
+                </a14:m>
+              </a:p>
+              <a:p>
+                <a:pPr lvl="0"/>
+                <a:r>
+                  <a:rPr/>
+                  <a:t>Parameters:</a:t>
+                </a:r>
+              </a:p>
+              <a:p>
+                <a:pPr lvl="1"/>
+                <a14:m>
+                  <m:oMath xmlns:m="http://schemas.openxmlformats.org/officeDocument/2006/math">
+                    <m:sSub>
+                      <m:e>
+                        <m:r>
+                          <m:t>α</m:t>
+                        </m:r>
+                      </m:e>
+                      <m:sub>
+                        <m:r>
+                          <m:t>R</m:t>
+                        </m:r>
+                      </m:sub>
+                    </m:sSub>
+                  </m:oMath>
+                </a14:m>
+                <a:r>
+                  <a:rPr/>
+                  <a:t>: Rashba coupling strength </a:t>
+                </a:r>
+                <a14:m>
+                  <m:oMath xmlns:m="http://schemas.openxmlformats.org/officeDocument/2006/math">
+                    <m:r>
+                      <m:rPr>
+                        <m:sty m:val="p"/>
+                      </m:rPr>
+                      <m:t>∝</m:t>
+                    </m:r>
+                  </m:oMath>
+                </a14:m>
+                <a:r>
+                  <a:rPr/>
+                  <a:t> interfacial electric field </a:t>
+                </a:r>
+                <a14:m>
+                  <m:oMath xmlns:m="http://schemas.openxmlformats.org/officeDocument/2006/math">
+                    <m:sSub>
+                      <m:e>
+                        <m:r>
+                          <m:t>E</m:t>
+                        </m:r>
+                      </m:e>
+                      <m:sub>
+                        <m:r>
+                          <m:t>z</m:t>
+                        </m:r>
+                      </m:sub>
+                    </m:sSub>
+                  </m:oMath>
+                </a14:m>
+              </a:p>
+              <a:p>
+                <a:pPr lvl="0"/>
+                <a:r>
+                  <a:rPr/>
+                  <a:t>Physical effect:</a:t>
+                </a:r>
+              </a:p>
+              <a:p>
+                <a:pPr lvl="1"/>
+                <a:r>
+                  <a:rPr b="1"/>
+                  <a:t>Spin–momentum locking in the plane</a:t>
+                </a:r>
+                <a:r>
+                  <a:rPr/>
+                  <a:t>:</a:t>
+                </a:r>
+              </a:p>
+              <a:p>
+                <a:pPr lvl="2"/>
+                <a:r>
+                  <a:rPr/>
+                  <a:t>Spin lies in-plane and perpendicular to momentum</a:t>
+                </a:r>
+              </a:p>
+              <a:p>
+                <a:pPr lvl="1"/>
+                <a:r>
+                  <a:rPr/>
+                  <a:t>Splits the spin-degenerate Fermi surface into two helically polarized Fermi circles</a:t>
+                </a:r>
+              </a:p>
+              <a:p>
+                <a:pPr lvl="0" indent="0" marL="0">
+                  <a:spcBef>
+                    <a:spcPts val="3000"/>
+                  </a:spcBef>
+                  <a:buNone/>
+                </a:pPr>
+                <a:r>
+                  <a:rPr b="1"/>
+                  <a:t>Rashba: Symmetry Breaking</a:t>
+                </a:r>
+              </a:p>
+              <a:p>
+                <a:pPr lvl="0"/>
+                <a:r>
+                  <a:rPr b="1"/>
+                  <a:t>Breaks structural inversion symmetry</a:t>
+                </a:r>
+                <a:r>
+                  <a:rPr/>
+                  <a:t> (SIA):</a:t>
+                </a:r>
+              </a:p>
+              <a:p>
+                <a:pPr lvl="1"/>
+                <a:r>
+                  <a:rPr/>
+                  <a:t>Under </a:t>
+                </a:r>
+                <a14:m>
+                  <m:oMath xmlns:m="http://schemas.openxmlformats.org/officeDocument/2006/math">
+                    <m:r>
+                      <m:t>z</m:t>
+                    </m:r>
+                    <m:r>
+                      <m:rPr>
+                        <m:sty m:val="p"/>
+                      </m:rPr>
+                      <m:t>→</m:t>
+                    </m:r>
+                    <m:r>
+                      <m:rPr>
+                        <m:sty m:val="p"/>
+                      </m:rPr>
+                      <m:t>−</m:t>
+                    </m:r>
+                    <m:r>
+                      <m:t>z</m:t>
+                    </m:r>
+                  </m:oMath>
+                </a14:m>
+                <a:r>
+                  <a:rPr/>
+                  <a:t>: interfacial electric field </a:t>
+                </a:r>
+                <a14:m>
+                  <m:oMath xmlns:m="http://schemas.openxmlformats.org/officeDocument/2006/math">
+                    <m:sSub>
+                      <m:e>
+                        <m:r>
+                          <m:t>E</m:t>
+                        </m:r>
+                      </m:e>
+                      <m:sub>
+                        <m:r>
+                          <m:t>z</m:t>
+                        </m:r>
+                      </m:sub>
+                    </m:sSub>
+                  </m:oMath>
+                </a14:m>
+                <a:r>
+                  <a:rPr/>
+                  <a:t> changes sign</a:t>
+                </a:r>
+              </a:p>
+              <a:p>
+                <a:pPr lvl="1"/>
+                <a:r>
+                  <a:rPr/>
+                  <a:t>Rashba coupling </a:t>
+                </a:r>
+                <a14:m>
+                  <m:oMath xmlns:m="http://schemas.openxmlformats.org/officeDocument/2006/math">
+                    <m:sSub>
+                      <m:e>
+                        <m:r>
+                          <m:t>α</m:t>
+                        </m:r>
+                      </m:e>
+                      <m:sub>
+                        <m:r>
+                          <m:t>R</m:t>
+                        </m:r>
+                      </m:sub>
+                    </m:sSub>
+                  </m:oMath>
+                </a14:m>
+                <a:r>
+                  <a:rPr/>
+                  <a:t> changes sign → </a:t>
+                </a:r>
+                <a14:m>
+                  <m:oMath xmlns:m="http://schemas.openxmlformats.org/officeDocument/2006/math">
+                    <m:sSub>
+                      <m:e>
+                        <m:r>
+                          <m:t>H</m:t>
+                        </m:r>
+                      </m:e>
+                      <m:sub>
+                        <m:r>
+                          <m:t>R</m:t>
+                        </m:r>
+                      </m:sub>
+                    </m:sSub>
+                  </m:oMath>
+                </a14:m>
+                <a:r>
+                  <a:rPr/>
+                  <a:t> is not inversion-invariant</a:t>
+                </a:r>
+              </a:p>
+              <a:p>
+                <a:pPr lvl="0"/>
+                <a:r>
+                  <a:rPr b="1"/>
+                  <a:t>Breaks full spin SU(2) symmetry</a:t>
+                </a:r>
+                <a:r>
+                  <a:rPr/>
+                  <a:t>:</a:t>
+                </a:r>
+              </a:p>
+              <a:p>
+                <a:pPr lvl="1"/>
+                <a:r>
+                  <a:rPr/>
+                  <a:t>Spin no longer freely rotates; spin orientation is tied to momentum direction</a:t>
+                </a:r>
+              </a:p>
+              <a:p>
+                <a:pPr lvl="1"/>
+                <a:r>
+                  <a:rPr/>
+                  <a:t>Only combined spin–orbital rotations may remain as approximate symmetries</a:t>
+                </a:r>
+              </a:p>
+              <a:p>
+                <a:pPr lvl="0"/>
+                <a:r>
+                  <a:rPr b="1"/>
+                  <a:t>Preserves time-reversal symmetry (TRS)</a:t>
+                </a:r>
+                <a:r>
+                  <a:rPr/>
+                  <a:t>:</a:t>
+                </a:r>
+              </a:p>
+              <a:p>
+                <a:pPr lvl="1"/>
+                <a:r>
+                  <a:rPr/>
+                  <a:t>Under </a:t>
+                </a:r>
+                <a14:m>
+                  <m:oMath xmlns:m="http://schemas.openxmlformats.org/officeDocument/2006/math">
+                    <m:r>
+                      <m:rPr>
+                        <m:sty m:val="p"/>
+                        <m:scr m:val="script"/>
+                      </m:rPr>
+                      <m:t>T</m:t>
+                    </m:r>
+                  </m:oMath>
+                </a14:m>
+                <a:r>
+                  <a:rPr/>
+                  <a:t>: </a:t>
+                </a:r>
+                <a14:m>
+                  <m:oMath xmlns:m="http://schemas.openxmlformats.org/officeDocument/2006/math">
+                    <m:r>
+                      <m:rPr>
+                        <m:sty m:val="b"/>
+                      </m:rPr>
+                      <m:t>k</m:t>
+                    </m:r>
+                    <m:r>
+                      <m:rPr>
+                        <m:sty m:val="p"/>
+                      </m:rPr>
+                      <m:t>→</m:t>
+                    </m:r>
+                    <m:r>
+                      <m:rPr>
+                        <m:sty m:val="p"/>
+                      </m:rPr>
+                      <m:t>−</m:t>
+                    </m:r>
+                    <m:r>
+                      <m:rPr>
+                        <m:sty m:val="b"/>
+                      </m:rPr>
+                      <m:t>k</m:t>
+                    </m:r>
+                  </m:oMath>
+                </a14:m>
+                <a:r>
+                  <a:rPr/>
+                  <a:t>, </a:t>
+                </a:r>
+                <a14:m>
+                  <m:oMath xmlns:m="http://schemas.openxmlformats.org/officeDocument/2006/math">
+                    <m:r>
+                      <m:rPr>
+                        <m:sty m:val="b"/>
+                      </m:rPr>
+                      <m:t>σ</m:t>
+                    </m:r>
+                    <m:r>
+                      <m:rPr>
+                        <m:sty m:val="p"/>
+                      </m:rPr>
+                      <m:t>→</m:t>
+                    </m:r>
+                    <m:r>
+                      <m:rPr>
+                        <m:sty m:val="p"/>
+                      </m:rPr>
+                      <m:t>−</m:t>
+                    </m:r>
+                    <m:r>
+                      <m:rPr>
+                        <m:sty m:val="b"/>
+                      </m:rPr>
+                      <m:t>σ</m:t>
+                    </m:r>
+                  </m:oMath>
+                </a14:m>
+              </a:p>
+              <a:p>
+                <a:pPr lvl="1"/>
+                <a14:m>
+                  <m:oMath xmlns:m="http://schemas.openxmlformats.org/officeDocument/2006/math">
+                    <m:sSub>
+                      <m:e>
+                        <m:r>
+                          <m:t>H</m:t>
+                        </m:r>
+                      </m:e>
+                      <m:sub>
+                        <m:r>
+                          <m:t>R</m:t>
+                        </m:r>
+                      </m:sub>
+                    </m:sSub>
+                    <m:d>
+                      <m:dPr>
+                        <m:begChr m:val="("/>
+                        <m:sepChr m:val=""/>
+                        <m:endChr m:val=")"/>
+                        <m:grow/>
+                      </m:dPr>
+                      <m:e>
+                        <m:r>
+                          <m:rPr>
+                            <m:sty m:val="b"/>
+                          </m:rPr>
+                          <m:t>k</m:t>
+                        </m:r>
+                      </m:e>
+                    </m:d>
+                    <m:r>
+                      <m:rPr>
+                        <m:sty m:val="p"/>
+                      </m:rPr>
+                      <m:t>→</m:t>
+                    </m:r>
+                    <m:sSub>
+                      <m:e>
+                        <m:r>
+                          <m:t>H</m:t>
+                        </m:r>
+                      </m:e>
+                      <m:sub>
+                        <m:r>
+                          <m:t>R</m:t>
+                        </m:r>
+                      </m:sub>
+                    </m:sSub>
+                    <m:d>
+                      <m:dPr>
+                        <m:begChr m:val="("/>
+                        <m:sepChr m:val=""/>
+                        <m:endChr m:val=")"/>
+                        <m:grow/>
+                      </m:dPr>
+                      <m:e>
+                        <m:r>
+                          <m:rPr>
+                            <m:sty m:val="p"/>
+                          </m:rPr>
+                          <m:t>−</m:t>
+                        </m:r>
+                        <m:r>
+                          <m:rPr>
+                            <m:sty m:val="b"/>
+                          </m:rPr>
+                          <m:t>k</m:t>
+                        </m:r>
+                      </m:e>
+                    </m:d>
+                  </m:oMath>
+                </a14:m>
+                <a:r>
+                  <a:rPr/>
+                  <a:t> → TRS holds</a:t>
+                </a:r>
+              </a:p>
+              <a:p>
+                <a:pPr lvl="1"/>
+                <a:r>
+                  <a:rPr/>
+                  <a:t>Kramers degeneracy: states at </a:t>
+                </a:r>
+                <a14:m>
+                  <m:oMath xmlns:m="http://schemas.openxmlformats.org/officeDocument/2006/math">
+                    <m:r>
+                      <m:rPr>
+                        <m:sty m:val="b"/>
+                      </m:rPr>
+                      <m:t>k</m:t>
+                    </m:r>
+                  </m:oMath>
+                </a14:m>
+                <a:r>
+                  <a:rPr/>
+                  <a:t> and </a:t>
+                </a:r>
+                <a14:m>
+                  <m:oMath xmlns:m="http://schemas.openxmlformats.org/officeDocument/2006/math">
+                    <m:r>
+                      <m:rPr>
+                        <m:sty m:val="p"/>
+                      </m:rPr>
+                      <m:t>−</m:t>
+                    </m:r>
+                    <m:r>
+                      <m:rPr>
+                        <m:sty m:val="b"/>
+                      </m:rPr>
+                      <m:t>k</m:t>
+                    </m:r>
+                  </m:oMath>
+                </a14:m>
+                <a:r>
+                  <a:rPr/>
+                  <a:t> remain degenerate</a:t>
+                </a:r>
+              </a:p>
+              <a:p>
+                <a:pPr lvl="0" indent="0" marL="0">
+                  <a:spcBef>
+                    <a:spcPts val="3000"/>
+                  </a:spcBef>
+                  <a:buNone/>
+                </a:pPr>
+                <a:r>
+                  <a:rPr b="1"/>
+                  <a:t>Zeeman Term (</a:t>
+                </a:r>
+                <a14:m>
+                  <m:oMath xmlns:m="http://schemas.openxmlformats.org/officeDocument/2006/math">
+                    <m:sSub>
+                      <m:e>
+                        <m:r>
+                          <m:t>H</m:t>
+                        </m:r>
+                      </m:e>
+                      <m:sub>
+                        <m:r>
+                          <m:t>Z</m:t>
+                        </m:r>
+                      </m:sub>
+                    </m:sSub>
+                  </m:oMath>
+                </a14:m>
+                <a:r>
+                  <a:rPr b="1"/>
+                  <a:t>): Origin and Form</a:t>
+                </a:r>
+              </a:p>
+              <a:p>
+                <a:pPr lvl="0"/>
+                <a:r>
+                  <a:rPr/>
+                  <a:t>External magnetic field </a:t>
+                </a:r>
+                <a14:m>
+                  <m:oMath xmlns:m="http://schemas.openxmlformats.org/officeDocument/2006/math">
+                    <m:r>
+                      <m:rPr>
+                        <m:sty m:val="b"/>
+                      </m:rPr>
+                      <m:t>B</m:t>
+                    </m:r>
+                  </m:oMath>
+                </a14:m>
+                <a:r>
+                  <a:rPr/>
+                  <a:t> couples to spin:</a:t>
+                </a:r>
+              </a:p>
+              <a:p>
+                <a:pPr lvl="0"/>
+                <a14:m>
+                  <m:oMathPara xmlns:m="http://schemas.openxmlformats.org/officeDocument/2006/math">
+                    <m:oMathParaPr>
+                      <m:jc m:val="center"/>
+                    </m:oMathParaPr>
+                    <m:oMath>
+                      <m:sSub>
+                        <m:e>
+                          <m:r>
+                            <m:t>H</m:t>
+                          </m:r>
+                        </m:e>
+                        <m:sub>
+                          <m:r>
+                            <m:t>Z</m:t>
+                          </m:r>
+                        </m:sub>
+                      </m:sSub>
+                      <m:r>
+                        <m:rPr>
+                          <m:sty m:val="p"/>
+                        </m:rPr>
+                        <m:t>=</m:t>
+                      </m:r>
+                      <m:f>
+                        <m:fPr>
+                          <m:type m:val="bar"/>
+                        </m:fPr>
+                        <m:num>
+                          <m:r>
+                            <m:t>1</m:t>
+                          </m:r>
+                        </m:num>
+                        <m:den>
+                          <m:r>
+                            <m:t>2</m:t>
+                          </m:r>
+                        </m:den>
+                      </m:f>
+                      <m:r>
+                        <m:t>g</m:t>
+                      </m:r>
+                      <m:sSub>
+                        <m:e>
+                          <m:r>
+                            <m:t>μ</m:t>
+                          </m:r>
+                        </m:e>
+                        <m:sub>
+                          <m:r>
+                            <m:t>B</m:t>
+                          </m:r>
+                        </m:sub>
+                      </m:sSub>
+                      <m:r>
+                        <m:rPr>
+                          <m:sty m:val="b"/>
+                        </m:rPr>
+                        <m:t>B</m:t>
+                      </m:r>
+                      <m:r>
+                        <m:rPr>
+                          <m:sty m:val="p"/>
+                        </m:rPr>
+                        <m:t>⋅</m:t>
+                      </m:r>
+                      <m:r>
+                        <m:rPr>
+                          <m:sty m:val="b"/>
+                        </m:rPr>
+                        <m:t>σ</m:t>
+                      </m:r>
+                      <m:r>
+                        <m:rPr>
+                          <m:sty m:val="p"/>
+                        </m:rPr>
+                        <m:t>=</m:t>
+                      </m:r>
+                      <m:f>
+                        <m:fPr>
+                          <m:type m:val="bar"/>
+                        </m:fPr>
+                        <m:num>
+                          <m:r>
+                            <m:t>1</m:t>
+                          </m:r>
+                        </m:num>
+                        <m:den>
+                          <m:r>
+                            <m:t>2</m:t>
+                          </m:r>
+                        </m:den>
+                      </m:f>
+                      <m:r>
+                        <m:t>g</m:t>
+                      </m:r>
+                      <m:sSub>
+                        <m:e>
+                          <m:r>
+                            <m:t>μ</m:t>
+                          </m:r>
+                        </m:e>
+                        <m:sub>
+                          <m:r>
+                            <m:t>B</m:t>
+                          </m:r>
+                        </m:sub>
+                      </m:sSub>
+                      <m:d>
+                        <m:dPr>
+                          <m:begChr m:val="("/>
+                          <m:sepChr m:val=""/>
+                          <m:endChr m:val=")"/>
+                          <m:grow/>
+                        </m:dPr>
+                        <m:e>
+                          <m:sSub>
+                            <m:e>
+                              <m:r>
+                                <m:t>B</m:t>
+                              </m:r>
+                            </m:e>
+                            <m:sub>
+                              <m:r>
+                                <m:t>x</m:t>
+                              </m:r>
+                            </m:sub>
+                          </m:sSub>
+                          <m:sSub>
+                            <m:e>
+                              <m:r>
+                                <m:t>σ</m:t>
+                              </m:r>
+                            </m:e>
+                            <m:sub>
+                              <m:r>
+                                <m:t>x</m:t>
+                              </m:r>
+                            </m:sub>
+                          </m:sSub>
+                          <m:r>
+                            <m:rPr>
+                              <m:sty m:val="p"/>
+                            </m:rPr>
+                            <m:t>+</m:t>
+                          </m:r>
+                          <m:sSub>
+                            <m:e>
+                              <m:r>
+                                <m:t>B</m:t>
+                              </m:r>
+                            </m:e>
+                            <m:sub>
+                              <m:r>
+                                <m:t>y</m:t>
+                              </m:r>
+                            </m:sub>
+                          </m:sSub>
+                          <m:sSub>
+                            <m:e>
+                              <m:r>
+                                <m:t>σ</m:t>
+                              </m:r>
+                            </m:e>
+                            <m:sub>
+                              <m:r>
+                                <m:t>y</m:t>
+                              </m:r>
+                            </m:sub>
+                          </m:sSub>
+                          <m:r>
+                            <m:rPr>
+                              <m:sty m:val="p"/>
+                            </m:rPr>
+                            <m:t>+</m:t>
+                          </m:r>
+                          <m:sSub>
+                            <m:e>
+                              <m:r>
+                                <m:t>B</m:t>
+                              </m:r>
+                            </m:e>
+                            <m:sub>
+                              <m:r>
+                                <m:t>z</m:t>
+                              </m:r>
+                            </m:sub>
+                          </m:sSub>
+                          <m:sSub>
+                            <m:e>
+                              <m:r>
+                                <m:t>σ</m:t>
+                              </m:r>
+                            </m:e>
+                            <m:sub>
+                              <m:r>
+                                <m:t>z</m:t>
+                              </m:r>
+                            </m:sub>
+                          </m:sSub>
+                        </m:e>
+                      </m:d>
+                      <m:r>
+                        <m:rPr>
+                          <m:sty m:val="p"/>
+                        </m:rPr>
+                        <m:t>.</m:t>
+                      </m:r>
+                    </m:oMath>
+                  </m:oMathPara>
+                </a14:m>
+              </a:p>
+              <a:p>
+                <a:pPr lvl="0"/>
+                <a:r>
+                  <a:rPr/>
+                  <a:t>Examples:</a:t>
+                </a:r>
+              </a:p>
+              <a:p>
+                <a:pPr lvl="1"/>
+                <a:r>
+                  <a:rPr/>
+                  <a:t>In-plane field along </a:t>
+                </a:r>
+                <a14:m>
+                  <m:oMath xmlns:m="http://schemas.openxmlformats.org/officeDocument/2006/math">
+                    <m:r>
+                      <m:t>y</m:t>
+                    </m:r>
+                  </m:oMath>
+                </a14:m>
+                <a:r>
+                  <a:rPr/>
+                  <a:t>: </a:t>
+                </a:r>
+                <a14:m>
+                  <m:oMath xmlns:m="http://schemas.openxmlformats.org/officeDocument/2006/math">
+                    <m:sSubSup>
+                      <m:e>
+                        <m:r>
+                          <m:t>H</m:t>
+                        </m:r>
+                      </m:e>
+                      <m:sub>
+                        <m:r>
+                          <m:t>Z</m:t>
+                        </m:r>
+                      </m:sub>
+                      <m:sup>
+                        <m:d>
+                          <m:dPr>
+                            <m:begChr m:val="("/>
+                            <m:sepChr m:val=""/>
+                            <m:endChr m:val=")"/>
+                            <m:grow/>
+                          </m:dPr>
+                          <m:e>
+                            <m:r>
+                              <m:t>y</m:t>
+                            </m:r>
+                          </m:e>
+                        </m:d>
+                      </m:sup>
+                    </m:sSubSup>
+                    <m:r>
+                      <m:rPr>
+                        <m:sty m:val="p"/>
+                      </m:rPr>
+                      <m:t>=</m:t>
+                    </m:r>
+                    <m:f>
+                      <m:fPr>
+                        <m:type m:val="lin"/>
+                      </m:fPr>
+                      <m:num>
+                        <m:r>
+                          <m:t>1</m:t>
+                        </m:r>
+                      </m:num>
+                      <m:den>
+                        <m:r>
+                          <m:t>2</m:t>
+                        </m:r>
+                      </m:den>
+                    </m:f>
+                    <m:r>
+                      <m:t>g</m:t>
+                    </m:r>
+                    <m:sSub>
+                      <m:e>
+                        <m:r>
+                          <m:t>μ</m:t>
+                        </m:r>
+                      </m:e>
+                      <m:sub>
+                        <m:r>
+                          <m:t>B</m:t>
+                        </m:r>
+                      </m:sub>
+                    </m:sSub>
+                    <m:sSub>
+                      <m:e>
+                        <m:r>
+                          <m:t>B</m:t>
+                        </m:r>
+                      </m:e>
+                      <m:sub>
+                        <m:r>
+                          <m:t>y</m:t>
+                        </m:r>
+                      </m:sub>
+                    </m:sSub>
+                    <m:sSub>
+                      <m:e>
+                        <m:r>
+                          <m:t>σ</m:t>
+                        </m:r>
+                      </m:e>
+                      <m:sub>
+                        <m:r>
+                          <m:t>y</m:t>
+                        </m:r>
+                      </m:sub>
+                    </m:sSub>
+                  </m:oMath>
+                </a14:m>
+                <a:r>
+                  <a:rPr/>
+                  <a:t>.</a:t>
+                </a:r>
+              </a:p>
+              <a:p>
+                <a:pPr lvl="0"/>
+                <a:r>
+                  <a:rPr/>
+                  <a:t>Physical effects:</a:t>
+                </a:r>
+              </a:p>
+              <a:p>
+                <a:pPr lvl="1"/>
+                <a:r>
+                  <a:rPr/>
+                  <a:t>Spin-splitting of bands</a:t>
+                </a:r>
+              </a:p>
+              <a:p>
+                <a:pPr lvl="1"/>
+                <a:r>
+                  <a:rPr/>
+                  <a:t>Polarization of spins along </a:t>
+                </a:r>
+                <a14:m>
+                  <m:oMath xmlns:m="http://schemas.openxmlformats.org/officeDocument/2006/math">
+                    <m:r>
+                      <m:rPr>
+                        <m:sty m:val="b"/>
+                      </m:rPr>
+                      <m:t>B</m:t>
+                    </m:r>
+                  </m:oMath>
+                </a14:m>
+              </a:p>
+              <a:p>
+                <a:pPr lvl="1"/>
+                <a:r>
+                  <a:rPr/>
+                  <a:t>Modifies Fermi surfaces for spin-up and spin-down differently</a:t>
+                </a:r>
+              </a:p>
+              <a:p>
+                <a:pPr lvl="0" indent="0" marL="0">
+                  <a:spcBef>
+                    <a:spcPts val="3000"/>
+                  </a:spcBef>
+                  <a:buNone/>
+                </a:pPr>
+                <a:r>
+                  <a:rPr b="1"/>
+                  <a:t>Zeeman: Symmetry Breaking</a:t>
+                </a:r>
+              </a:p>
+              <a:p>
+                <a:pPr lvl="0"/>
+                <a:r>
+                  <a:rPr b="1"/>
+                  <a:t>Breaks time-reversal symmetry (TRS)</a:t>
+                </a:r>
+                <a:r>
+                  <a:rPr/>
+                  <a:t>:</a:t>
+                </a:r>
+              </a:p>
+              <a:p>
+                <a:pPr lvl="1"/>
+                <a:r>
+                  <a:rPr/>
+                  <a:t>Magnetic field </a:t>
+                </a:r>
+                <a14:m>
+                  <m:oMath xmlns:m="http://schemas.openxmlformats.org/officeDocument/2006/math">
+                    <m:r>
+                      <m:rPr>
+                        <m:sty m:val="b"/>
+                      </m:rPr>
+                      <m:t>B</m:t>
+                    </m:r>
+                  </m:oMath>
+                </a14:m>
+                <a:r>
+                  <a:rPr/>
+                  <a:t> is odd under time reversal</a:t>
+                </a:r>
+              </a:p>
+              <a:p>
+                <a:pPr lvl="1"/>
+                <a:r>
+                  <a:rPr/>
+                  <a:t>With </a:t>
+                </a:r>
+                <a14:m>
+                  <m:oMath xmlns:m="http://schemas.openxmlformats.org/officeDocument/2006/math">
+                    <m:r>
+                      <m:rPr>
+                        <m:sty m:val="b"/>
+                      </m:rPr>
+                      <m:t>B</m:t>
+                    </m:r>
+                    <m:r>
+                      <m:rPr>
+                        <m:sty m:val="p"/>
+                      </m:rPr>
+                      <m:t>≠</m:t>
+                    </m:r>
+                    <m:r>
+                      <m:t>0</m:t>
+                    </m:r>
+                  </m:oMath>
+                </a14:m>
+                <a:r>
+                  <a:rPr/>
+                  <a:t>, the system is no longer invariant under </a:t>
+                </a:r>
+                <a14:m>
+                  <m:oMath xmlns:m="http://schemas.openxmlformats.org/officeDocument/2006/math">
+                    <m:r>
+                      <m:rPr>
+                        <m:sty m:val="p"/>
+                        <m:scr m:val="script"/>
+                      </m:rPr>
+                      <m:t>T</m:t>
+                    </m:r>
+                  </m:oMath>
+                </a14:m>
+              </a:p>
+              <a:p>
+                <a:pPr lvl="1"/>
+                <a:r>
+                  <a:rPr/>
+                  <a:t>Lifts Kramers degeneracy</a:t>
+                </a:r>
+              </a:p>
+              <a:p>
+                <a:pPr lvl="0"/>
+                <a:r>
+                  <a:rPr b="1"/>
+                  <a:t>Reduces spin SU(2) to U(1)</a:t>
+                </a:r>
+                <a:r>
+                  <a:rPr/>
+                  <a:t>:</a:t>
+                </a:r>
+              </a:p>
+              <a:p>
+                <a:pPr lvl="1"/>
+                <a:r>
+                  <a:rPr/>
+                  <a:t>Only spin rotations about the </a:t>
+                </a:r>
+                <a14:m>
+                  <m:oMath xmlns:m="http://schemas.openxmlformats.org/officeDocument/2006/math">
+                    <m:r>
+                      <m:rPr>
+                        <m:sty m:val="b"/>
+                      </m:rPr>
+                      <m:t>B</m:t>
+                    </m:r>
+                  </m:oMath>
+                </a14:m>
+                <a:r>
+                  <a:rPr/>
+                  <a:t> axis remain symmetric</a:t>
+                </a:r>
+              </a:p>
+              <a:p>
+                <a:pPr lvl="1"/>
+                <a:r>
+                  <a:rPr/>
+                  <a:t>Spin is preferentially aligned parallel or antiparallel to </a:t>
+                </a:r>
+                <a14:m>
+                  <m:oMath xmlns:m="http://schemas.openxmlformats.org/officeDocument/2006/math">
+                    <m:r>
+                      <m:rPr>
+                        <m:sty m:val="b"/>
+                      </m:rPr>
+                      <m:t>B</m:t>
+                    </m:r>
+                  </m:oMath>
+                </a14:m>
+              </a:p>
+              <a:p>
+                <a:pPr lvl="0"/>
+                <a:r>
+                  <a:rPr b="1"/>
+                  <a:t>Spatial symmetries</a:t>
+                </a:r>
+                <a:r>
+                  <a:rPr/>
+                  <a:t>:</a:t>
+                </a:r>
+              </a:p>
+              <a:p>
+                <a:pPr lvl="1"/>
+                <a:r>
+                  <a:rPr/>
+                  <a:t>Depending on the crystal, </a:t>
+                </a:r>
+                <a14:m>
+                  <m:oMath xmlns:m="http://schemas.openxmlformats.org/officeDocument/2006/math">
+                    <m:r>
+                      <m:rPr>
+                        <m:sty m:val="b"/>
+                      </m:rPr>
+                      <m:t>B</m:t>
+                    </m:r>
+                  </m:oMath>
+                </a14:m>
+                <a:r>
+                  <a:rPr/>
+                  <a:t> selects a preferred axis</a:t>
+                </a:r>
+              </a:p>
+              <a:p>
+                <a:pPr lvl="1"/>
+                <a:r>
+                  <a:rPr/>
+                  <a:t>May break certain rotational or mirror symmetries (e.g. in-plane mirrors) depending on direction of </a:t>
+                </a:r>
+                <a14:m>
+                  <m:oMath xmlns:m="http://schemas.openxmlformats.org/officeDocument/2006/math">
+                    <m:r>
+                      <m:rPr>
+                        <m:sty m:val="b"/>
+                      </m:rPr>
+                      <m:t>B</m:t>
+                    </m:r>
+                  </m:oMath>
+                </a14:m>
+              </a:p>
+              <a:p>
+                <a:pPr lvl="0" indent="0" marL="0">
+                  <a:spcBef>
+                    <a:spcPts val="3000"/>
+                  </a:spcBef>
+                  <a:buNone/>
+                </a:pPr>
+                <a:r>
+                  <a:rPr b="1"/>
+                  <a:t>Rashba + Zeeman Together</a:t>
+                </a:r>
+              </a:p>
+              <a:p>
+                <a:pPr lvl="0"/>
+                <a:r>
+                  <a:rPr/>
+                  <a:t>Combined Hamiltonian:</a:t>
+                </a:r>
+              </a:p>
+              <a:p>
+                <a:pPr lvl="0"/>
+                <a14:m>
+                  <m:oMathPara xmlns:m="http://schemas.openxmlformats.org/officeDocument/2006/math">
+                    <m:oMathParaPr>
+                      <m:jc m:val="center"/>
+                    </m:oMathParaPr>
+                    <m:oMath>
+                      <m:r>
+                        <m:t>H</m:t>
+                      </m:r>
+                      <m:d>
+                        <m:dPr>
+                          <m:begChr m:val="("/>
+                          <m:sepChr m:val=""/>
+                          <m:endChr m:val=")"/>
+                          <m:grow/>
+                        </m:dPr>
+                        <m:e>
+                          <m:r>
+                            <m:rPr>
+                              <m:sty m:val="b"/>
+                            </m:rPr>
+                            <m:t>k</m:t>
+                          </m:r>
+                        </m:e>
+                      </m:d>
+                      <m:r>
+                        <m:rPr>
+                          <m:sty m:val="p"/>
+                        </m:rPr>
+                        <m:t>=</m:t>
+                      </m:r>
+                      <m:f>
+                        <m:fPr>
+                          <m:type m:val="bar"/>
+                        </m:fPr>
+                        <m:num>
+                          <m:sSup>
+                            <m:e>
+                              <m:r>
+                                <m:rPr>
+                                  <m:sty m:val="p"/>
+                                </m:rPr>
+                                <m:t>ℏ</m:t>
+                              </m:r>
+                            </m:e>
+                            <m:sup>
+                              <m:r>
+                                <m:t>2</m:t>
+                              </m:r>
+                            </m:sup>
+                          </m:sSup>
+                          <m:sSup>
+                            <m:e>
+                              <m:r>
+                                <m:t>k</m:t>
+                              </m:r>
+                            </m:e>
+                            <m:sup>
+                              <m:r>
+                                <m:t>2</m:t>
+                              </m:r>
+                            </m:sup>
+                          </m:sSup>
+                        </m:num>
+                        <m:den>
+                          <m:r>
+                            <m:t>2</m:t>
+                          </m:r>
+                          <m:r>
+                            <m:t>m</m:t>
+                          </m:r>
+                        </m:den>
+                      </m:f>
+                      <m:r>
+                        <m:rPr>
+                          <m:sty m:val="p"/>
+                        </m:rPr>
+                        <m:t>−</m:t>
+                      </m:r>
+                      <m:r>
+                        <m:t>μ</m:t>
+                      </m:r>
+                      <m:r>
+                        <m:rPr>
+                          <m:sty m:val="p"/>
+                        </m:rPr>
+                        <m:t>+</m:t>
+                      </m:r>
+                      <m:sSub>
+                        <m:e>
+                          <m:r>
+                            <m:t>α</m:t>
+                          </m:r>
+                        </m:e>
+                        <m:sub>
+                          <m:r>
+                            <m:t>R</m:t>
+                          </m:r>
+                        </m:sub>
+                      </m:sSub>
+                      <m:d>
+                        <m:dPr>
+                          <m:begChr m:val="("/>
+                          <m:sepChr m:val=""/>
+                          <m:endChr m:val=")"/>
+                          <m:grow/>
+                        </m:dPr>
+                        <m:e>
+                          <m:sSub>
+                            <m:e>
+                              <m:r>
+                                <m:t>k</m:t>
+                              </m:r>
+                            </m:e>
+                            <m:sub>
+                              <m:r>
+                                <m:t>y</m:t>
+                              </m:r>
+                            </m:sub>
+                          </m:sSub>
+                          <m:sSub>
+                            <m:e>
+                              <m:r>
+                                <m:t>σ</m:t>
+                              </m:r>
+                            </m:e>
+                            <m:sub>
+                              <m:r>
+                                <m:t>x</m:t>
+                              </m:r>
+                            </m:sub>
+                          </m:sSub>
+                          <m:r>
+                            <m:rPr>
+                              <m:sty m:val="p"/>
+                            </m:rPr>
+                            <m:t>−</m:t>
+                          </m:r>
+                          <m:sSub>
+                            <m:e>
+                              <m:r>
+                                <m:t>k</m:t>
+                              </m:r>
+                            </m:e>
+                            <m:sub>
+                              <m:r>
+                                <m:t>x</m:t>
+                              </m:r>
+                            </m:sub>
+                          </m:sSub>
+                          <m:sSub>
+                            <m:e>
+                              <m:r>
+                                <m:t>σ</m:t>
+                              </m:r>
+                            </m:e>
+                            <m:sub>
+                              <m:r>
+                                <m:t>y</m:t>
+                              </m:r>
+                            </m:sub>
+                          </m:sSub>
+                        </m:e>
+                      </m:d>
+                      <m:r>
+                        <m:rPr>
+                          <m:sty m:val="p"/>
+                        </m:rPr>
+                        <m:t>+</m:t>
+                      </m:r>
+                      <m:f>
+                        <m:fPr>
+                          <m:type m:val="bar"/>
+                        </m:fPr>
+                        <m:num>
+                          <m:r>
+                            <m:t>1</m:t>
+                          </m:r>
+                        </m:num>
+                        <m:den>
+                          <m:r>
+                            <m:t>2</m:t>
+                          </m:r>
+                        </m:den>
+                      </m:f>
+                      <m:r>
+                        <m:t>g</m:t>
+                      </m:r>
+                      <m:sSub>
+                        <m:e>
+                          <m:r>
+                            <m:t>μ</m:t>
+                          </m:r>
+                        </m:e>
+                        <m:sub>
+                          <m:r>
+                            <m:t>B</m:t>
+                          </m:r>
+                        </m:sub>
+                      </m:sSub>
+                      <m:r>
+                        <m:rPr>
+                          <m:sty m:val="b"/>
+                        </m:rPr>
+                        <m:t>B</m:t>
+                      </m:r>
+                      <m:r>
+                        <m:rPr>
+                          <m:sty m:val="p"/>
+                        </m:rPr>
+                        <m:t>⋅</m:t>
+                      </m:r>
+                      <m:r>
+                        <m:rPr>
+                          <m:sty m:val="b"/>
+                        </m:rPr>
+                        <m:t>σ</m:t>
+                      </m:r>
+                      <m:r>
+                        <m:rPr>
+                          <m:sty m:val="p"/>
+                        </m:rPr>
+                        <m:t>.</m:t>
+                      </m:r>
+                    </m:oMath>
+                  </m:oMathPara>
+                </a14:m>
+              </a:p>
+              <a:p>
+                <a:pPr lvl="0"/>
+                <a:r>
+                  <a:rPr/>
+                  <a:t>Symmetry summary:</a:t>
+                </a:r>
+              </a:p>
+              <a:p>
+                <a:pPr lvl="1"/>
+                <a:r>
+                  <a:rPr b="1"/>
+                  <a:t>Inversion symmetry</a:t>
+                </a:r>
+                <a:r>
+                  <a:rPr/>
+                  <a:t> (along </a:t>
+                </a:r>
+                <a14:m>
+                  <m:oMath xmlns:m="http://schemas.openxmlformats.org/officeDocument/2006/math">
+                    <m:r>
+                      <m:t>z</m:t>
+                    </m:r>
+                  </m:oMath>
+                </a14:m>
+                <a:r>
+                  <a:rPr/>
+                  <a:t>): broken by Rashba</a:t>
+                </a:r>
+              </a:p>
+              <a:p>
+                <a:pPr lvl="1"/>
+                <a:r>
+                  <a:rPr b="1"/>
+                  <a:t>Time-reversal symmetry</a:t>
+                </a:r>
+                <a:r>
+                  <a:rPr/>
+                  <a:t>: broken by Zeeman (finite </a:t>
+                </a:r>
+                <a14:m>
+                  <m:oMath xmlns:m="http://schemas.openxmlformats.org/officeDocument/2006/math">
+                    <m:r>
+                      <m:rPr>
+                        <m:sty m:val="b"/>
+                      </m:rPr>
+                      <m:t>B</m:t>
+                    </m:r>
+                  </m:oMath>
+                </a14:m>
+                <a:r>
+                  <a:rPr/>
+                  <a:t>)</a:t>
+                </a:r>
+              </a:p>
+              <a:p>
+                <a:pPr lvl="1"/>
+                <a:r>
+                  <a:rPr b="1"/>
+                  <a:t>Spin SU(2)</a:t>
+                </a:r>
+                <a:r>
+                  <a:rPr/>
+                  <a:t>: strongly broken; only residual rotations around special axes</a:t>
+                </a:r>
+              </a:p>
+              <a:p>
+                <a:pPr lvl="0"/>
+                <a:r>
+                  <a:rPr/>
+                  <a:t>Physical consequences:</a:t>
+                </a:r>
+              </a:p>
+              <a:p>
+                <a:pPr lvl="1"/>
+                <a:r>
+                  <a:rPr/>
+                  <a:t>Spin texture becomes </a:t>
+                </a:r>
+                <a:r>
+                  <a:rPr b="1"/>
+                  <a:t>helical + spin-split</a:t>
+                </a:r>
+              </a:p>
+              <a:p>
+                <a:pPr lvl="1"/>
+                <a:r>
+                  <a:rPr/>
+                  <a:t>Fermi surfaces for opposite spins are shifted and distorted</a:t>
+                </a:r>
+              </a:p>
+              <a:p>
+                <a:pPr lvl="1"/>
+                <a:r>
+                  <a:rPr/>
+                  <a:t>This structure is the microscopic origin of:</a:t>
+                </a:r>
+              </a:p>
+              <a:p>
+                <a:pPr lvl="2"/>
+                <a:r>
+                  <a:rPr b="1"/>
+                  <a:t>finite-momentum Cooper pairing</a:t>
+                </a:r>
+                <a:r>
+                  <a:rPr/>
+                  <a:t> (</a:t>
+                </a:r>
+                <a14:m>
+                  <m:oMath xmlns:m="http://schemas.openxmlformats.org/officeDocument/2006/math">
+                    <m:r>
+                      <m:t>q</m:t>
+                    </m:r>
+                    <m:r>
+                      <m:rPr>
+                        <m:sty m:val="p"/>
+                      </m:rPr>
+                      <m:t>≠</m:t>
+                    </m:r>
+                    <m:r>
+                      <m:t>0</m:t>
+                    </m:r>
+                  </m:oMath>
+                </a14:m>
+                <a:r>
+                  <a:rPr/>
+                  <a:t>)</a:t>
+                </a:r>
+              </a:p>
+              <a:p>
+                <a:pPr lvl="2"/>
+                <a14:m>
+                  <m:oMath xmlns:m="http://schemas.openxmlformats.org/officeDocument/2006/math">
+                    <m:sSub>
+                      <m:e>
+                        <m:r>
+                          <m:t>ϕ</m:t>
+                        </m:r>
+                      </m:e>
+                      <m:sub>
+                        <m:r>
+                          <m:t>0</m:t>
+                        </m:r>
+                      </m:sub>
+                    </m:sSub>
+                  </m:oMath>
+                </a14:m>
+                <a:r>
+                  <a:rPr b="1"/>
+                  <a:t>-shifted and second-harmonic CPR</a:t>
+                </a:r>
+              </a:p>
+              <a:p>
+                <a:pPr lvl="2"/>
+                <a:r>
+                  <a:rPr b="1"/>
+                  <a:t>Josephson diode effect (JDE)</a:t>
+                </a:r>
+              </a:p>
+              <a:p>
+                <a:pPr lvl="0" indent="0" marL="0">
+                  <a:spcBef>
+                    <a:spcPts val="3000"/>
+                  </a:spcBef>
+                  <a:buNone/>
+                </a:pPr>
+                <a:r>
+                  <a:rPr b="1"/>
+                  <a:t>Connection to Finite-Momentum Pairing</a:t>
+                </a:r>
+              </a:p>
+              <a:p>
+                <a:pPr lvl="0"/>
+                <a:r>
+                  <a:rPr/>
+                  <a:t>In presence of Rashba + Zeeman:</a:t>
+                </a:r>
+              </a:p>
+              <a:p>
+                <a:pPr lvl="1"/>
+                <a:r>
+                  <a:rPr/>
+                  <a:t>Spin–momentum locking: spin orientation tied to </a:t>
+                </a:r>
+                <a14:m>
+                  <m:oMath xmlns:m="http://schemas.openxmlformats.org/officeDocument/2006/math">
+                    <m:r>
+                      <m:rPr>
+                        <m:sty m:val="b"/>
+                      </m:rPr>
+                      <m:t>k</m:t>
+                    </m:r>
+                  </m:oMath>
+                </a14:m>
+              </a:p>
+              <a:p>
+                <a:pPr lvl="1"/>
+                <a:r>
+                  <a:rPr/>
+                  <a:t>Zeeman shifts spin-split Fermi surfaces in momentum space</a:t>
+                </a:r>
+              </a:p>
+              <a:p>
+                <a:pPr lvl="0"/>
+                <a:r>
+                  <a:rPr/>
+                  <a:t>Result:</a:t>
+                </a:r>
+              </a:p>
+              <a:p>
+                <a:pPr lvl="1"/>
+                <a:r>
+                  <a:rPr/>
+                  <a:t>Cooper pairs formed between time-reversed partners no longer centered at </a:t>
+                </a:r>
+                <a14:m>
+                  <m:oMath xmlns:m="http://schemas.openxmlformats.org/officeDocument/2006/math">
+                    <m:r>
+                      <m:t>q</m:t>
+                    </m:r>
+                    <m:r>
+                      <m:rPr>
+                        <m:sty m:val="p"/>
+                      </m:rPr>
+                      <m:t>=</m:t>
+                    </m:r>
+                    <m:r>
+                      <m:t>0</m:t>
+                    </m:r>
+                  </m:oMath>
+                </a14:m>
+              </a:p>
+              <a:p>
+                <a:pPr lvl="1"/>
+                <a:r>
+                  <a:rPr/>
+                  <a:t>Effective pair momentum:</a:t>
+                </a:r>
+              </a:p>
+              <a:p>
+                <a:pPr lvl="1"/>
+                <a14:m>
+                  <m:oMathPara xmlns:m="http://schemas.openxmlformats.org/officeDocument/2006/math">
+                    <m:oMathParaPr>
+                      <m:jc m:val="center"/>
+                    </m:oMathParaPr>
+                    <m:oMath>
+                      <m:r>
+                        <m:rPr>
+                          <m:sty m:val="b"/>
+                        </m:rPr>
+                        <m:t>q</m:t>
+                      </m:r>
+                      <m:d>
+                        <m:dPr>
+                          <m:begChr m:val="("/>
+                          <m:sepChr m:val=""/>
+                          <m:endChr m:val=")"/>
+                          <m:grow/>
+                        </m:dPr>
+                        <m:e>
+                          <m:r>
+                            <m:rPr>
+                              <m:sty m:val="b"/>
+                            </m:rPr>
+                            <m:t>B</m:t>
+                          </m:r>
+                        </m:e>
+                      </m:d>
+                      <m:r>
+                        <m:rPr>
+                          <m:sty m:val="p"/>
+                        </m:rPr>
+                        <m:t>∝</m:t>
+                      </m:r>
+                      <m:sSub>
+                        <m:e>
+                          <m:r>
+                            <m:rPr>
+                              <m:sty m:val="b"/>
+                            </m:rPr>
+                            <m:t>B</m:t>
+                          </m:r>
+                        </m:e>
+                        <m:sub>
+                          <m:r>
+                            <m:rPr>
+                              <m:sty m:val="p"/>
+                            </m:rPr>
+                            <m:t>∥</m:t>
+                          </m:r>
+                        </m:sub>
+                      </m:sSub>
+                      <m:r>
+                        <m:rPr>
+                          <m:sty m:val="p"/>
+                        </m:rPr>
+                        <m:t>,</m:t>
+                      </m:r>
+                    </m:oMath>
+                  </m:oMathPara>
+                </a14:m>
+              </a:p>
+              <a:p>
+                <a:pPr lvl="1"/>
+                <a:r>
+                  <a:rPr/>
+                  <a:t>e.g. </a:t>
+                </a:r>
+                <a14:m>
+                  <m:oMath xmlns:m="http://schemas.openxmlformats.org/officeDocument/2006/math">
+                    <m:sSub>
+                      <m:e>
+                        <m:r>
+                          <m:t>q</m:t>
+                        </m:r>
+                      </m:e>
+                      <m:sub>
+                        <m:r>
+                          <m:t>x</m:t>
+                        </m:r>
+                      </m:sub>
+                    </m:sSub>
+                    <m:r>
+                      <m:rPr>
+                        <m:sty m:val="p"/>
+                      </m:rPr>
+                      <m:t>∝</m:t>
+                    </m:r>
+                    <m:sSub>
+                      <m:e>
+                        <m:r>
+                          <m:t>B</m:t>
+                        </m:r>
+                      </m:e>
+                      <m:sub>
+                        <m:r>
+                          <m:t>y</m:t>
+                        </m:r>
+                      </m:sub>
+                    </m:sSub>
+                  </m:oMath>
+                </a14:m>
+                <a:r>
+                  <a:rPr/>
+                  <a:t> for certain helical textures</a:t>
+                </a:r>
+              </a:p>
+              <a:p>
+                <a:pPr lvl="0"/>
+                <a:r>
+                  <a:rPr/>
+                  <a:t>In the Josephson junction:</a:t>
+                </a:r>
+              </a:p>
+              <a:p>
+                <a:pPr lvl="1"/>
+                <a:r>
+                  <a:rPr/>
+                  <a:t>Additional phase:</a:t>
+                </a:r>
+              </a:p>
+              <a:p>
+                <a:pPr lvl="1"/>
+                <a14:m>
+                  <m:oMathPara xmlns:m="http://schemas.openxmlformats.org/officeDocument/2006/math">
+                    <m:oMathParaPr>
+                      <m:jc m:val="center"/>
+                    </m:oMathParaPr>
+                    <m:oMath>
+                      <m:r>
+                        <m:t>δ</m:t>
+                      </m:r>
+                      <m:d>
+                        <m:dPr>
+                          <m:begChr m:val="("/>
+                          <m:sepChr m:val=""/>
+                          <m:endChr m:val=")"/>
+                          <m:grow/>
+                        </m:dPr>
+                        <m:e>
+                          <m:r>
+                            <m:t>B</m:t>
+                          </m:r>
+                        </m:e>
+                      </m:d>
+                      <m:r>
+                        <m:rPr>
+                          <m:sty m:val="p"/>
+                        </m:rPr>
+                        <m:t>≃</m:t>
+                      </m:r>
+                      <m:r>
+                        <m:t>2</m:t>
+                      </m:r>
+                      <m:r>
+                        <m:rPr>
+                          <m:sty m:val="b"/>
+                        </m:rPr>
+                        <m:t>q</m:t>
+                      </m:r>
+                      <m:d>
+                        <m:dPr>
+                          <m:begChr m:val="("/>
+                          <m:sepChr m:val=""/>
+                          <m:endChr m:val=")"/>
+                          <m:grow/>
+                        </m:dPr>
+                        <m:e>
+                          <m:r>
+                            <m:t>B</m:t>
+                          </m:r>
+                        </m:e>
+                      </m:d>
+                      <m:r>
+                        <m:rPr>
+                          <m:sty m:val="p"/>
+                        </m:rPr>
+                        <m:t>⋅</m:t>
+                      </m:r>
+                      <m:r>
+                        <m:rPr>
+                          <m:sty m:val="b"/>
+                        </m:rPr>
+                        <m:t>L</m:t>
+                      </m:r>
+                      <m:r>
+                        <m:rPr>
+                          <m:sty m:val="p"/>
+                        </m:rPr>
+                        <m:t>,</m:t>
+                      </m:r>
+                    </m:oMath>
+                  </m:oMathPara>
+                </a14:m>
+              </a:p>
+              <a:p>
+                <a:pPr lvl="1"/>
+                <a:r>
+                  <a:rPr/>
+                  <a:t>Appears in CPR as:</a:t>
+                </a:r>
+              </a:p>
+              <a:p>
+                <a:pPr lvl="1"/>
+                <a14:m>
+                  <m:oMathPara xmlns:m="http://schemas.openxmlformats.org/officeDocument/2006/math">
+                    <m:oMathParaPr>
+                      <m:jc m:val="center"/>
+                    </m:oMathParaPr>
+                    <m:oMath>
+                      <m:r>
+                        <m:t>I</m:t>
+                      </m:r>
+                      <m:d>
+                        <m:dPr>
+                          <m:begChr m:val="("/>
+                          <m:sepChr m:val=""/>
+                          <m:endChr m:val=")"/>
+                          <m:grow/>
+                        </m:dPr>
+                        <m:e>
+                          <m:r>
+                            <m:t>ϕ</m:t>
+                          </m:r>
+                        </m:e>
+                      </m:d>
+                      <m:r>
+                        <m:rPr>
+                          <m:sty m:val="p"/>
+                        </m:rPr>
+                        <m:t>=</m:t>
+                      </m:r>
+                      <m:sSub>
+                        <m:e>
+                          <m:r>
+                            <m:t>I</m:t>
+                          </m:r>
+                        </m:e>
+                        <m:sub>
+                          <m:r>
+                            <m:t>1</m:t>
+                          </m:r>
+                        </m:sub>
+                      </m:sSub>
+                      <m:r>
+                        <m:rPr>
+                          <m:sty m:val="p"/>
+                        </m:rPr>
+                        <m:t>sin</m:t>
+                      </m:r>
+                      <m:r>
+                        <m:t>ϕ</m:t>
+                      </m:r>
+                      <m:r>
+                        <m:rPr>
+                          <m:sty m:val="p"/>
+                        </m:rPr>
+                        <m:t>+</m:t>
+                      </m:r>
+                      <m:sSub>
+                        <m:e>
+                          <m:r>
+                            <m:t>I</m:t>
+                          </m:r>
+                        </m:e>
+                        <m:sub>
+                          <m:r>
+                            <m:t>2</m:t>
+                          </m:r>
+                        </m:sub>
+                      </m:sSub>
+                      <m:r>
+                        <m:rPr>
+                          <m:sty m:val="p"/>
+                        </m:rPr>
+                        <m:t>sin</m:t>
+                      </m:r>
+                      <m:d>
+                        <m:dPr>
+                          <m:begChr m:val="("/>
+                          <m:sepChr m:val=""/>
+                          <m:endChr m:val=")"/>
+                          <m:grow/>
+                        </m:dPr>
+                        <m:e>
+                          <m:r>
+                            <m:t>2</m:t>
+                          </m:r>
+                          <m:r>
+                            <m:t>ϕ</m:t>
+                          </m:r>
+                          <m:r>
+                            <m:rPr>
+                              <m:sty m:val="p"/>
+                            </m:rPr>
+                            <m:t>+</m:t>
+                          </m:r>
+                          <m:r>
+                            <m:t>δ</m:t>
+                          </m:r>
+                        </m:e>
+                      </m:d>
+                      <m:r>
+                        <m:rPr>
+                          <m:sty m:val="p"/>
+                        </m:rPr>
+                        <m:t>.</m:t>
+                      </m:r>
+                    </m:oMath>
+                  </m:oMathPara>
+                </a14:m>
+              </a:p>
+              <a:p>
+                <a:pPr lvl="1"/>
+                <a:r>
+                  <a:rPr/>
+                  <a:t>This is the GL-level description used to model JDE in PtTe</a:t>
+                </a:r>
+                <a14:m>
+                  <m:oMath xmlns:m="http://schemas.openxmlformats.org/officeDocument/2006/math">
+                    <m:sSub>
+                      <m:e>
+                        <m:r>
+                          <m:t>​</m:t>
+                        </m:r>
+                      </m:e>
+                      <m:sub>
+                        <m:r>
+                          <m:t>2</m:t>
+                        </m:r>
+                      </m:sub>
+                    </m:sSub>
+                  </m:oMath>
+                </a14:m>
+                <a:r>
+                  <a:rPr/>
+                  <a:t> / NiTe</a:t>
+                </a:r>
+                <a14:m>
+                  <m:oMath xmlns:m="http://schemas.openxmlformats.org/officeDocument/2006/math">
+                    <m:sSub>
+                      <m:e>
+                        <m:r>
+                          <m:t>​</m:t>
+                        </m:r>
+                      </m:e>
+                      <m:sub>
+                        <m:r>
+                          <m:t>2</m:t>
+                        </m:r>
+                      </m:sub>
+                    </m:sSub>
+                  </m:oMath>
+                </a14:m>
+                <a:r>
+                  <a:rPr/>
+                  <a:t> junctions.</a:t>
+                </a:r>
+              </a:p>
+              <a:p>
+                <a:pPr lvl="0" indent="0" marL="0">
+                  <a:spcBef>
+                    <a:spcPts val="3000"/>
+                  </a:spcBef>
+                  <a:buNone/>
+                </a:pPr>
+                <a:r>
+                  <a:rPr b="1"/>
+                  <a:t>Symmetry &amp; JDE (Summary)</a:t>
+                </a:r>
+              </a:p>
+              <a:p>
+                <a:pPr lvl="0"/>
+                <a:r>
+                  <a:rPr b="1"/>
+                  <a:t>Two key symmetry breakings for JDE / </a:t>
+                </a:r>
+                <a14:m>
+                  <m:oMath xmlns:m="http://schemas.openxmlformats.org/officeDocument/2006/math">
+                    <m:sSub>
+                      <m:e>
+                        <m:r>
+                          <m:t>ϕ</m:t>
+                        </m:r>
+                      </m:e>
+                      <m:sub>
+                        <m:r>
+                          <m:t>0</m:t>
+                        </m:r>
+                      </m:sub>
+                    </m:sSub>
+                  </m:oMath>
+                </a14:m>
+                <a:r>
+                  <a:rPr b="1"/>
+                  <a:t>-junction:</a:t>
+                </a:r>
+              </a:p>
+              <a:p>
+                <a:pPr lvl="1" indent="-342900" marL="685800">
+                  <a:buAutoNum type="arabicPeriod"/>
+                </a:pPr>
+                <a:r>
+                  <a:rPr b="1"/>
+                  <a:t>Inversion symmetry broken</a:t>
+                </a:r>
+                <a:r>
+                  <a:rPr/>
+                  <a:t> → Rashba SOC</a:t>
+                </a:r>
+              </a:p>
+              <a:p>
+                <a:pPr lvl="1" indent="-342900" marL="685800">
+                  <a:buAutoNum type="arabicPeriod"/>
+                </a:pPr>
+                <a:r>
+                  <a:rPr b="1"/>
+                  <a:t>Time-reversal symmetry broken</a:t>
+                </a:r>
+                <a:r>
+                  <a:rPr/>
+                  <a:t> → Zeeman field</a:t>
+                </a:r>
+              </a:p>
+              <a:p>
+                <a:pPr lvl="0"/>
+                <a:r>
+                  <a:rPr/>
+                  <a:t>Rashba + Zeeman together:</a:t>
+                </a:r>
+              </a:p>
+              <a:p>
+                <a:pPr lvl="1"/>
+                <a:r>
+                  <a:rPr/>
+                  <a:t>Generate helical spin–momentum locking + finite-</a:t>
+                </a:r>
+                <a14:m>
+                  <m:oMath xmlns:m="http://schemas.openxmlformats.org/officeDocument/2006/math">
+                    <m:r>
+                      <m:t>q</m:t>
+                    </m:r>
+                  </m:oMath>
+                </a14:m>
+                <a:r>
+                  <a:rPr/>
+                  <a:t> pairing</a:t>
+                </a:r>
+              </a:p>
+              <a:p>
+                <a:pPr lvl="1"/>
+                <a:r>
+                  <a:rPr/>
+                  <a:t>Lead to a CPR containing higher harmonics and phase shifts:</a:t>
+                </a:r>
+              </a:p>
+              <a:p>
+                <a:pPr lvl="1"/>
+                <a14:m>
+                  <m:oMathPara xmlns:m="http://schemas.openxmlformats.org/officeDocument/2006/math">
+                    <m:oMathParaPr>
+                      <m:jc m:val="center"/>
+                    </m:oMathParaPr>
+                    <m:oMath>
+                      <m:r>
+                        <m:t>I</m:t>
+                      </m:r>
+                      <m:d>
+                        <m:dPr>
+                          <m:begChr m:val="("/>
+                          <m:sepChr m:val=""/>
+                          <m:endChr m:val=")"/>
+                          <m:grow/>
+                        </m:dPr>
+                        <m:e>
+                          <m:r>
+                            <m:t>ϕ</m:t>
+                          </m:r>
+                        </m:e>
+                      </m:d>
+                      <m:r>
+                        <m:rPr>
+                          <m:sty m:val="p"/>
+                        </m:rPr>
+                        <m:t>=</m:t>
+                      </m:r>
+                      <m:sSub>
+                        <m:e>
+                          <m:r>
+                            <m:t>I</m:t>
+                          </m:r>
+                        </m:e>
+                        <m:sub>
+                          <m:r>
+                            <m:t>1</m:t>
+                          </m:r>
+                        </m:sub>
+                      </m:sSub>
+                      <m:r>
+                        <m:rPr>
+                          <m:sty m:val="p"/>
+                        </m:rPr>
+                        <m:t>sin</m:t>
+                      </m:r>
+                      <m:r>
+                        <m:t>ϕ</m:t>
+                      </m:r>
+                      <m:r>
+                        <m:rPr>
+                          <m:sty m:val="p"/>
+                        </m:rPr>
+                        <m:t>+</m:t>
+                      </m:r>
+                      <m:sSub>
+                        <m:e>
+                          <m:r>
+                            <m:t>I</m:t>
+                          </m:r>
+                        </m:e>
+                        <m:sub>
+                          <m:r>
+                            <m:t>2</m:t>
+                          </m:r>
+                        </m:sub>
+                      </m:sSub>
+                      <m:r>
+                        <m:rPr>
+                          <m:sty m:val="p"/>
+                        </m:rPr>
+                        <m:t>sin</m:t>
+                      </m:r>
+                      <m:d>
+                        <m:dPr>
+                          <m:begChr m:val="("/>
+                          <m:sepChr m:val=""/>
+                          <m:endChr m:val=")"/>
+                          <m:grow/>
+                        </m:dPr>
+                        <m:e>
+                          <m:r>
+                            <m:t>2</m:t>
+                          </m:r>
+                          <m:r>
+                            <m:t>ϕ</m:t>
+                          </m:r>
+                          <m:r>
+                            <m:rPr>
+                              <m:sty m:val="p"/>
+                            </m:rPr>
+                            <m:t>+</m:t>
+                          </m:r>
+                          <m:r>
+                            <m:t>δ</m:t>
+                          </m:r>
+                        </m:e>
+                      </m:d>
+                      <m:r>
+                        <m:rPr>
+                          <m:sty m:val="p"/>
+                        </m:rPr>
+                        <m:t>,</m:t>
+                      </m:r>
+                    </m:oMath>
+                  </m:oMathPara>
+                </a14:m>
+              </a:p>
+              <a:p>
+                <a:pPr lvl="1"/>
+                <a:r>
+                  <a:rPr/>
+                  <a:t>Allow nonreciprocal critical current:</a:t>
+                </a:r>
+              </a:p>
+              <a:p>
+                <a:pPr lvl="1"/>
+                <a14:m>
+                  <m:oMathPara xmlns:m="http://schemas.openxmlformats.org/officeDocument/2006/math">
+                    <m:oMathParaPr>
+                      <m:jc m:val="center"/>
+                    </m:oMathParaPr>
+                    <m:oMath>
+                      <m:sSubSup>
+                        <m:e>
+                          <m:r>
+                            <m:t>I</m:t>
+                          </m:r>
+                        </m:e>
+                        <m:sub>
+                          <m:r>
+                            <m:t>c</m:t>
+                          </m:r>
+                        </m:sub>
+                        <m:sup>
+                          <m:r>
+                            <m:rPr>
+                              <m:sty m:val="p"/>
+                            </m:rPr>
+                            <m:t>+</m:t>
+                          </m:r>
+                        </m:sup>
+                      </m:sSubSup>
+                      <m:r>
+                        <m:rPr>
+                          <m:sty m:val="p"/>
+                        </m:rPr>
+                        <m:t>≠</m:t>
+                      </m:r>
+                      <m:d>
+                        <m:dPr>
+                          <m:begChr m:val="|"/>
+                          <m:sepChr m:val=""/>
+                          <m:endChr m:val="|"/>
+                          <m:grow/>
+                        </m:dPr>
+                        <m:e>
+                          <m:sSubSup>
+                            <m:e>
+                              <m:r>
+                                <m:t>I</m:t>
+                              </m:r>
+                            </m:e>
+                            <m:sub>
+                              <m:r>
+                                <m:t>c</m:t>
+                              </m:r>
+                            </m:sub>
+                            <m:sup>
+                              <m:r>
+                                <m:rPr>
+                                  <m:sty m:val="p"/>
+                                </m:rPr>
+                                <m:t>−</m:t>
+                              </m:r>
+                            </m:sup>
+                          </m:sSubSup>
+                        </m:e>
+                      </m:d>
+                      <m:r>
+                        <m:t> </m:t>
+                      </m:r>
+                      <m:r>
+                        <m:rPr>
+                          <m:sty m:val="p"/>
+                        </m:rPr>
+                        <m:t>⇒</m:t>
+                      </m:r>
+                      <m:r>
+                        <m:t> </m:t>
+                      </m:r>
+                      <m:r>
+                        <m:rPr>
+                          <m:nor/>
+                          <m:sty m:val="p"/>
+                        </m:rPr>
+                        <m:t>Josephson diode effect</m:t>
+                      </m:r>
+                      <m:r>
+                        <m:rPr>
+                          <m:sty m:val="p"/>
+                        </m:rPr>
+                        <m:t>.</m:t>
+                      </m:r>
+                    </m:oMath>
+                  </m:oMathPara>
+                </a14:m>
+              </a:p>
+              <a:p>
+                <a:pPr lvl="0"/>
+                <a:r>
+                  <a:rPr/>
+                  <a:t>Take-home message:</a:t>
+                </a:r>
+              </a:p>
+              <a:p>
+                <a:pPr lvl="1"/>
+                <a:r>
+                  <a:rPr b="1"/>
+                  <a:t>Rashba = inversion breaking + SOC</a:t>
+                </a:r>
+              </a:p>
+              <a:p>
+                <a:pPr lvl="1"/>
+                <a:r>
+                  <a:rPr b="1"/>
+                  <a:t>Zeeman = time-reversal breaking</a:t>
+                </a:r>
+              </a:p>
+              <a:p>
+                <a:pPr lvl="1"/>
+                <a:r>
+                  <a:rPr b="1"/>
+                  <a:t>Combination is the microscopic mechanism for JDE</a:t>
+                </a:r>
+              </a:p>
+            </p:txBody>
+          </p:sp>
+        </mc:Choice>
+      </mc:AlternateContent>
+    </p:spTree>
+  </p:cSld>
+</p:sld>
+</file>
+
+<file path=ppt/slides/slide13.xml><?xml version="1.0" encoding="utf-8"?>
+<p:sld xmlns:a="http://schemas.openxmlformats.org/drawingml/2006/main" xmlns:r="http://schemas.openxmlformats.org/officeDocument/2006/relationships" xmlns:p="http://schemas.openxmlformats.org/presentationml/2006/main">
+  <p:cSld>
+    <p:spTree>
+      <p:nvGrpSpPr>
+        <p:cNvPr id="1" name=""/>
+        <p:cNvGrpSpPr/>
+        <p:nvPr/>
+      </p:nvGrpSpPr>
+      <p:grpSpPr>
+        <a:xfrm>
+          <a:off x="0" y="0"/>
+          <a:ext cx="0" cy="0"/>
+          <a:chOff x="0" y="0"/>
+          <a:chExt cx="0" cy="0"/>
+        </a:xfrm>
+      </p:grpSpPr>
+      <p:sp>
+        <p:nvSpPr>
+          <p:cNvPr id="2" name="Title 1"/>
+          <p:cNvSpPr>
+            <a:spLocks noGrp="1"/>
+          </p:cNvSpPr>
+          <p:nvPr>
+            <p:ph type="title"/>
+          </p:nvPr>
+        </p:nvSpPr>
+        <p:spPr/>
+        <p:txBody>
+          <a:bodyPr/>
+          <a:lstStyle/>
+          <a:p>
+            <a:pPr lvl="0" indent="0" marL="0">
+              <a:buNone/>
+            </a:pPr>
+            <a:r>
+              <a:rPr/>
+              <a:t>Experimental Methods</a:t>
+            </a:r>
+          </a:p>
+        </p:txBody>
+      </p:sp>
+      <mc:AlternateContent xmlns:mc="http://schemas.openxmlformats.org/markup-compatibility/2006">
+        <mc:Choice xmlns:a14="http://schemas.microsoft.com/office/drawing/2010/main" Requires="a14">
+          <p:sp>
+            <p:nvSpPr>
+              <p:cNvPr id="3" name="Content Placeholder 2"/>
+              <p:cNvSpPr>
+                <a:spLocks noGrp="1"/>
+              </p:cNvSpPr>
+              <p:nvPr>
+                <p:ph idx="1"/>
+              </p:nvPr>
+            </p:nvSpPr>
+            <p:spPr/>
+            <p:txBody>
+              <a:bodyPr/>
+              <a:lstStyle/>
+              <a:p>
+                <a:pPr lvl="0" indent="0" marL="0">
+                  <a:spcBef>
+                    <a:spcPts val="3000"/>
+                  </a:spcBef>
+                  <a:buNone/>
+                </a:pPr>
+                <a:r>
+                  <a:rPr b="1"/>
+                  <a:t>Device Fabrication Flow</a:t>
+                </a:r>
+              </a:p>
+              <a:p>
+                <a:pPr lvl="0" indent="-342900" marL="342900">
+                  <a:buAutoNum type="arabicPeriod"/>
+                </a:pPr>
+                <a:r>
+                  <a:rPr b="1"/>
+                  <a:t>Crystal Growth</a:t>
+                </a:r>
+                <a:r>
+                  <a:rPr/>
+                  <a:t>: Self-flux method (provided by Prof. C.S. Lue, NCKU).</a:t>
+                </a:r>
+              </a:p>
+              <a:p>
+                <a:pPr lvl="0" indent="-342900" marL="342900">
+                  <a:buAutoNum type="arabicPeriod"/>
+                </a:pPr>
+                <a:r>
+                  <a:rPr b="1"/>
+                  <a:t>Exfoliation</a:t>
+                </a:r>
+                <a:r>
+                  <a:rPr/>
+                  <a:t>: Mechanical exfoliation of PtTe</a:t>
+                </a:r>
+                <a14:m>
+                  <m:oMath xmlns:m="http://schemas.openxmlformats.org/officeDocument/2006/math">
+                    <m:sSub>
+                      <m:e>
+                        <m:r>
+                          <m:t>​</m:t>
+                        </m:r>
+                      </m:e>
+                      <m:sub>
+                        <m:r>
+                          <m:t>2</m:t>
+                        </m:r>
+                      </m:sub>
+                    </m:sSub>
+                  </m:oMath>
+                </a14:m>
+                <a:r>
+                  <a:rPr/>
+                  <a:t> flakes onto SiO</a:t>
+                </a:r>
+                <a14:m>
+                  <m:oMath xmlns:m="http://schemas.openxmlformats.org/officeDocument/2006/math">
+                    <m:sSub>
+                      <m:e>
+                        <m:r>
+                          <m:t>​</m:t>
+                        </m:r>
+                      </m:e>
+                      <m:sub>
+                        <m:r>
+                          <m:t>2</m:t>
+                        </m:r>
+                      </m:sub>
+                    </m:sSub>
+                  </m:oMath>
+                </a14:m>
+                <a:r>
+                  <a:rPr/>
+                  <a:t>/Si substrates.</a:t>
+                </a:r>
+              </a:p>
+              <a:p>
+                <a:pPr lvl="0" indent="-342900" marL="342900">
+                  <a:buAutoNum type="arabicPeriod"/>
+                </a:pPr>
+                <a:r>
+                  <a:rPr b="1"/>
+                  <a:t>E-beam Lithography (EBL)</a:t>
+                </a:r>
+                <a:r>
+                  <a:rPr/>
+                  <a:t>:</a:t>
+                </a:r>
+              </a:p>
+              <a:p>
+                <a:pPr lvl="1"/>
+                <a:r>
+                  <a:rPr/>
+                  <a:t>PMMA resist coating.</a:t>
+                </a:r>
+              </a:p>
+              <a:p>
+                <a:pPr lvl="1"/>
+                <a:r>
+                  <a:rPr/>
+                  <a:t>Pattern definition for contacts and SQUID loops.</a:t>
+                </a:r>
+              </a:p>
+              <a:p>
+                <a:pPr lvl="0" indent="-342900" marL="342900">
+                  <a:buAutoNum type="arabicPeriod"/>
+                </a:pPr>
+                <a:r>
+                  <a:rPr b="1"/>
+                  <a:t>Metallization</a:t>
+                </a:r>
+                <a:r>
+                  <a:rPr/>
+                  <a:t>:</a:t>
+                </a:r>
+              </a:p>
+              <a:p>
+                <a:pPr lvl="1"/>
+                <a:r>
+                  <a:rPr/>
+                  <a:t>Superconducting electrodes: </a:t>
+                </a:r>
+                <a:r>
+                  <a:rPr b="1"/>
+                  <a:t>Al (Aluminum)</a:t>
+                </a:r>
+                <a:r>
+                  <a:rPr/>
+                  <a:t> or </a:t>
+                </a:r>
+                <a:r>
+                  <a:rPr b="1"/>
+                  <a:t>Nb (Niobium)</a:t>
+                </a:r>
+                <a:r>
+                  <a:rPr/>
+                  <a:t>.</a:t>
+                </a:r>
+              </a:p>
+              <a:p>
+                <a:pPr lvl="1"/>
+                <a:r>
+                  <a:rPr i="1"/>
+                  <a:t>In-situ</a:t>
+                </a:r>
+                <a:r>
+                  <a:rPr/>
+                  <a:t> Ar ion milling to ensure transparent interfaces.</a:t>
+                </a:r>
+              </a:p>
+              <a:p>
+                <a:pPr lvl="1"/>
+                <a:r>
+                  <a:rPr/>
+                  <a:t>E-beam evaporation &amp; Liftoff.</a:t>
+                </a:r>
+              </a:p>
+              <a:p>
+                <a:pPr lvl="0" indent="-342900" marL="342900">
+                  <a:buAutoNum type="arabicPeriod"/>
+                </a:pPr>
+                <a:r>
+                  <a:rPr b="1"/>
+                  <a:t>Design</a:t>
+                </a:r>
+                <a:r>
+                  <a:rPr/>
+                  <a:t>: Asymmetric dc-SQUID geometry for CPR retrieval.</a:t>
+                </a:r>
+              </a:p>
+              <a:p>
+                <a:pPr lvl="0" indent="0" marL="0">
+                  <a:spcBef>
+                    <a:spcPts val="3000"/>
+                  </a:spcBef>
+                  <a:buNone/>
+                </a:pPr>
+                <a:r>
+                  <a:rPr b="1"/>
+                  <a:t>Measurement Setup</a:t>
+                </a:r>
+              </a:p>
+            </p:txBody>
+          </p:sp>
+        </mc:Choice>
+      </mc:AlternateContent>
+    </p:spTree>
+  </p:cSld>
+</p:sld>
+</file>
+
+<file path=ppt/slides/slide14.xml><?xml version="1.0" encoding="utf-8"?>
+<p:sld xmlns:a="http://schemas.openxmlformats.org/drawingml/2006/main" xmlns:r="http://schemas.openxmlformats.org/officeDocument/2006/relationships" xmlns:p="http://schemas.openxmlformats.org/presentationml/2006/main">
+  <p:cSld>
+    <p:spTree>
+      <p:nvGrpSpPr>
+        <p:cNvPr id="1" name=""/>
+        <p:cNvGrpSpPr/>
+        <p:nvPr/>
+      </p:nvGrpSpPr>
+      <p:grpSpPr>
+        <a:xfrm>
+          <a:off x="0" y="0"/>
+          <a:ext cx="0" cy="0"/>
+          <a:chOff x="0" y="0"/>
+          <a:chExt cx="0" cy="0"/>
+        </a:xfrm>
+      </p:grpSpPr>
+      <mc:AlternateContent xmlns:mc="http://schemas.openxmlformats.org/markup-compatibility/2006">
+        <mc:Choice xmlns:a14="http://schemas.microsoft.com/office/drawing/2010/main" Requires="a14">
+          <p:sp>
+            <p:nvSpPr>
+              <p:cNvPr id="3" name="Content Placeholder 2"/>
+              <p:cNvSpPr>
+                <a:spLocks noGrp="1"/>
+              </p:cNvSpPr>
+              <p:nvPr>
+                <p:ph idx="1" sz="half"/>
+              </p:nvPr>
+            </p:nvSpPr>
+            <p:spPr/>
+            <p:txBody>
+              <a:bodyPr/>
+              <a:lstStyle/>
+              <a:p>
+                <a:pPr lvl="0"/>
+                <a:r>
+                  <a:rPr b="1"/>
+                  <a:t>Cryogenic system</a:t>
+                </a:r>
+                <a:r>
+                  <a:rPr/>
+                  <a:t>: Dilution refrigerator (base </a:t>
+                </a:r>
+                <a:r>
+                  <a:rPr b="1"/>
+                  <a:t>~40 mK</a:t>
+                </a:r>
+                <a:r>
+                  <a:rPr/>
+                  <a:t>)</a:t>
+                </a:r>
+              </a:p>
+              <a:p>
+                <a:pPr lvl="0"/>
+                <a:r>
+                  <a:rPr b="1"/>
+                  <a:t>Electronics</a:t>
+                </a:r>
+                <a:r>
+                  <a:rPr/>
+                  <a:t>: low-noise filtering, 4-terminal measurement</a:t>
+                </a:r>
+              </a:p>
+              <a:p>
+                <a:pPr lvl="0"/>
+                <a:r>
+                  <a:rPr b="1"/>
+                  <a:t>Magnetic control</a:t>
+                </a:r>
+                <a:r>
+                  <a:rPr/>
+                  <a:t>: 3-axis vector magnet</a:t>
+                </a:r>
+                <a:br/>
+                <a:r>
+                  <a:rPr/>
+                  <a:t>(precise </a:t>
+                </a:r>
+                <a14:m>
+                  <m:oMath xmlns:m="http://schemas.openxmlformats.org/officeDocument/2006/math">
+                    <m:sSub>
+                      <m:e>
+                        <m:r>
+                          <m:t>B</m:t>
+                        </m:r>
+                      </m:e>
+                      <m:sub>
+                        <m:r>
+                          <m:rPr>
+                            <m:sty m:val="p"/>
+                          </m:rPr>
+                          <m:t>∥</m:t>
+                        </m:r>
+                      </m:sub>
+                    </m:sSub>
+                  </m:oMath>
+                </a14:m>
+                <a:r>
+                  <a:rPr/>
+                  <a:t> and </a:t>
+                </a:r>
+                <a14:m>
+                  <m:oMath xmlns:m="http://schemas.openxmlformats.org/officeDocument/2006/math">
+                    <m:sSub>
+                      <m:e>
+                        <m:r>
+                          <m:t>B</m:t>
+                        </m:r>
+                      </m:e>
+                      <m:sub>
+                        <m:r>
+                          <m:rPr>
+                            <m:sty m:val="p"/>
+                          </m:rPr>
+                          <m:t>⟂</m:t>
+                        </m:r>
+                      </m:sub>
+                    </m:sSub>
+                  </m:oMath>
+                </a14:m>
+                <a:r>
+                  <a:rPr/>
+                  <a:t> alignment)</a:t>
+                </a:r>
+              </a:p>
+            </p:txBody>
+          </p:sp>
+        </mc:Choice>
+      </mc:AlternateContent>
+      <p:pic>
+        <p:nvPicPr>
+          <p:cNvPr descr="Images/coordinate_system_schematic.png" id="0" name="Picture 1"/>
+          <p:cNvPicPr>
+            <a:picLocks noGrp="1" noChangeAspect="1"/>
+          </p:cNvPicPr>
+          <p:nvPr/>
+        </p:nvPicPr>
+        <p:blipFill>
+          <a:blip r:embed="rId2"/>
+          <a:stretch>
+            <a:fillRect/>
+          </a:stretch>
+        </p:blipFill>
+        <p:spPr bwMode="auto">
+          <a:xfrm>
+            <a:off x="4953000" y="1193800"/>
+            <a:ext cx="3416300" cy="2882900"/>
+          </a:xfrm>
+          <a:prstGeom prst="rect">
+            <a:avLst/>
+          </a:prstGeom>
+          <a:noFill/>
+          <a:ln w="9525">
+            <a:noFill/>
+            <a:headEnd/>
+            <a:tailEnd/>
+          </a:ln>
+        </p:spPr>
+      </p:pic>
+      <p:sp>
+        <p:nvSpPr>
+          <p:cNvPr id="1" name="TextBox 3"/>
+          <p:cNvSpPr txBox="1"/>
+          <p:nvPr/>
+        </p:nvSpPr>
+        <p:spPr>
+          <a:xfrm>
+            <a:off x="4648200" y="4076700"/>
+            <a:ext cx="4038600" cy="508000"/>
+          </a:xfrm>
+          <a:prstGeom prst="rect">
+            <a:avLst/>
+          </a:prstGeom>
+          <a:noFill/>
+        </p:spPr>
+        <p:txBody>
+          <a:bodyPr/>
+          <a:lstStyle/>
+          <a:p>
+            <a:pPr lvl="0" indent="0" marL="0" algn="ctr">
+              <a:buNone/>
+            </a:pPr>
+            <a:r>
+              <a:rPr/>
+              <a:t>Measurement Schematic</a:t>
+            </a:r>
+          </a:p>
+        </p:txBody>
+      </p:sp>
+    </p:spTree>
+  </p:cSld>
+</p:sld>
+</file>
+
+<file path=ppt/slides/slide15.xml><?xml version="1.0" encoding="utf-8"?>
+<p:sld xmlns:a="http://schemas.openxmlformats.org/drawingml/2006/main" xmlns:r="http://schemas.openxmlformats.org/officeDocument/2006/relationships" xmlns:p="http://schemas.openxmlformats.org/presentationml/2006/main">
+  <p:cSld>
+    <p:spTree>
+      <p:nvGrpSpPr>
+        <p:cNvPr id="1" name=""/>
+        <p:cNvGrpSpPr/>
+        <p:nvPr/>
+      </p:nvGrpSpPr>
+      <p:grpSpPr>
+        <a:xfrm>
+          <a:off x="0" y="0"/>
+          <a:ext cx="0" cy="0"/>
+          <a:chOff x="0" y="0"/>
+          <a:chExt cx="0" cy="0"/>
+        </a:xfrm>
+      </p:grpSpPr>
+      <p:sp>
+        <p:nvSpPr>
+          <p:cNvPr id="2" name="Title 1"/>
+          <p:cNvSpPr>
+            <a:spLocks noGrp="1"/>
+          </p:cNvSpPr>
+          <p:nvPr>
+            <p:ph type="title"/>
+          </p:nvPr>
+        </p:nvSpPr>
+        <p:spPr/>
+        <p:txBody>
+          <a:bodyPr/>
+          <a:lstStyle/>
+          <a:p>
+            <a:pPr lvl="0" indent="0" marL="0">
+              <a:buNone/>
+            </a:pPr>
+            <a:r>
+              <a:rPr/>
+              <a:t>Results: Basic Characterization</a:t>
+            </a:r>
+          </a:p>
+        </p:txBody>
+      </p:sp>
+      <mc:AlternateContent xmlns:mc="http://schemas.openxmlformats.org/markup-compatibility/2006">
+        <mc:Choice xmlns:a14="http://schemas.microsoft.com/office/drawing/2010/main" Requires="a14">
+          <p:sp>
+            <p:nvSpPr>
+              <p:cNvPr id="3" name="Content Placeholder 2"/>
+              <p:cNvSpPr>
+                <a:spLocks noGrp="1"/>
+              </p:cNvSpPr>
+              <p:nvPr>
+                <p:ph idx="1"/>
+              </p:nvPr>
+            </p:nvSpPr>
+            <p:spPr/>
+            <p:txBody>
+              <a:bodyPr/>
+              <a:lstStyle/>
+              <a:p>
+                <a:pPr lvl="0" indent="0" marL="0">
+                  <a:spcBef>
+                    <a:spcPts val="3000"/>
+                  </a:spcBef>
+                  <a:buNone/>
+                </a:pPr>
+                <a:r>
+                  <a:rPr b="1"/>
+                  <a:t>I-V Characteristics (DC Transport)</a:t>
+                </a:r>
+              </a:p>
+              <a:p>
+                <a:pPr lvl="0"/>
+                <a:r>
+                  <a:rPr b="1"/>
+                  <a:t>Typical IV Curve</a:t>
+                </a:r>
+                <a:r>
+                  <a:rPr/>
+                  <a:t>:</a:t>
+                </a:r>
+              </a:p>
+              <a:p>
+                <a:pPr lvl="1"/>
+                <a:r>
+                  <a:rPr/>
+                  <a:t>Clear Superconducting branch (</a:t>
+                </a:r>
+                <a14:m>
+                  <m:oMath xmlns:m="http://schemas.openxmlformats.org/officeDocument/2006/math">
+                    <m:r>
+                      <m:t>V</m:t>
+                    </m:r>
+                    <m:r>
+                      <m:rPr>
+                        <m:sty m:val="p"/>
+                      </m:rPr>
+                      <m:t>=</m:t>
+                    </m:r>
+                    <m:r>
+                      <m:t>0</m:t>
+                    </m:r>
+                  </m:oMath>
+                </a14:m>
+                <a:r>
+                  <a:rPr/>
+                  <a:t>).</a:t>
+                </a:r>
+              </a:p>
+              <a:p>
+                <a:pPr lvl="1"/>
+                <a:r>
+                  <a:rPr/>
+                  <a:t>Switching Current (</a:t>
+                </a:r>
+                <a14:m>
+                  <m:oMath xmlns:m="http://schemas.openxmlformats.org/officeDocument/2006/math">
+                    <m:sSub>
+                      <m:e>
+                        <m:r>
+                          <m:t>I</m:t>
+                        </m:r>
+                      </m:e>
+                      <m:sub>
+                        <m:r>
+                          <m:t>c</m:t>
+                        </m:r>
+                      </m:sub>
+                    </m:sSub>
+                  </m:oMath>
+                </a14:m>
+                <a:r>
+                  <a:rPr/>
+                  <a:t>) and Retrapping Current (</a:t>
+                </a:r>
+                <a14:m>
+                  <m:oMath xmlns:m="http://schemas.openxmlformats.org/officeDocument/2006/math">
+                    <m:sSub>
+                      <m:e>
+                        <m:r>
+                          <m:t>I</m:t>
+                        </m:r>
+                      </m:e>
+                      <m:sub>
+                        <m:r>
+                          <m:t>r</m:t>
+                        </m:r>
+                      </m:sub>
+                    </m:sSub>
+                  </m:oMath>
+                </a14:m>
+                <a:r>
+                  <a:rPr/>
+                  <a:t>).</a:t>
+                </a:r>
+              </a:p>
+              <a:p>
+                <a:pPr lvl="1"/>
+                <a:r>
+                  <a:rPr/>
+                  <a:t>Hysteretic behavior (underdamped junction).</a:t>
+                </a:r>
+              </a:p>
+            </p:txBody>
+          </p:sp>
+        </mc:Choice>
+      </mc:AlternateContent>
+    </p:spTree>
+  </p:cSld>
+</p:sld>
+</file>
+
+<file path=ppt/slides/slide16.xml><?xml version="1.0" encoding="utf-8"?>
+<p:sld xmlns:a="http://schemas.openxmlformats.org/drawingml/2006/main" xmlns:r="http://schemas.openxmlformats.org/officeDocument/2006/relationships" xmlns:p="http://schemas.openxmlformats.org/presentationml/2006/main">
+  <p:cSld>
+    <p:spTree>
+      <p:nvGrpSpPr>
+        <p:cNvPr id="1" name=""/>
+        <p:cNvGrpSpPr/>
+        <p:nvPr/>
+      </p:nvGrpSpPr>
+      <p:grpSpPr>
+        <a:xfrm>
+          <a:off x="0" y="0"/>
+          <a:ext cx="0" cy="0"/>
+          <a:chOff x="0" y="0"/>
+          <a:chExt cx="0" cy="0"/>
+        </a:xfrm>
+      </p:grpSpPr>
+      <p:pic>
+        <p:nvPicPr>
+          <p:cNvPr descr="Images/iv_run20.svg" id="0" name="Picture 1"/>
+          <p:cNvPicPr>
+            <a:picLocks noGrp="1" noChangeAspect="1"/>
+          </p:cNvPicPr>
+          <p:nvPr/>
+        </p:nvPicPr>
+        <p:blipFill>
+          <a:blip r:embed="rId2"/>
+          <a:stretch>
+            <a:fillRect/>
+          </a:stretch>
+        </p:blipFill>
+        <p:spPr bwMode="auto">
+          <a:xfrm>
+            <a:off x="457200" y="1447800"/>
+            <a:ext cx="4038600" cy="2387600"/>
+          </a:xfrm>
+          <a:prstGeom prst="rect">
+            <a:avLst/>
+          </a:prstGeom>
+          <a:noFill/>
+          <a:ln w="9525">
+            <a:noFill/>
+            <a:headEnd/>
+            <a:tailEnd/>
+          </a:ln>
+        </p:spPr>
+      </p:pic>
+      <p:sp>
+        <p:nvSpPr>
+          <p:cNvPr id="1" name="TextBox 3"/>
+          <p:cNvSpPr txBox="1"/>
+          <p:nvPr/>
+        </p:nvSpPr>
+        <p:spPr>
+          <a:xfrm>
+            <a:off x="457200" y="4076700"/>
+            <a:ext cx="4038600" cy="508000"/>
+          </a:xfrm>
+          <a:prstGeom prst="rect">
+            <a:avLst/>
+          </a:prstGeom>
+          <a:noFill/>
+        </p:spPr>
+        <p:txBody>
+          <a:bodyPr/>
+          <a:lstStyle/>
+          <a:p>
+            <a:pPr lvl="0" indent="0" marL="0" algn="ctr">
+              <a:buNone/>
+            </a:pPr>
+            <a:r>
+              <a:rPr/>
+              <a:t>I-V Curve at Base Temp.</a:t>
+            </a:r>
+          </a:p>
+        </p:txBody>
+      </p:sp>
+      <mc:AlternateContent xmlns:mc="http://schemas.openxmlformats.org/markup-compatibility/2006">
+        <mc:Choice xmlns:a14="http://schemas.microsoft.com/office/drawing/2010/main" Requires="a14">
+          <p:sp>
+            <p:nvSpPr>
+              <p:cNvPr id="4" name="Content Placeholder 3"/>
+              <p:cNvSpPr>
+                <a:spLocks noGrp="1"/>
+              </p:cNvSpPr>
+              <p:nvPr>
+                <p:ph idx="2" sz="half"/>
+              </p:nvPr>
+            </p:nvSpPr>
+            <p:spPr/>
+            <p:txBody>
+              <a:bodyPr/>
+              <a:lstStyle/>
+              <a:p>
+                <a:pPr lvl="0"/>
+                <a:r>
+                  <a:rPr b="1"/>
+                  <a:t>Observation</a:t>
+                </a:r>
+                <a:r>
+                  <a:rPr/>
+                  <a:t>:</a:t>
+                </a:r>
+              </a:p>
+              <a:p>
+                <a:pPr lvl="1"/>
+                <a:r>
+                  <a:rPr/>
+                  <a:t>Sharp transition indicates high-quality junction.</a:t>
+                </a:r>
+              </a:p>
+              <a:p>
+                <a:pPr lvl="1"/>
+                <a:r>
+                  <a:rPr/>
+                  <a:t>Finite resistance in normal state (</a:t>
+                </a:r>
+                <a14:m>
+                  <m:oMath xmlns:m="http://schemas.openxmlformats.org/officeDocument/2006/math">
+                    <m:sSub>
+                      <m:e>
+                        <m:r>
+                          <m:t>R</m:t>
+                        </m:r>
+                      </m:e>
+                      <m:sub>
+                        <m:r>
+                          <m:t>N</m:t>
+                        </m:r>
+                      </m:sub>
+                    </m:sSub>
+                  </m:oMath>
+                </a14:m>
+                <a:r>
+                  <a:rPr/>
+                  <a:t>).</a:t>
+                </a:r>
+              </a:p>
+              <a:p>
+                <a:pPr lvl="1"/>
+                <a:r>
+                  <a:rPr b="1"/>
+                  <a:t>Excess Current</a:t>
+                </a:r>
+                <a:r>
+                  <a:rPr/>
+                  <a:t> observed at high bias </a:t>
+                </a:r>
+                <a14:m>
+                  <m:oMath xmlns:m="http://schemas.openxmlformats.org/officeDocument/2006/math">
+                    <m:r>
+                      <m:rPr>
+                        <m:sty m:val="p"/>
+                      </m:rPr>
+                      <m:t>→</m:t>
+                    </m:r>
+                  </m:oMath>
+                </a14:m>
+                <a:r>
+                  <a:rPr/>
+                  <a:t> High transparency interface.</a:t>
+                </a:r>
+              </a:p>
+            </p:txBody>
+          </p:sp>
+        </mc:Choice>
+      </mc:AlternateContent>
+    </p:spTree>
+  </p:cSld>
+</p:sld>
+</file>
+
+<file path=ppt/slides/slide17.xml><?xml version="1.0" encoding="utf-8"?>
+<p:sld xmlns:a="http://schemas.openxmlformats.org/drawingml/2006/main" xmlns:r="http://schemas.openxmlformats.org/officeDocument/2006/relationships" xmlns:p="http://schemas.openxmlformats.org/presentationml/2006/main">
+  <p:cSld>
+    <p:spTree>
+      <p:nvGrpSpPr>
+        <p:cNvPr id="1" name=""/>
+        <p:cNvGrpSpPr/>
+        <p:nvPr/>
+      </p:nvGrpSpPr>
+      <p:grpSpPr>
+        <a:xfrm>
+          <a:off x="0" y="0"/>
+          <a:ext cx="0" cy="0"/>
+          <a:chOff x="0" y="0"/>
+          <a:chExt cx="0" cy="0"/>
+        </a:xfrm>
+      </p:grpSpPr>
+      <p:sp>
+        <p:nvSpPr>
+          <p:cNvPr id="3" name="Content Placeholder 2"/>
+          <p:cNvSpPr>
+            <a:spLocks noGrp="1"/>
+          </p:cNvSpPr>
+          <p:nvPr>
+            <p:ph idx="1"/>
+          </p:nvPr>
+        </p:nvSpPr>
+        <p:spPr/>
+        <p:txBody>
+          <a:bodyPr/>
+          <a:lstStyle/>
+          <a:p>
+            <a:pPr lvl="0" indent="0" marL="0">
+              <a:spcBef>
+                <a:spcPts val="3000"/>
+              </a:spcBef>
+              <a:buNone/>
+            </a:pPr>
+            <a:r>
+              <a:rPr b="1"/>
+              <a:t>Fraunhofer Pattern (AC Josephson Effect)</a:t>
+            </a:r>
+          </a:p>
+        </p:txBody>
+      </p:sp>
+    </p:spTree>
+  </p:cSld>
+</p:sld>
+</file>
+
+<file path=ppt/slides/slide18.xml><?xml version="1.0" encoding="utf-8"?>
 <p:sld xmlns:a="http://schemas.openxmlformats.org/drawingml/2006/main" xmlns:r="http://schemas.openxmlformats.org/officeDocument/2006/relationships" xmlns:p="http://schemas.openxmlformats.org/presentationml/2006/main">
   <p:cSld>
     <p:spTree>
@@ -3375,7 +8025,7 @@
 </p:sld>
 </file>
 
-<file path=ppt/slides/slide11.xml><?xml version="1.0" encoding="utf-8"?>
+<file path=ppt/slides/slide19.xml><?xml version="1.0" encoding="utf-8"?>
 <p:sld xmlns:a="http://schemas.openxmlformats.org/drawingml/2006/main" xmlns:r="http://schemas.openxmlformats.org/officeDocument/2006/relationships" xmlns:p="http://schemas.openxmlformats.org/presentationml/2006/main">
   <p:cSld>
     <p:spTree>
@@ -3944,7 +8594,82 @@
 </p:sld>
 </file>
 
-<file path=ppt/slides/slide12.xml><?xml version="1.0" encoding="utf-8"?>
+<file path=ppt/slides/slide2.xml><?xml version="1.0" encoding="utf-8"?>
+<p:sld xmlns:a="http://schemas.openxmlformats.org/drawingml/2006/main" xmlns:r="http://schemas.openxmlformats.org/officeDocument/2006/relationships" xmlns:p="http://schemas.openxmlformats.org/presentationml/2006/main">
+  <p:cSld>
+    <p:spTree>
+      <p:nvGrpSpPr>
+        <p:cNvPr id="1" name=""/>
+        <p:cNvGrpSpPr/>
+        <p:nvPr/>
+      </p:nvGrpSpPr>
+      <p:grpSpPr>
+        <a:xfrm>
+          <a:off x="0" y="0"/>
+          <a:ext cx="0" cy="0"/>
+          <a:chOff x="0" y="0"/>
+          <a:chExt cx="0" cy="0"/>
+        </a:xfrm>
+      </p:grpSpPr>
+      <p:sp>
+        <p:nvSpPr>
+          <p:cNvPr id="2" name="Title 1"/>
+          <p:cNvSpPr>
+            <a:spLocks noGrp="1"/>
+          </p:cNvSpPr>
+          <p:nvPr>
+            <p:ph type="title"/>
+          </p:nvPr>
+        </p:nvSpPr>
+        <p:spPr/>
+        <p:txBody>
+          <a:bodyPr/>
+          <a:lstStyle/>
+          <a:p>
+            <a:pPr lvl="0" indent="0" marL="0">
+              <a:buNone/>
+            </a:pPr>
+            <a:r>
+              <a:rPr/>
+              <a:t>Introduction</a:t>
+            </a:r>
+          </a:p>
+        </p:txBody>
+      </p:sp>
+      <p:sp>
+        <p:nvSpPr>
+          <p:cNvPr id="3" name="Content Placeholder 2"/>
+          <p:cNvSpPr>
+            <a:spLocks noGrp="1"/>
+          </p:cNvSpPr>
+          <p:nvPr>
+            <p:ph idx="1"/>
+          </p:nvPr>
+        </p:nvSpPr>
+        <p:spPr/>
+        <p:txBody>
+          <a:bodyPr/>
+          <a:lstStyle/>
+          <a:p>
+            <a:pPr lvl="0" indent="0" marL="0">
+              <a:spcBef>
+                <a:spcPts val="3000"/>
+              </a:spcBef>
+              <a:buNone/>
+            </a:pPr>
+            <a:r>
+              <a:rPr b="1"/>
+              <a:t>Outline</a:t>
+            </a:r>
+          </a:p>
+        </p:txBody>
+      </p:sp>
+    </p:spTree>
+  </p:cSld>
+</p:sld>
+</file>
+
+<file path=ppt/slides/slide20.xml><?xml version="1.0" encoding="utf-8"?>
 <p:sld xmlns:a="http://schemas.openxmlformats.org/drawingml/2006/main" xmlns:r="http://schemas.openxmlformats.org/officeDocument/2006/relationships" xmlns:p="http://schemas.openxmlformats.org/presentationml/2006/main">
   <p:cSld>
     <p:spTree>
@@ -4124,7 +8849,7 @@
 </p:sld>
 </file>
 
-<file path=ppt/slides/slide13.xml><?xml version="1.0" encoding="utf-8"?>
+<file path=ppt/slides/slide21.xml><?xml version="1.0" encoding="utf-8"?>
 <p:sld xmlns:a="http://schemas.openxmlformats.org/drawingml/2006/main" xmlns:r="http://schemas.openxmlformats.org/officeDocument/2006/relationships" xmlns:p="http://schemas.openxmlformats.org/presentationml/2006/main">
   <p:cSld>
     <p:spTree>
@@ -4199,7 +8924,7 @@
 </p:sld>
 </file>
 
-<file path=ppt/slides/slide14.xml><?xml version="1.0" encoding="utf-8"?>
+<file path=ppt/slides/slide22.xml><?xml version="1.0" encoding="utf-8"?>
 <p:sld xmlns:a="http://schemas.openxmlformats.org/drawingml/2006/main" xmlns:r="http://schemas.openxmlformats.org/officeDocument/2006/relationships" xmlns:p="http://schemas.openxmlformats.org/presentationml/2006/main">
   <p:cSld>
     <p:spTree>
@@ -4381,7 +9106,7 @@
 </p:sld>
 </file>
 
-<file path=ppt/slides/slide15.xml><?xml version="1.0" encoding="utf-8"?>
+<file path=ppt/slides/slide23.xml><?xml version="1.0" encoding="utf-8"?>
 <p:sld xmlns:a="http://schemas.openxmlformats.org/drawingml/2006/main" xmlns:r="http://schemas.openxmlformats.org/officeDocument/2006/relationships" xmlns:p="http://schemas.openxmlformats.org/presentationml/2006/main">
   <p:cSld>
     <p:spTree>
@@ -4716,7 +9441,7 @@
 </p:sld>
 </file>
 
-<file path=ppt/slides/slide16.xml><?xml version="1.0" encoding="utf-8"?>
+<file path=ppt/slides/slide24.xml><?xml version="1.0" encoding="utf-8"?>
 <p:sld xmlns:a="http://schemas.openxmlformats.org/drawingml/2006/main" xmlns:r="http://schemas.openxmlformats.org/officeDocument/2006/relationships" xmlns:p="http://schemas.openxmlformats.org/presentationml/2006/main">
   <p:cSld>
     <p:spTree>
@@ -4986,7 +9711,7 @@
 </p:sld>
 </file>
 
-<file path=ppt/slides/slide17.xml><?xml version="1.0" encoding="utf-8"?>
+<file path=ppt/slides/slide25.xml><?xml version="1.0" encoding="utf-8"?>
 <p:sld xmlns:a="http://schemas.openxmlformats.org/drawingml/2006/main" xmlns:r="http://schemas.openxmlformats.org/officeDocument/2006/relationships" xmlns:p="http://schemas.openxmlformats.org/presentationml/2006/main">
   <p:cSld>
     <p:spTree>
@@ -5033,7 +9758,137 @@
 </p:sld>
 </file>
 
-<file path=ppt/slides/slide2.xml><?xml version="1.0" encoding="utf-8"?>
+<file path=ppt/slides/slide3.xml><?xml version="1.0" encoding="utf-8"?>
+<p:sld xmlns:a="http://schemas.openxmlformats.org/drawingml/2006/main" xmlns:r="http://schemas.openxmlformats.org/officeDocument/2006/relationships" xmlns:p="http://schemas.openxmlformats.org/presentationml/2006/main">
+  <p:cSld>
+    <p:spTree>
+      <p:nvGrpSpPr>
+        <p:cNvPr id="1" name=""/>
+        <p:cNvGrpSpPr/>
+        <p:nvPr/>
+      </p:nvGrpSpPr>
+      <p:grpSpPr>
+        <a:xfrm>
+          <a:off x="0" y="0"/>
+          <a:ext cx="0" cy="0"/>
+          <a:chOff x="0" y="0"/>
+          <a:chExt cx="0" cy="0"/>
+        </a:xfrm>
+      </p:grpSpPr>
+      <mc:AlternateContent xmlns:mc="http://schemas.openxmlformats.org/markup-compatibility/2006">
+        <mc:Choice xmlns:a14="http://schemas.microsoft.com/office/drawing/2010/main" Requires="a14">
+          <p:sp>
+            <p:nvSpPr>
+              <p:cNvPr id="3" name="Content Placeholder 2"/>
+              <p:cNvSpPr>
+                <a:spLocks noGrp="1"/>
+              </p:cNvSpPr>
+              <p:nvPr>
+                <p:ph idx="1" sz="half"/>
+              </p:nvPr>
+            </p:nvSpPr>
+            <p:spPr/>
+            <p:txBody>
+              <a:bodyPr/>
+              <a:lstStyle/>
+              <a:p>
+                <a:pPr lvl="0" indent="0" marL="0">
+                  <a:spcBef>
+                    <a:spcPts val="3000"/>
+                  </a:spcBef>
+                  <a:buNone/>
+                </a:pPr>
+                <a:r>
+                  <a:rPr b="1"/>
+                  <a:t>Introduction</a:t>
+                </a:r>
+              </a:p>
+              <a:p>
+                <a:pPr lvl="0"/>
+                <a:r>
+                  <a:rPr/>
+                  <a:t>Research motivation</a:t>
+                </a:r>
+              </a:p>
+              <a:p>
+                <a:pPr lvl="0"/>
+                <a:r>
+                  <a:rPr/>
+                  <a:t>1T-PtTe</a:t>
+                </a:r>
+                <a14:m>
+                  <m:oMath xmlns:m="http://schemas.openxmlformats.org/officeDocument/2006/math">
+                    <m:sSub>
+                      <m:e>
+                        <m:r>
+                          <m:t>​</m:t>
+                        </m:r>
+                      </m:e>
+                      <m:sub>
+                        <m:r>
+                          <m:t>2</m:t>
+                        </m:r>
+                      </m:sub>
+                    </m:sSub>
+                  </m:oMath>
+                </a14:m>
+                <a:r>
+                  <a:rPr/>
+                  <a:t> (Type-II Dirac)</a:t>
+                </a:r>
+              </a:p>
+            </p:txBody>
+          </p:sp>
+        </mc:Choice>
+      </mc:AlternateContent>
+      <p:sp>
+        <p:nvSpPr>
+          <p:cNvPr id="4" name="Content Placeholder 3"/>
+          <p:cNvSpPr>
+            <a:spLocks noGrp="1"/>
+          </p:cNvSpPr>
+          <p:nvPr>
+            <p:ph idx="2" sz="half"/>
+          </p:nvPr>
+        </p:nvSpPr>
+        <p:spPr/>
+        <p:txBody>
+          <a:bodyPr/>
+          <a:lstStyle/>
+          <a:p>
+            <a:pPr lvl="0" indent="0" marL="0">
+              <a:spcBef>
+                <a:spcPts val="3000"/>
+              </a:spcBef>
+              <a:buNone/>
+            </a:pPr>
+            <a:r>
+              <a:rPr b="1"/>
+              <a:t>Theory</a:t>
+            </a:r>
+          </a:p>
+          <a:p>
+            <a:pPr lvl="0"/>
+            <a:r>
+              <a:rPr/>
+              <a:t>Josephson effect &amp; CPR</a:t>
+            </a:r>
+          </a:p>
+          <a:p>
+            <a:pPr lvl="0"/>
+            <a:r>
+              <a:rPr/>
+              <a:t>Josephson diode effect</a:t>
+            </a:r>
+          </a:p>
+        </p:txBody>
+      </p:sp>
+    </p:spTree>
+  </p:cSld>
+</p:sld>
+</file>
+
+<file path=ppt/slides/slide4.xml><?xml version="1.0" encoding="utf-8"?>
 <p:sld xmlns:a="http://schemas.openxmlformats.org/drawingml/2006/main" xmlns:r="http://schemas.openxmlformats.org/officeDocument/2006/relationships" xmlns:p="http://schemas.openxmlformats.org/presentationml/2006/main">
   <p:cSld>
     <p:spTree>
@@ -5052,12 +9907,12 @@
       </p:grpSpPr>
       <p:sp>
         <p:nvSpPr>
-          <p:cNvPr id="2" name="Title 1"/>
+          <p:cNvPr id="3" name="Content Placeholder 2"/>
           <p:cNvSpPr>
             <a:spLocks noGrp="1"/>
           </p:cNvSpPr>
           <p:nvPr>
-            <p:ph type="title"/>
+            <p:ph idx="1"/>
           </p:nvPr>
         </p:nvSpPr>
         <p:spPr/>
@@ -5066,15 +9921,191 @@
           <a:lstStyle/>
           <a:p>
             <a:pPr lvl="0" indent="0" marL="0">
+              <a:spcBef>
+                <a:spcPts val="3000"/>
+              </a:spcBef>
               <a:buNone/>
             </a:pPr>
             <a:r>
-              <a:rPr/>
-              <a:t>Introduction</a:t>
+              <a:rPr b="1"/>
+              <a:t>Research Motivation</a:t>
             </a:r>
           </a:p>
         </p:txBody>
       </p:sp>
+    </p:spTree>
+  </p:cSld>
+</p:sld>
+</file>
+
+<file path=ppt/slides/slide5.xml><?xml version="1.0" encoding="utf-8"?>
+<p:sld xmlns:a="http://schemas.openxmlformats.org/drawingml/2006/main" xmlns:r="http://schemas.openxmlformats.org/officeDocument/2006/relationships" xmlns:p="http://schemas.openxmlformats.org/presentationml/2006/main">
+  <p:cSld>
+    <p:spTree>
+      <p:nvGrpSpPr>
+        <p:cNvPr id="1" name=""/>
+        <p:cNvGrpSpPr/>
+        <p:nvPr/>
+      </p:nvGrpSpPr>
+      <p:grpSpPr>
+        <a:xfrm>
+          <a:off x="0" y="0"/>
+          <a:ext cx="0" cy="0"/>
+          <a:chOff x="0" y="0"/>
+          <a:chExt cx="0" cy="0"/>
+        </a:xfrm>
+      </p:grpSpPr>
+      <mc:AlternateContent xmlns:mc="http://schemas.openxmlformats.org/markup-compatibility/2006">
+        <mc:Choice xmlns:a14="http://schemas.microsoft.com/office/drawing/2010/main" Requires="a14">
+          <p:sp>
+            <p:nvSpPr>
+              <p:cNvPr id="3" name="Content Placeholder 2"/>
+              <p:cNvSpPr>
+                <a:spLocks noGrp="1"/>
+              </p:cNvSpPr>
+              <p:nvPr>
+                <p:ph idx="1" sz="half"/>
+              </p:nvPr>
+            </p:nvSpPr>
+            <p:spPr/>
+            <p:txBody>
+              <a:bodyPr/>
+              <a:lstStyle/>
+              <a:p>
+                <a:pPr lvl="0" indent="0" marL="0">
+                  <a:spcBef>
+                    <a:spcPts val="3000"/>
+                  </a:spcBef>
+                  <a:buNone/>
+                </a:pPr>
+                <a:r>
+                  <a:rPr b="1"/>
+                  <a:t>Topological SC</a:t>
+                </a:r>
+              </a:p>
+              <a:p>
+                <a:pPr lvl="0"/>
+                <a:r>
+                  <a:rPr/>
+                  <a:t>Type-II Dirac semimetal </a:t>
+                </a:r>
+                <a:r>
+                  <a:rPr b="1"/>
+                  <a:t>PtTe</a:t>
+                </a:r>
+                <a14:m>
+                  <m:oMath xmlns:m="http://schemas.openxmlformats.org/officeDocument/2006/math">
+                    <m:sSub>
+                      <m:e>
+                        <m:r>
+                          <m:t>​</m:t>
+                        </m:r>
+                      </m:e>
+                      <m:sub>
+                        <m:r>
+                          <m:t>2</m:t>
+                        </m:r>
+                      </m:sub>
+                    </m:sSub>
+                  </m:oMath>
+                </a14:m>
+                <a:r>
+                  <a:rPr/>
+                  <a:t> proximitized by a superconductor</a:t>
+                </a:r>
+              </a:p>
+              <a:p>
+                <a:pPr lvl="0"/>
+                <a:r>
+                  <a:rPr/>
+                  <a:t>Platform for novel quantum transport (surface/edge states)</a:t>
+                </a:r>
+              </a:p>
+            </p:txBody>
+          </p:sp>
+        </mc:Choice>
+      </mc:AlternateContent>
+      <mc:AlternateContent xmlns:mc="http://schemas.openxmlformats.org/markup-compatibility/2006">
+        <mc:Choice xmlns:a14="http://schemas.microsoft.com/office/drawing/2010/main" Requires="a14">
+          <p:sp>
+            <p:nvSpPr>
+              <p:cNvPr id="4" name="Content Placeholder 3"/>
+              <p:cNvSpPr>
+                <a:spLocks noGrp="1"/>
+              </p:cNvSpPr>
+              <p:nvPr>
+                <p:ph idx="2" sz="half"/>
+              </p:nvPr>
+            </p:nvSpPr>
+            <p:spPr/>
+            <p:txBody>
+              <a:bodyPr/>
+              <a:lstStyle/>
+              <a:p>
+                <a:pPr lvl="0" indent="0" marL="0">
+                  <a:spcBef>
+                    <a:spcPts val="3000"/>
+                  </a:spcBef>
+                  <a:buNone/>
+                </a:pPr>
+                <a:r>
+                  <a:rPr b="1"/>
+                  <a:t>CPR</a:t>
+                </a:r>
+              </a:p>
+              <a:p>
+                <a:pPr lvl="0"/>
+                <a:r>
+                  <a:rPr/>
+                  <a:t>Direct probe of junction physics beyond simple </a:t>
+                </a:r>
+                <a14:m>
+                  <m:oMath xmlns:m="http://schemas.openxmlformats.org/officeDocument/2006/math">
+                    <m:r>
+                      <m:rPr>
+                        <m:sty m:val="p"/>
+                      </m:rPr>
+                      <m:t>sin</m:t>
+                    </m:r>
+                    <m:r>
+                      <m:t>ϕ</m:t>
+                    </m:r>
+                  </m:oMath>
+                </a14:m>
+              </a:p>
+              <a:p>
+                <a:pPr lvl="0"/>
+                <a:r>
+                  <a:rPr/>
+                  <a:t>Harmonics encode transparency / Andreev bound states</a:t>
+                </a:r>
+              </a:p>
+            </p:txBody>
+          </p:sp>
+        </mc:Choice>
+      </mc:AlternateContent>
+    </p:spTree>
+  </p:cSld>
+</p:sld>
+</file>
+
+<file path=ppt/slides/slide6.xml><?xml version="1.0" encoding="utf-8"?>
+<p:sld xmlns:a="http://schemas.openxmlformats.org/drawingml/2006/main" xmlns:r="http://schemas.openxmlformats.org/officeDocument/2006/relationships" xmlns:p="http://schemas.openxmlformats.org/presentationml/2006/main">
+  <p:cSld>
+    <p:spTree>
+      <p:nvGrpSpPr>
+        <p:cNvPr id="1" name=""/>
+        <p:cNvGrpSpPr/>
+        <p:nvPr/>
+      </p:nvGrpSpPr>
+      <p:grpSpPr>
+        <a:xfrm>
+          <a:off x="0" y="0"/>
+          <a:ext cx="0" cy="0"/>
+          <a:chOff x="0" y="0"/>
+          <a:chExt cx="0" cy="0"/>
+        </a:xfrm>
+      </p:grpSpPr>
       <mc:AlternateContent xmlns:mc="http://schemas.openxmlformats.org/markup-compatibility/2006">
         <mc:Choice xmlns:a14="http://schemas.microsoft.com/office/drawing/2010/main" Requires="a14">
           <p:sp>
@@ -5100,336 +10131,6 @@
                 </a:pPr>
                 <a:r>
                   <a:rPr b="1"/>
-                  <a:t>Outline</a:t>
-                </a:r>
-              </a:p>
-              <a:p>
-                <a:pPr lvl="0" indent="0" marL="0">
-                  <a:spcBef>
-                    <a:spcPts val="3000"/>
-                  </a:spcBef>
-                  <a:buNone/>
-                </a:pPr>
-                <a:r>
-                  <a:rPr b="1"/>
-                  <a:t>Introduction</a:t>
-                </a:r>
-              </a:p>
-              <a:p>
-                <a:pPr lvl="0"/>
-                <a:r>
-                  <a:rPr/>
-                  <a:t>Research motivation</a:t>
-                </a:r>
-              </a:p>
-              <a:p>
-                <a:pPr lvl="0"/>
-                <a:r>
-                  <a:rPr/>
-                  <a:t>1T-PtTe</a:t>
-                </a:r>
-                <a14:m>
-                  <m:oMath xmlns:m="http://schemas.openxmlformats.org/officeDocument/2006/math">
-                    <m:sSub>
-                      <m:e>
-                        <m:r>
-                          <m:t>​</m:t>
-                        </m:r>
-                      </m:e>
-                      <m:sub>
-                        <m:r>
-                          <m:t>2</m:t>
-                        </m:r>
-                      </m:sub>
-                    </m:sSub>
-                  </m:oMath>
-                </a14:m>
-                <a:r>
-                  <a:rPr/>
-                  <a:t> (Type-II Dirac semimetal)</a:t>
-                </a:r>
-              </a:p>
-              <a:p>
-                <a:pPr lvl="0" indent="0" marL="0">
-                  <a:spcBef>
-                    <a:spcPts val="3000"/>
-                  </a:spcBef>
-                  <a:buNone/>
-                </a:pPr>
-                <a:r>
-                  <a:rPr b="1"/>
-                  <a:t>Theory</a:t>
-                </a:r>
-              </a:p>
-              <a:p>
-                <a:pPr lvl="0"/>
-                <a:r>
-                  <a:rPr/>
-                  <a:t>Josephson effect &amp; CPR</a:t>
-                </a:r>
-              </a:p>
-              <a:p>
-                <a:pPr lvl="0"/>
-                <a:r>
-                  <a:rPr/>
-                  <a:t>Josephson diode effect (JDE)</a:t>
-                </a:r>
-              </a:p>
-              <a:p>
-                <a:pPr lvl="0" indent="0" marL="0">
-                  <a:spcBef>
-                    <a:spcPts val="3000"/>
-                  </a:spcBef>
-                  <a:buNone/>
-                </a:pPr>
-                <a:r>
-                  <a:rPr b="1"/>
-                  <a:t>Methods</a:t>
-                </a:r>
-              </a:p>
-              <a:p>
-                <a:pPr lvl="0"/>
-                <a:r>
-                  <a:rPr/>
-                  <a:t>Device fabrication</a:t>
-                </a:r>
-              </a:p>
-              <a:p>
-                <a:pPr lvl="0"/>
-                <a:r>
-                  <a:rPr/>
-                  <a:t>Measurement setup</a:t>
-                </a:r>
-              </a:p>
-              <a:p>
-                <a:pPr lvl="0" indent="0" marL="0">
-                  <a:spcBef>
-                    <a:spcPts val="3000"/>
-                  </a:spcBef>
-                  <a:buNone/>
-                </a:pPr>
-                <a:r>
-                  <a:rPr b="1"/>
-                  <a:t>Results &amp; conclusion</a:t>
-                </a:r>
-              </a:p>
-              <a:p>
-                <a:pPr lvl="0"/>
-                <a:r>
-                  <a:rPr/>
-                  <a:t>Basic characterization</a:t>
-                </a:r>
-              </a:p>
-              <a:p>
-                <a:pPr lvl="0"/>
-                <a:r>
-                  <a:rPr/>
-                  <a:t>CPR analysis</a:t>
-                </a:r>
-              </a:p>
-              <a:p>
-                <a:pPr lvl="0"/>
-                <a:r>
-                  <a:rPr/>
-                  <a:t>In-plane field effect</a:t>
-                </a:r>
-              </a:p>
-              <a:p>
-                <a:pPr lvl="0" indent="0" marL="0">
-                  <a:spcBef>
-                    <a:spcPts val="3000"/>
-                  </a:spcBef>
-                  <a:buNone/>
-                </a:pPr>
-                <a:r>
-                  <a:rPr b="1"/>
-                  <a:t>Research Motivation</a:t>
-                </a:r>
-              </a:p>
-              <a:p>
-                <a:pPr lvl="0" indent="0" marL="0">
-                  <a:spcBef>
-                    <a:spcPts val="3000"/>
-                  </a:spcBef>
-                  <a:buNone/>
-                </a:pPr>
-                <a:r>
-                  <a:rPr b="1"/>
-                  <a:t>Topological materials + superconductivity</a:t>
-                </a:r>
-              </a:p>
-              <a:p>
-                <a:pPr lvl="0"/>
-                <a:r>
-                  <a:rPr/>
-                  <a:t>Type-II Dirac semimetal </a:t>
-                </a:r>
-                <a:r>
-                  <a:rPr b="1"/>
-                  <a:t>PtTe</a:t>
-                </a:r>
-                <a14:m>
-                  <m:oMath xmlns:m="http://schemas.openxmlformats.org/officeDocument/2006/math">
-                    <m:sSub>
-                      <m:e>
-                        <m:r>
-                          <m:t>​</m:t>
-                        </m:r>
-                      </m:e>
-                      <m:sub>
-                        <m:r>
-                          <m:t>2</m:t>
-                        </m:r>
-                      </m:sub>
-                    </m:sSub>
-                  </m:oMath>
-                </a14:m>
-                <a:r>
-                  <a:rPr/>
-                  <a:t> proximitized by a superconductor</a:t>
-                </a:r>
-              </a:p>
-              <a:p>
-                <a:pPr lvl="0"/>
-                <a:r>
-                  <a:rPr/>
-                  <a:t>Platform for novel quantum transport (e.g., surface/edge states)</a:t>
-                </a:r>
-              </a:p>
-              <a:p>
-                <a:pPr lvl="0" indent="0" marL="0">
-                  <a:spcBef>
-                    <a:spcPts val="3000"/>
-                  </a:spcBef>
-                  <a:buNone/>
-                </a:pPr>
-                <a:r>
-                  <a:rPr b="1"/>
-                  <a:t>Current–phase relation (CPR)</a:t>
-                </a:r>
-              </a:p>
-              <a:p>
-                <a:pPr lvl="0"/>
-                <a:r>
-                  <a:rPr/>
-                  <a:t>Direct probe of junction physics beyond a simple </a:t>
-                </a:r>
-                <a14:m>
-                  <m:oMath xmlns:m="http://schemas.openxmlformats.org/officeDocument/2006/math">
-                    <m:r>
-                      <m:rPr>
-                        <m:sty m:val="p"/>
-                      </m:rPr>
-                      <m:t>sin</m:t>
-                    </m:r>
-                    <m:r>
-                      <m:t>ϕ</m:t>
-                    </m:r>
-                  </m:oMath>
-                </a14:m>
-              </a:p>
-              <a:p>
-                <a:pPr lvl="0"/>
-                <a:r>
-                  <a:rPr/>
-                  <a:t>Harmonics encode transparency / Andreev bound states</a:t>
-                </a:r>
-              </a:p>
-              <a:p>
-                <a:pPr lvl="0" indent="0" marL="0">
-                  <a:spcBef>
-                    <a:spcPts val="3000"/>
-                  </a:spcBef>
-                  <a:buNone/>
-                </a:pPr>
-                <a:r>
-                  <a:rPr b="1"/>
-                  <a:t>Superconducting diode effect</a:t>
-                </a:r>
-              </a:p>
-              <a:p>
-                <a:pPr lvl="0"/>
-                <a:r>
-                  <a:rPr/>
-                  <a:t>Non-reciprocal transport </a:t>
-                </a:r>
-                <a14:m>
-                  <m:oMath xmlns:m="http://schemas.openxmlformats.org/officeDocument/2006/math">
-                    <m:sSubSup>
-                      <m:e>
-                        <m:r>
-                          <m:t>I</m:t>
-                        </m:r>
-                      </m:e>
-                      <m:sub>
-                        <m:r>
-                          <m:t>c</m:t>
-                        </m:r>
-                      </m:sub>
-                      <m:sup>
-                        <m:r>
-                          <m:rPr>
-                            <m:sty m:val="p"/>
-                          </m:rPr>
-                          <m:t>+</m:t>
-                        </m:r>
-                      </m:sup>
-                    </m:sSubSup>
-                    <m:r>
-                      <m:rPr>
-                        <m:sty m:val="p"/>
-                      </m:rPr>
-                      <m:t>≠</m:t>
-                    </m:r>
-                    <m:d>
-                      <m:dPr>
-                        <m:begChr m:val="|"/>
-                        <m:sepChr m:val=""/>
-                        <m:endChr m:val="|"/>
-                        <m:grow/>
-                      </m:dPr>
-                      <m:e>
-                        <m:sSubSup>
-                          <m:e>
-                            <m:r>
-                              <m:t>I</m:t>
-                            </m:r>
-                          </m:e>
-                          <m:sub>
-                            <m:r>
-                              <m:t>c</m:t>
-                            </m:r>
-                          </m:sub>
-                          <m:sup>
-                            <m:r>
-                              <m:rPr>
-                                <m:sty m:val="p"/>
-                              </m:rPr>
-                              <m:t>−</m:t>
-                            </m:r>
-                          </m:sup>
-                        </m:sSubSup>
-                      </m:e>
-                    </m:d>
-                  </m:oMath>
-                </a14:m>
-              </a:p>
-              <a:p>
-                <a:pPr lvl="0"/>
-                <a:r>
-                  <a:rPr/>
-                  <a:t>Route to dissipationless rectification &amp; superconducting electronics</a:t>
-                </a:r>
-              </a:p>
-              <a:p>
-                <a:pPr lvl="0" indent="0" marL="0">
-                  <a:spcBef>
-                    <a:spcPts val="3000"/>
-                  </a:spcBef>
-                  <a:buNone/>
-                </a:pPr>
-                <a:r>
-                  <a:rPr b="1"/>
                   <a:t>1T-PtTe</a:t>
                 </a:r>
                 <a14:m>
@@ -5462,7 +10163,7 @@
 </p:sld>
 </file>
 
-<file path=ppt/slides/slide3.xml><?xml version="1.0" encoding="utf-8"?>
+<file path=ppt/slides/slide7.xml><?xml version="1.0" encoding="utf-8"?>
 <p:sld xmlns:a="http://schemas.openxmlformats.org/drawingml/2006/main" xmlns:r="http://schemas.openxmlformats.org/officeDocument/2006/relationships" xmlns:p="http://schemas.openxmlformats.org/presentationml/2006/main">
   <p:cSld>
     <p:spTree>
@@ -5696,7 +10397,7 @@
 </p:sld>
 </file>
 
-<file path=ppt/slides/slide4.xml><?xml version="1.0" encoding="utf-8"?>
+<file path=ppt/slides/slide8.xml><?xml version="1.0" encoding="utf-8"?>
 <p:sld xmlns:a="http://schemas.openxmlformats.org/drawingml/2006/main" xmlns:r="http://schemas.openxmlformats.org/officeDocument/2006/relationships" xmlns:p="http://schemas.openxmlformats.org/presentationml/2006/main">
   <p:cSld>
     <p:spTree>
@@ -5738,480 +10439,14 @@
           </a:p>
         </p:txBody>
       </p:sp>
-      <mc:AlternateContent xmlns:mc="http://schemas.openxmlformats.org/markup-compatibility/2006">
-        <mc:Choice xmlns:a14="http://schemas.microsoft.com/office/drawing/2010/main" Requires="a14">
-          <p:sp>
-            <p:nvSpPr>
-              <p:cNvPr id="3" name="Content Placeholder 2"/>
-              <p:cNvSpPr>
-                <a:spLocks noGrp="1"/>
-              </p:cNvSpPr>
-              <p:nvPr>
-                <p:ph idx="1"/>
-              </p:nvPr>
-            </p:nvSpPr>
-            <p:spPr/>
-            <p:txBody>
-              <a:bodyPr/>
-              <a:lstStyle/>
-              <a:p>
-                <a:pPr lvl="0" indent="0" marL="0">
-                  <a:spcBef>
-                    <a:spcPts val="3000"/>
-                  </a:spcBef>
-                  <a:buNone/>
-                </a:pPr>
-                <a:r>
-                  <a:rPr b="1"/>
-                  <a:t>Josephson Effect &amp; Current–Phase Relation</a:t>
-                </a:r>
-              </a:p>
-              <a:p>
-                <a:pPr lvl="0" indent="0" marL="0">
-                  <a:spcBef>
-                    <a:spcPts val="3000"/>
-                  </a:spcBef>
-                  <a:buNone/>
-                </a:pPr>
-                <a:r>
-                  <a:rPr b="1"/>
-                  <a:t>Josephson relations</a:t>
-                </a:r>
-              </a:p>
-              <a:p>
-                <a:pPr lvl="0"/>
-                <a:r>
-                  <a:rPr/>
-                  <a:t>DC: </a:t>
-                </a:r>
-                <a14:m>
-                  <m:oMath xmlns:m="http://schemas.openxmlformats.org/officeDocument/2006/math">
-                    <m:sSub>
-                      <m:e>
-                        <m:r>
-                          <m:t>I</m:t>
-                        </m:r>
-                      </m:e>
-                      <m:sub>
-                        <m:r>
-                          <m:t>s</m:t>
-                        </m:r>
-                      </m:sub>
-                    </m:sSub>
-                    <m:r>
-                      <m:rPr>
-                        <m:sty m:val="p"/>
-                      </m:rPr>
-                      <m:t>=</m:t>
-                    </m:r>
-                    <m:sSub>
-                      <m:e>
-                        <m:r>
-                          <m:t>I</m:t>
-                        </m:r>
-                      </m:e>
-                      <m:sub>
-                        <m:r>
-                          <m:t>c</m:t>
-                        </m:r>
-                      </m:sub>
-                    </m:sSub>
-                    <m:r>
-                      <m:rPr>
-                        <m:sty m:val="p"/>
-                      </m:rPr>
-                      <m:t>sin</m:t>
-                    </m:r>
-                    <m:r>
-                      <m:t>ϕ</m:t>
-                    </m:r>
-                  </m:oMath>
-                </a14:m>
-                <a:r>
-                  <a:rPr/>
-                  <a:t> (ideal tunnel junction)</a:t>
-                </a:r>
-              </a:p>
-              <a:p>
-                <a:pPr lvl="0"/>
-                <a:r>
-                  <a:rPr/>
-                  <a:t>AC: </a:t>
-                </a:r>
-                <a14:m>
-                  <m:oMath xmlns:m="http://schemas.openxmlformats.org/officeDocument/2006/math">
-                    <m:acc>
-                      <m:accPr>
-                        <m:chr m:val="̇"/>
-                      </m:accPr>
-                      <m:e>
-                        <m:r>
-                          <m:t>ϕ</m:t>
-                        </m:r>
-                      </m:e>
-                    </m:acc>
-                    <m:r>
-                      <m:rPr>
-                        <m:sty m:val="p"/>
-                      </m:rPr>
-                      <m:t>=</m:t>
-                    </m:r>
-                    <m:f>
-                      <m:fPr>
-                        <m:type m:val="bar"/>
-                      </m:fPr>
-                      <m:num>
-                        <m:r>
-                          <m:t>2</m:t>
-                        </m:r>
-                        <m:r>
-                          <m:t>e</m:t>
-                        </m:r>
-                      </m:num>
-                      <m:den>
-                        <m:r>
-                          <m:rPr>
-                            <m:sty m:val="p"/>
-                          </m:rPr>
-                          <m:t>ℏ</m:t>
-                        </m:r>
-                      </m:den>
-                    </m:f>
-                    <m:r>
-                      <m:t>V</m:t>
-                    </m:r>
-                  </m:oMath>
-                </a14:m>
-              </a:p>
-              <a:p>
-                <a:pPr lvl="0" indent="0" marL="0">
-                  <a:spcBef>
-                    <a:spcPts val="3000"/>
-                  </a:spcBef>
-                  <a:buNone/>
-                </a:pPr>
-                <a:r>
-                  <a:rPr b="1"/>
-                  <a:t>Beyond sinusoidal CPR</a:t>
-                </a:r>
-              </a:p>
-              <a:p>
-                <a:pPr lvl="0"/>
-                <a:r>
-                  <a:rPr/>
-                  <a:t>High transparency → </a:t>
-                </a:r>
-                <a:r>
-                  <a:rPr b="1"/>
-                  <a:t>skewed</a:t>
-                </a:r>
-                <a:r>
-                  <a:rPr/>
-                  <a:t> CPR</a:t>
-                </a:r>
-              </a:p>
-              <a:p>
-                <a:pPr lvl="0"/>
-                <a:r>
-                  <a:rPr/>
-                  <a:t>Harmonics: </a:t>
-                </a:r>
-                <a14:m>
-                  <m:oMath xmlns:m="http://schemas.openxmlformats.org/officeDocument/2006/math">
-                    <m:r>
-                      <m:t>I</m:t>
-                    </m:r>
-                    <m:d>
-                      <m:dPr>
-                        <m:begChr m:val="("/>
-                        <m:sepChr m:val=""/>
-                        <m:endChr m:val=")"/>
-                        <m:grow/>
-                      </m:dPr>
-                      <m:e>
-                        <m:r>
-                          <m:t>ϕ</m:t>
-                        </m:r>
-                      </m:e>
-                    </m:d>
-                    <m:r>
-                      <m:rPr>
-                        <m:sty m:val="p"/>
-                      </m:rPr>
-                      <m:t>=</m:t>
-                    </m:r>
-                    <m:nary>
-                      <m:naryPr>
-                        <m:chr m:val="∑"/>
-                        <m:limLoc m:val="undOvr"/>
-                        <m:subHide m:val="off"/>
-                        <m:supHide m:val="on"/>
-                      </m:naryPr>
-                      <m:sub>
-                        <m:r>
-                          <m:t>n</m:t>
-                        </m:r>
-                      </m:sub>
-                      <m:sup>
-                        <m:r>
-                          <m:t>​</m:t>
-                        </m:r>
-                      </m:sup>
-                      <m:e>
-                        <m:sSub>
-                          <m:e>
-                            <m:r>
-                              <m:t>I</m:t>
-                            </m:r>
-                          </m:e>
-                          <m:sub>
-                            <m:r>
-                              <m:t>n</m:t>
-                            </m:r>
-                          </m:sub>
-                        </m:sSub>
-                      </m:e>
-                    </m:nary>
-                    <m:r>
-                      <m:rPr>
-                        <m:sty m:val="p"/>
-                      </m:rPr>
-                      <m:t>sin</m:t>
-                    </m:r>
-                    <m:d>
-                      <m:dPr>
-                        <m:begChr m:val="("/>
-                        <m:sepChr m:val=""/>
-                        <m:endChr m:val=")"/>
-                        <m:grow/>
-                      </m:dPr>
-                      <m:e>
-                        <m:r>
-                          <m:t>n</m:t>
-                        </m:r>
-                        <m:r>
-                          <m:t>ϕ</m:t>
-                        </m:r>
-                        <m:r>
-                          <m:rPr>
-                            <m:sty m:val="p"/>
-                          </m:rPr>
-                          <m:t>+</m:t>
-                        </m:r>
-                        <m:sSub>
-                          <m:e>
-                            <m:r>
-                              <m:t>δ</m:t>
-                            </m:r>
-                          </m:e>
-                          <m:sub>
-                            <m:r>
-                              <m:t>n</m:t>
-                            </m:r>
-                          </m:sub>
-                        </m:sSub>
-                      </m:e>
-                    </m:d>
-                  </m:oMath>
-                </a14:m>
-              </a:p>
-              <a:p>
-                <a:pPr lvl="0"/>
-                <a:r>
-                  <a:rPr/>
-                  <a:t>Access via </a:t>
-                </a:r>
-                <a:r>
-                  <a:rPr b="1"/>
-                  <a:t>asymmetric SQUID</a:t>
-                </a:r>
-                <a:r>
-                  <a:rPr/>
-                  <a:t> readout</a:t>
-                </a:r>
-              </a:p>
-              <a:p>
-                <a:pPr lvl="0" indent="0" marL="0">
-                  <a:spcBef>
-                    <a:spcPts val="3000"/>
-                  </a:spcBef>
-                  <a:buNone/>
-                </a:pPr>
-                <a:r>
-                  <a:rPr b="1"/>
-                  <a:t>Josephson Diode Effect (Concept)</a:t>
-                </a:r>
-              </a:p>
-              <a:p>
-                <a:pPr lvl="0" indent="0" marL="0">
-                  <a:spcBef>
-                    <a:spcPts val="3000"/>
-                  </a:spcBef>
-                  <a:buNone/>
-                </a:pPr>
-                <a:r>
-                  <a:rPr b="1"/>
-                  <a:t>Definition</a:t>
-                </a:r>
-              </a:p>
-              <a:p>
-                <a:pPr lvl="0"/>
-                <a:r>
-                  <a:rPr/>
-                  <a:t>Non‑reciprocal critical current</a:t>
-                </a:r>
-                <a:br/>
-                <a14:m>
-                  <m:oMath xmlns:m="http://schemas.openxmlformats.org/officeDocument/2006/math">
-                    <m:sSubSup>
-                      <m:e>
-                        <m:r>
-                          <m:t>I</m:t>
-                        </m:r>
-                      </m:e>
-                      <m:sub>
-                        <m:r>
-                          <m:t>c</m:t>
-                        </m:r>
-                      </m:sub>
-                      <m:sup>
-                        <m:r>
-                          <m:rPr>
-                            <m:sty m:val="p"/>
-                          </m:rPr>
-                          <m:t>+</m:t>
-                        </m:r>
-                      </m:sup>
-                    </m:sSubSup>
-                    <m:r>
-                      <m:rPr>
-                        <m:sty m:val="p"/>
-                      </m:rPr>
-                      <m:t>≠</m:t>
-                    </m:r>
-                    <m:d>
-                      <m:dPr>
-                        <m:begChr m:val="|"/>
-                        <m:sepChr m:val=""/>
-                        <m:endChr m:val="|"/>
-                        <m:grow/>
-                      </m:dPr>
-                      <m:e>
-                        <m:sSubSup>
-                          <m:e>
-                            <m:r>
-                              <m:t>I</m:t>
-                            </m:r>
-                          </m:e>
-                          <m:sub>
-                            <m:r>
-                              <m:t>c</m:t>
-                            </m:r>
-                          </m:sub>
-                          <m:sup>
-                            <m:r>
-                              <m:rPr>
-                                <m:sty m:val="p"/>
-                              </m:rPr>
-                              <m:t>−</m:t>
-                            </m:r>
-                          </m:sup>
-                        </m:sSubSup>
-                      </m:e>
-                    </m:d>
-                  </m:oMath>
-                </a14:m>
-              </a:p>
-              <a:p>
-                <a:pPr lvl="0"/>
-                <a:r>
-                  <a:rPr/>
-                  <a:t>Superconducting rectification without Joule heating</a:t>
-                </a:r>
-              </a:p>
-              <a:p>
-                <a:pPr lvl="0" indent="0" marL="0">
-                  <a:spcBef>
-                    <a:spcPts val="3000"/>
-                  </a:spcBef>
-                  <a:buNone/>
-                </a:pPr>
-                <a:r>
-                  <a:rPr b="1"/>
-                  <a:t>Typical ingredients</a:t>
-                </a:r>
-              </a:p>
-              <a:p>
-                <a:pPr lvl="0"/>
-                <a:r>
-                  <a:rPr/>
-                  <a:t>Broken inversion symmetry + broken time‑reversal symmetry</a:t>
-                </a:r>
-              </a:p>
-              <a:p>
-                <a:pPr lvl="0"/>
-                <a:r>
-                  <a:rPr/>
-                  <a:t>Often tuned by </a:t>
-                </a:r>
-                <a14:m>
-                  <m:oMath xmlns:m="http://schemas.openxmlformats.org/officeDocument/2006/math">
-                    <m:sSub>
-                      <m:e>
-                        <m:r>
-                          <m:t>B</m:t>
-                        </m:r>
-                      </m:e>
-                      <m:sub>
-                        <m:r>
-                          <m:rPr>
-                            <m:sty m:val="p"/>
-                          </m:rPr>
-                          <m:t>∥</m:t>
-                        </m:r>
-                      </m:sub>
-                    </m:sSub>
-                  </m:oMath>
-                </a14:m>
-                <a:r>
-                  <a:rPr/>
-                  <a:t> with strong spin–orbit coupling</a:t>
-                </a:r>
-              </a:p>
-            </p:txBody>
-          </p:sp>
-        </mc:Choice>
-      </mc:AlternateContent>
-    </p:spTree>
-  </p:cSld>
-</p:sld>
-</file>
-
-<file path=ppt/slides/slide5.xml><?xml version="1.0" encoding="utf-8"?>
-<p:sld xmlns:a="http://schemas.openxmlformats.org/drawingml/2006/main" xmlns:r="http://schemas.openxmlformats.org/officeDocument/2006/relationships" xmlns:p="http://schemas.openxmlformats.org/presentationml/2006/main">
-  <p:cSld>
-    <p:spTree>
-      <p:nvGrpSpPr>
-        <p:cNvPr id="1" name=""/>
-        <p:cNvGrpSpPr/>
-        <p:nvPr/>
-      </p:nvGrpSpPr>
-      <p:grpSpPr>
-        <a:xfrm>
-          <a:off x="0" y="0"/>
-          <a:ext cx="0" cy="0"/>
-          <a:chOff x="0" y="0"/>
-          <a:chExt cx="0" cy="0"/>
-        </a:xfrm>
-      </p:grpSpPr>
       <p:sp>
         <p:nvSpPr>
-          <p:cNvPr id="2" name="Title 1"/>
+          <p:cNvPr id="3" name="Content Placeholder 2"/>
           <p:cNvSpPr>
             <a:spLocks noGrp="1"/>
           </p:cNvSpPr>
           <p:nvPr>
-            <p:ph type="title"/>
+            <p:ph idx="1"/>
           </p:nvPr>
         </p:nvSpPr>
         <p:spPr/>
@@ -6220,225 +10455,24 @@
           <a:lstStyle/>
           <a:p>
             <a:pPr lvl="0" indent="0" marL="0">
+              <a:spcBef>
+                <a:spcPts val="3000"/>
+              </a:spcBef>
               <a:buNone/>
             </a:pPr>
             <a:r>
-              <a:rPr/>
-              <a:t>Experimental Methods</a:t>
+              <a:rPr b="1"/>
+              <a:t>Josephson Effect &amp; Current–Phase Relation</a:t>
             </a:r>
           </a:p>
         </p:txBody>
       </p:sp>
-      <mc:AlternateContent xmlns:mc="http://schemas.openxmlformats.org/markup-compatibility/2006">
-        <mc:Choice xmlns:a14="http://schemas.microsoft.com/office/drawing/2010/main" Requires="a14">
-          <p:sp>
-            <p:nvSpPr>
-              <p:cNvPr id="3" name="Content Placeholder 2"/>
-              <p:cNvSpPr>
-                <a:spLocks noGrp="1"/>
-              </p:cNvSpPr>
-              <p:nvPr>
-                <p:ph idx="1"/>
-              </p:nvPr>
-            </p:nvSpPr>
-            <p:spPr/>
-            <p:txBody>
-              <a:bodyPr/>
-              <a:lstStyle/>
-              <a:p>
-                <a:pPr lvl="0" indent="0" marL="0">
-                  <a:spcBef>
-                    <a:spcPts val="3000"/>
-                  </a:spcBef>
-                  <a:buNone/>
-                </a:pPr>
-                <a:r>
-                  <a:rPr b="1"/>
-                  <a:t>Device Fabrication Flow</a:t>
-                </a:r>
-              </a:p>
-              <a:p>
-                <a:pPr lvl="0" indent="-342900" marL="342900">
-                  <a:buAutoNum type="arabicPeriod"/>
-                </a:pPr>
-                <a:r>
-                  <a:rPr b="1"/>
-                  <a:t>Crystal Growth</a:t>
-                </a:r>
-                <a:r>
-                  <a:rPr/>
-                  <a:t>: Self-flux method (provided by Prof. C.S. Lue, NCKU).</a:t>
-                </a:r>
-              </a:p>
-              <a:p>
-                <a:pPr lvl="0" indent="-342900" marL="342900">
-                  <a:buAutoNum type="arabicPeriod"/>
-                </a:pPr>
-                <a:r>
-                  <a:rPr b="1"/>
-                  <a:t>Exfoliation</a:t>
-                </a:r>
-                <a:r>
-                  <a:rPr/>
-                  <a:t>: Mechanical exfoliation of PtTe</a:t>
-                </a:r>
-                <a14:m>
-                  <m:oMath xmlns:m="http://schemas.openxmlformats.org/officeDocument/2006/math">
-                    <m:sSub>
-                      <m:e>
-                        <m:r>
-                          <m:t>​</m:t>
-                        </m:r>
-                      </m:e>
-                      <m:sub>
-                        <m:r>
-                          <m:t>2</m:t>
-                        </m:r>
-                      </m:sub>
-                    </m:sSub>
-                  </m:oMath>
-                </a14:m>
-                <a:r>
-                  <a:rPr/>
-                  <a:t> flakes onto SiO</a:t>
-                </a:r>
-                <a14:m>
-                  <m:oMath xmlns:m="http://schemas.openxmlformats.org/officeDocument/2006/math">
-                    <m:sSub>
-                      <m:e>
-                        <m:r>
-                          <m:t>​</m:t>
-                        </m:r>
-                      </m:e>
-                      <m:sub>
-                        <m:r>
-                          <m:t>2</m:t>
-                        </m:r>
-                      </m:sub>
-                    </m:sSub>
-                  </m:oMath>
-                </a14:m>
-                <a:r>
-                  <a:rPr/>
-                  <a:t>/Si substrates.</a:t>
-                </a:r>
-              </a:p>
-              <a:p>
-                <a:pPr lvl="0" indent="-342900" marL="342900">
-                  <a:buAutoNum type="arabicPeriod"/>
-                </a:pPr>
-                <a:r>
-                  <a:rPr b="1"/>
-                  <a:t>E-beam Lithography (EBL)</a:t>
-                </a:r>
-                <a:r>
-                  <a:rPr/>
-                  <a:t>:</a:t>
-                </a:r>
-              </a:p>
-              <a:p>
-                <a:pPr lvl="1"/>
-                <a:r>
-                  <a:rPr/>
-                  <a:t>PMMA resist coating.</a:t>
-                </a:r>
-              </a:p>
-              <a:p>
-                <a:pPr lvl="1"/>
-                <a:r>
-                  <a:rPr/>
-                  <a:t>Pattern definition for contacts and SQUID loops.</a:t>
-                </a:r>
-              </a:p>
-              <a:p>
-                <a:pPr lvl="0" indent="-342900" marL="342900">
-                  <a:buAutoNum type="arabicPeriod"/>
-                </a:pPr>
-                <a:r>
-                  <a:rPr b="1"/>
-                  <a:t>Metallization</a:t>
-                </a:r>
-                <a:r>
-                  <a:rPr/>
-                  <a:t>:</a:t>
-                </a:r>
-              </a:p>
-              <a:p>
-                <a:pPr lvl="1"/>
-                <a:r>
-                  <a:rPr/>
-                  <a:t>Superconducting electrodes: </a:t>
-                </a:r>
-                <a:r>
-                  <a:rPr b="1"/>
-                  <a:t>Al (Aluminum)</a:t>
-                </a:r>
-                <a:r>
-                  <a:rPr/>
-                  <a:t> or </a:t>
-                </a:r>
-                <a:r>
-                  <a:rPr b="1"/>
-                  <a:t>Nb (Niobium)</a:t>
-                </a:r>
-                <a:r>
-                  <a:rPr/>
-                  <a:t>.</a:t>
-                </a:r>
-              </a:p>
-              <a:p>
-                <a:pPr lvl="1"/>
-                <a:r>
-                  <a:rPr i="1"/>
-                  <a:t>In-situ</a:t>
-                </a:r>
-                <a:r>
-                  <a:rPr/>
-                  <a:t> Ar ion milling to ensure transparent interfaces.</a:t>
-                </a:r>
-              </a:p>
-              <a:p>
-                <a:pPr lvl="1"/>
-                <a:r>
-                  <a:rPr/>
-                  <a:t>E-beam evaporation &amp; Liftoff.</a:t>
-                </a:r>
-              </a:p>
-              <a:p>
-                <a:pPr lvl="0" indent="-342900" marL="342900">
-                  <a:buAutoNum type="arabicPeriod"/>
-                </a:pPr>
-                <a:r>
-                  <a:rPr b="1"/>
-                  <a:t>Design</a:t>
-                </a:r>
-                <a:r>
-                  <a:rPr/>
-                  <a:t>: Asymmetric dc-SQUID geometry for CPR retrieval.</a:t>
-                </a:r>
-              </a:p>
-              <a:p>
-                <a:pPr lvl="0" indent="0" marL="0">
-                  <a:spcBef>
-                    <a:spcPts val="3000"/>
-                  </a:spcBef>
-                  <a:buNone/>
-                </a:pPr>
-                <a:r>
-                  <a:rPr b="1"/>
-                  <a:t>Measurement Setup</a:t>
-                </a:r>
-              </a:p>
-            </p:txBody>
-          </p:sp>
-        </mc:Choice>
-      </mc:AlternateContent>
     </p:spTree>
   </p:cSld>
 </p:sld>
 </file>
 
-<file path=ppt/slides/slide6.xml><?xml version="1.0" encoding="utf-8"?>
+<file path=ppt/slides/slide9.xml><?xml version="1.0" encoding="utf-8"?>
 <p:sld xmlns:a="http://schemas.openxmlformats.org/drawingml/2006/main" xmlns:r="http://schemas.openxmlformats.org/officeDocument/2006/relationships" xmlns:p="http://schemas.openxmlformats.org/presentationml/2006/main">
   <p:cSld>
     <p:spTree>
@@ -6472,225 +10506,6 @@
               <a:bodyPr/>
               <a:lstStyle/>
               <a:p>
-                <a:pPr lvl="0"/>
-                <a:r>
-                  <a:rPr b="1"/>
-                  <a:t>Cryogenic system</a:t>
-                </a:r>
-                <a:r>
-                  <a:rPr/>
-                  <a:t>: Dilution refrigerator (base </a:t>
-                </a:r>
-                <a:r>
-                  <a:rPr b="1"/>
-                  <a:t>~40 mK</a:t>
-                </a:r>
-                <a:r>
-                  <a:rPr/>
-                  <a:t>)</a:t>
-                </a:r>
-              </a:p>
-              <a:p>
-                <a:pPr lvl="0"/>
-                <a:r>
-                  <a:rPr b="1"/>
-                  <a:t>Electronics</a:t>
-                </a:r>
-                <a:r>
-                  <a:rPr/>
-                  <a:t>: low-noise filtering, 4-terminal measurement</a:t>
-                </a:r>
-              </a:p>
-              <a:p>
-                <a:pPr lvl="0"/>
-                <a:r>
-                  <a:rPr b="1"/>
-                  <a:t>Magnetic control</a:t>
-                </a:r>
-                <a:r>
-                  <a:rPr/>
-                  <a:t>: 3-axis vector magnet</a:t>
-                </a:r>
-                <a:br/>
-                <a:r>
-                  <a:rPr/>
-                  <a:t>(precise </a:t>
-                </a:r>
-                <a14:m>
-                  <m:oMath xmlns:m="http://schemas.openxmlformats.org/officeDocument/2006/math">
-                    <m:sSub>
-                      <m:e>
-                        <m:r>
-                          <m:t>B</m:t>
-                        </m:r>
-                      </m:e>
-                      <m:sub>
-                        <m:r>
-                          <m:rPr>
-                            <m:sty m:val="p"/>
-                          </m:rPr>
-                          <m:t>∥</m:t>
-                        </m:r>
-                      </m:sub>
-                    </m:sSub>
-                  </m:oMath>
-                </a14:m>
-                <a:r>
-                  <a:rPr/>
-                  <a:t> and </a:t>
-                </a:r>
-                <a14:m>
-                  <m:oMath xmlns:m="http://schemas.openxmlformats.org/officeDocument/2006/math">
-                    <m:sSub>
-                      <m:e>
-                        <m:r>
-                          <m:t>B</m:t>
-                        </m:r>
-                      </m:e>
-                      <m:sub>
-                        <m:r>
-                          <m:rPr>
-                            <m:sty m:val="p"/>
-                          </m:rPr>
-                          <m:t>⟂</m:t>
-                        </m:r>
-                      </m:sub>
-                    </m:sSub>
-                  </m:oMath>
-                </a14:m>
-                <a:r>
-                  <a:rPr/>
-                  <a:t> alignment)</a:t>
-                </a:r>
-              </a:p>
-            </p:txBody>
-          </p:sp>
-        </mc:Choice>
-      </mc:AlternateContent>
-      <p:pic>
-        <p:nvPicPr>
-          <p:cNvPr descr="Images/coordinate_system_schematic.png" id="0" name="Picture 1"/>
-          <p:cNvPicPr>
-            <a:picLocks noGrp="1" noChangeAspect="1"/>
-          </p:cNvPicPr>
-          <p:nvPr/>
-        </p:nvPicPr>
-        <p:blipFill>
-          <a:blip r:embed="rId2"/>
-          <a:stretch>
-            <a:fillRect/>
-          </a:stretch>
-        </p:blipFill>
-        <p:spPr bwMode="auto">
-          <a:xfrm>
-            <a:off x="4953000" y="1193800"/>
-            <a:ext cx="3416300" cy="2882900"/>
-          </a:xfrm>
-          <a:prstGeom prst="rect">
-            <a:avLst/>
-          </a:prstGeom>
-          <a:noFill/>
-          <a:ln w="9525">
-            <a:noFill/>
-            <a:headEnd/>
-            <a:tailEnd/>
-          </a:ln>
-        </p:spPr>
-      </p:pic>
-      <p:sp>
-        <p:nvSpPr>
-          <p:cNvPr id="1" name="TextBox 3"/>
-          <p:cNvSpPr txBox="1"/>
-          <p:nvPr/>
-        </p:nvSpPr>
-        <p:spPr>
-          <a:xfrm>
-            <a:off x="4648200" y="4076700"/>
-            <a:ext cx="4038600" cy="508000"/>
-          </a:xfrm>
-          <a:prstGeom prst="rect">
-            <a:avLst/>
-          </a:prstGeom>
-          <a:noFill/>
-        </p:spPr>
-        <p:txBody>
-          <a:bodyPr/>
-          <a:lstStyle/>
-          <a:p>
-            <a:pPr lvl="0" indent="0" marL="0" algn="ctr">
-              <a:buNone/>
-            </a:pPr>
-            <a:r>
-              <a:rPr/>
-              <a:t>Measurement Schematic</a:t>
-            </a:r>
-          </a:p>
-        </p:txBody>
-      </p:sp>
-    </p:spTree>
-  </p:cSld>
-</p:sld>
-</file>
-
-<file path=ppt/slides/slide7.xml><?xml version="1.0" encoding="utf-8"?>
-<p:sld xmlns:a="http://schemas.openxmlformats.org/drawingml/2006/main" xmlns:r="http://schemas.openxmlformats.org/officeDocument/2006/relationships" xmlns:p="http://schemas.openxmlformats.org/presentationml/2006/main">
-  <p:cSld>
-    <p:spTree>
-      <p:nvGrpSpPr>
-        <p:cNvPr id="1" name=""/>
-        <p:cNvGrpSpPr/>
-        <p:nvPr/>
-      </p:nvGrpSpPr>
-      <p:grpSpPr>
-        <a:xfrm>
-          <a:off x="0" y="0"/>
-          <a:ext cx="0" cy="0"/>
-          <a:chOff x="0" y="0"/>
-          <a:chExt cx="0" cy="0"/>
-        </a:xfrm>
-      </p:grpSpPr>
-      <p:sp>
-        <p:nvSpPr>
-          <p:cNvPr id="2" name="Title 1"/>
-          <p:cNvSpPr>
-            <a:spLocks noGrp="1"/>
-          </p:cNvSpPr>
-          <p:nvPr>
-            <p:ph type="title"/>
-          </p:nvPr>
-        </p:nvSpPr>
-        <p:spPr/>
-        <p:txBody>
-          <a:bodyPr/>
-          <a:lstStyle/>
-          <a:p>
-            <a:pPr lvl="0" indent="0" marL="0">
-              <a:buNone/>
-            </a:pPr>
-            <a:r>
-              <a:rPr/>
-              <a:t>Results: Basic Characterization</a:t>
-            </a:r>
-          </a:p>
-        </p:txBody>
-      </p:sp>
-      <mc:AlternateContent xmlns:mc="http://schemas.openxmlformats.org/markup-compatibility/2006">
-        <mc:Choice xmlns:a14="http://schemas.microsoft.com/office/drawing/2010/main" Requires="a14">
-          <p:sp>
-            <p:nvSpPr>
-              <p:cNvPr id="3" name="Content Placeholder 2"/>
-              <p:cNvSpPr>
-                <a:spLocks noGrp="1"/>
-              </p:cNvSpPr>
-              <p:nvPr>
-                <p:ph idx="1"/>
-              </p:nvPr>
-            </p:nvSpPr>
-            <p:spPr/>
-            <p:txBody>
-              <a:bodyPr/>
-              <a:lstStyle/>
-              <a:p>
                 <a:pPr lvl="0" indent="0" marL="0">
                   <a:spcBef>
                     <a:spcPts val="3000"/>
@@ -6699,187 +10514,118 @@
                 </a:pPr>
                 <a:r>
                   <a:rPr b="1"/>
-                  <a:t>I-V Characteristics (DC Transport)</a:t>
+                  <a:t>Josephson relations</a:t>
                 </a:r>
               </a:p>
               <a:p>
                 <a:pPr lvl="0"/>
                 <a:r>
-                  <a:rPr b="1"/>
-                  <a:t>Typical IV Curve</a:t>
-                </a:r>
-                <a:r>
-                  <a:rPr/>
-                  <a:t>:</a:t>
-                </a:r>
-              </a:p>
-              <a:p>
-                <a:pPr lvl="1"/>
-                <a:r>
-                  <a:rPr/>
-                  <a:t>Clear Superconducting branch (</a:t>
+                  <a:rPr/>
+                  <a:t>DC: </a:t>
                 </a:r>
                 <a14:m>
                   <m:oMath xmlns:m="http://schemas.openxmlformats.org/officeDocument/2006/math">
-                    <m:r>
-                      <m:t>V</m:t>
-                    </m:r>
+                    <m:sSub>
+                      <m:e>
+                        <m:r>
+                          <m:t>I</m:t>
+                        </m:r>
+                      </m:e>
+                      <m:sub>
+                        <m:r>
+                          <m:t>s</m:t>
+                        </m:r>
+                      </m:sub>
+                    </m:sSub>
                     <m:r>
                       <m:rPr>
                         <m:sty m:val="p"/>
                       </m:rPr>
                       <m:t>=</m:t>
                     </m:r>
+                    <m:sSub>
+                      <m:e>
+                        <m:r>
+                          <m:t>I</m:t>
+                        </m:r>
+                      </m:e>
+                      <m:sub>
+                        <m:r>
+                          <m:t>c</m:t>
+                        </m:r>
+                      </m:sub>
+                    </m:sSub>
                     <m:r>
-                      <m:t>0</m:t>
+                      <m:rPr>
+                        <m:sty m:val="p"/>
+                      </m:rPr>
+                      <m:t>sin</m:t>
+                    </m:r>
+                    <m:r>
+                      <m:t>ϕ</m:t>
                     </m:r>
                   </m:oMath>
                 </a14:m>
                 <a:r>
                   <a:rPr/>
-                  <a:t>).</a:t>
-                </a:r>
-              </a:p>
-              <a:p>
-                <a:pPr lvl="1"/>
-                <a:r>
-                  <a:rPr/>
-                  <a:t>Switching Current (</a:t>
+                  <a:t> (ideal tunnel junction)</a:t>
+                </a:r>
+              </a:p>
+              <a:p>
+                <a:pPr lvl="0"/>
+                <a:r>
+                  <a:rPr/>
+                  <a:t>AC: </a:t>
                 </a:r>
                 <a14:m>
                   <m:oMath xmlns:m="http://schemas.openxmlformats.org/officeDocument/2006/math">
-                    <m:sSub>
+                    <m:acc>
+                      <m:accPr>
+                        <m:chr m:val="̇"/>
+                      </m:accPr>
                       <m:e>
                         <m:r>
-                          <m:t>I</m:t>
+                          <m:t>ϕ</m:t>
                         </m:r>
                       </m:e>
-                      <m:sub>
-                        <m:r>
-                          <m:t>c</m:t>
-                        </m:r>
-                      </m:sub>
-                    </m:sSub>
+                    </m:acc>
+                    <m:r>
+                      <m:rPr>
+                        <m:sty m:val="p"/>
+                      </m:rPr>
+                      <m:t>=</m:t>
+                    </m:r>
+                    <m:f>
+                      <m:fPr>
+                        <m:type m:val="bar"/>
+                      </m:fPr>
+                      <m:num>
+                        <m:r>
+                          <m:t>2</m:t>
+                        </m:r>
+                        <m:r>
+                          <m:t>e</m:t>
+                        </m:r>
+                      </m:num>
+                      <m:den>
+                        <m:r>
+                          <m:rPr>
+                            <m:sty m:val="p"/>
+                          </m:rPr>
+                          <m:t>ℏ</m:t>
+                        </m:r>
+                      </m:den>
+                    </m:f>
+                    <m:r>
+                      <m:t>V</m:t>
+                    </m:r>
                   </m:oMath>
                 </a14:m>
-                <a:r>
-                  <a:rPr/>
-                  <a:t>) and Retrapping Current (</a:t>
-                </a:r>
-                <a14:m>
-                  <m:oMath xmlns:m="http://schemas.openxmlformats.org/officeDocument/2006/math">
-                    <m:sSub>
-                      <m:e>
-                        <m:r>
-                          <m:t>I</m:t>
-                        </m:r>
-                      </m:e>
-                      <m:sub>
-                        <m:r>
-                          <m:t>r</m:t>
-                        </m:r>
-                      </m:sub>
-                    </m:sSub>
-                  </m:oMath>
-                </a14:m>
-                <a:r>
-                  <a:rPr/>
-                  <a:t>).</a:t>
-                </a:r>
-              </a:p>
-              <a:p>
-                <a:pPr lvl="1"/>
-                <a:r>
-                  <a:rPr/>
-                  <a:t>Hysteretic behavior (underdamped junction).</a:t>
-                </a:r>
               </a:p>
             </p:txBody>
           </p:sp>
         </mc:Choice>
       </mc:AlternateContent>
-    </p:spTree>
-  </p:cSld>
-</p:sld>
-</file>
-
-<file path=ppt/slides/slide8.xml><?xml version="1.0" encoding="utf-8"?>
-<p:sld xmlns:a="http://schemas.openxmlformats.org/drawingml/2006/main" xmlns:r="http://schemas.openxmlformats.org/officeDocument/2006/relationships" xmlns:p="http://schemas.openxmlformats.org/presentationml/2006/main">
-  <p:cSld>
-    <p:spTree>
-      <p:nvGrpSpPr>
-        <p:cNvPr id="1" name=""/>
-        <p:cNvGrpSpPr/>
-        <p:nvPr/>
-      </p:nvGrpSpPr>
-      <p:grpSpPr>
-        <a:xfrm>
-          <a:off x="0" y="0"/>
-          <a:ext cx="0" cy="0"/>
-          <a:chOff x="0" y="0"/>
-          <a:chExt cx="0" cy="0"/>
-        </a:xfrm>
-      </p:grpSpPr>
-      <p:pic>
-        <p:nvPicPr>
-          <p:cNvPr descr="Images/iv_run20.svg" id="0" name="Picture 1"/>
-          <p:cNvPicPr>
-            <a:picLocks noGrp="1" noChangeAspect="1"/>
-          </p:cNvPicPr>
-          <p:nvPr/>
-        </p:nvPicPr>
-        <p:blipFill>
-          <a:blip r:embed="rId2"/>
-          <a:stretch>
-            <a:fillRect/>
-          </a:stretch>
-        </p:blipFill>
-        <p:spPr bwMode="auto">
-          <a:xfrm>
-            <a:off x="457200" y="1447800"/>
-            <a:ext cx="4038600" cy="2387600"/>
-          </a:xfrm>
-          <a:prstGeom prst="rect">
-            <a:avLst/>
-          </a:prstGeom>
-          <a:noFill/>
-          <a:ln w="9525">
-            <a:noFill/>
-            <a:headEnd/>
-            <a:tailEnd/>
-          </a:ln>
-        </p:spPr>
-      </p:pic>
-      <p:sp>
-        <p:nvSpPr>
-          <p:cNvPr id="1" name="TextBox 3"/>
-          <p:cNvSpPr txBox="1"/>
-          <p:nvPr/>
-        </p:nvSpPr>
-        <p:spPr>
-          <a:xfrm>
-            <a:off x="457200" y="4076700"/>
-            <a:ext cx="4038600" cy="508000"/>
-          </a:xfrm>
-          <a:prstGeom prst="rect">
-            <a:avLst/>
-          </a:prstGeom>
-          <a:noFill/>
-        </p:spPr>
-        <p:txBody>
-          <a:bodyPr/>
-          <a:lstStyle/>
-          <a:p>
-            <a:pPr lvl="0" indent="0" marL="0" algn="ctr">
-              <a:buNone/>
-            </a:pPr>
-            <a:r>
-              <a:rPr/>
-              <a:t>I-V Curve at Base Temp.</a:t>
-            </a:r>
-          </a:p>
-        </p:txBody>
-      </p:sp>
       <mc:AlternateContent xmlns:mc="http://schemas.openxmlformats.org/markup-compatibility/2006">
         <mc:Choice xmlns:a14="http://schemas.microsoft.com/office/drawing/2010/main" Requires="a14">
           <p:sp>
@@ -6897,129 +10643,156 @@
               <a:bodyPr/>
               <a:lstStyle/>
               <a:p>
+                <a:pPr lvl="0" indent="0" marL="0">
+                  <a:spcBef>
+                    <a:spcPts val="3000"/>
+                  </a:spcBef>
+                  <a:buNone/>
+                </a:pPr>
+                <a:r>
+                  <a:rPr b="1"/>
+                  <a:t>Beyond sinusoidal CPR</a:t>
+                </a:r>
+              </a:p>
+              <a:p>
                 <a:pPr lvl="0"/>
                 <a:r>
+                  <a:rPr/>
+                  <a:t>High transparency → </a:t>
+                </a:r>
+                <a:r>
                   <a:rPr b="1"/>
-                  <a:t>Observation</a:t>
-                </a:r>
-                <a:r>
-                  <a:rPr/>
-                  <a:t>:</a:t>
-                </a:r>
-              </a:p>
-              <a:p>
-                <a:pPr lvl="1"/>
-                <a:r>
-                  <a:rPr/>
-                  <a:t>Sharp transition indicates high-quality junction.</a:t>
-                </a:r>
-              </a:p>
-              <a:p>
-                <a:pPr lvl="1"/>
-                <a:r>
-                  <a:rPr/>
-                  <a:t>Finite resistance in normal state (</a:t>
+                  <a:t>skewed</a:t>
+                </a:r>
+                <a:r>
+                  <a:rPr/>
+                  <a:t> CPR</a:t>
+                </a:r>
+              </a:p>
+              <a:p>
+                <a:pPr lvl="0"/>
+                <a:r>
+                  <a:rPr/>
+                  <a:t>Harmonics: </a:t>
                 </a:r>
                 <a14:m>
                   <m:oMath xmlns:m="http://schemas.openxmlformats.org/officeDocument/2006/math">
-                    <m:sSub>
+                    <m:r>
+                      <m:t>I</m:t>
+                    </m:r>
+                    <m:d>
+                      <m:dPr>
+                        <m:begChr m:val="("/>
+                        <m:sepChr m:val=""/>
+                        <m:endChr m:val=")"/>
+                        <m:grow/>
+                      </m:dPr>
                       <m:e>
                         <m:r>
-                          <m:t>R</m:t>
+                          <m:t>ϕ</m:t>
                         </m:r>
                       </m:e>
-                      <m:sub>
-                        <m:r>
-                          <m:t>N</m:t>
-                        </m:r>
-                      </m:sub>
-                    </m:sSub>
-                  </m:oMath>
-                </a14:m>
-                <a:r>
-                  <a:rPr/>
-                  <a:t>).</a:t>
-                </a:r>
-              </a:p>
-              <a:p>
-                <a:pPr lvl="1"/>
-                <a:r>
-                  <a:rPr b="1"/>
-                  <a:t>Excess Current</a:t>
-                </a:r>
-                <a:r>
-                  <a:rPr/>
-                  <a:t> observed at high bias </a:t>
-                </a:r>
-                <a14:m>
-                  <m:oMath xmlns:m="http://schemas.openxmlformats.org/officeDocument/2006/math">
+                    </m:d>
                     <m:r>
                       <m:rPr>
                         <m:sty m:val="p"/>
                       </m:rPr>
-                      <m:t>→</m:t>
+                      <m:t>=</m:t>
                     </m:r>
+                    <m:nary>
+                      <m:naryPr>
+                        <m:chr m:val="∑"/>
+                        <m:limLoc m:val="undOvr"/>
+                        <m:subHide m:val="off"/>
+                        <m:supHide m:val="on"/>
+                      </m:naryPr>
+                      <m:sub>
+                        <m:r>
+                          <m:t>n</m:t>
+                        </m:r>
+                      </m:sub>
+                      <m:sup>
+                        <m:r>
+                          <m:t>​</m:t>
+                        </m:r>
+                      </m:sup>
+                      <m:e>
+                        <m:sSub>
+                          <m:e>
+                            <m:r>
+                              <m:t>I</m:t>
+                            </m:r>
+                          </m:e>
+                          <m:sub>
+                            <m:r>
+                              <m:t>n</m:t>
+                            </m:r>
+                          </m:sub>
+                        </m:sSub>
+                      </m:e>
+                    </m:nary>
+                    <m:r>
+                      <m:rPr>
+                        <m:sty m:val="p"/>
+                      </m:rPr>
+                      <m:t>sin</m:t>
+                    </m:r>
+                    <m:d>
+                      <m:dPr>
+                        <m:begChr m:val="("/>
+                        <m:sepChr m:val=""/>
+                        <m:endChr m:val=")"/>
+                        <m:grow/>
+                      </m:dPr>
+                      <m:e>
+                        <m:r>
+                          <m:t>n</m:t>
+                        </m:r>
+                        <m:r>
+                          <m:t>ϕ</m:t>
+                        </m:r>
+                        <m:r>
+                          <m:rPr>
+                            <m:sty m:val="p"/>
+                          </m:rPr>
+                          <m:t>+</m:t>
+                        </m:r>
+                        <m:sSub>
+                          <m:e>
+                            <m:r>
+                              <m:t>δ</m:t>
+                            </m:r>
+                          </m:e>
+                          <m:sub>
+                            <m:r>
+                              <m:t>n</m:t>
+                            </m:r>
+                          </m:sub>
+                        </m:sSub>
+                      </m:e>
+                    </m:d>
                   </m:oMath>
                 </a14:m>
-                <a:r>
-                  <a:rPr/>
-                  <a:t> High transparency interface.</a:t>
+              </a:p>
+              <a:p>
+                <a:pPr lvl="0"/>
+                <a:r>
+                  <a:rPr/>
+                  <a:t>Access via </a:t>
+                </a:r>
+                <a:r>
+                  <a:rPr b="1"/>
+                  <a:t>asymmetric SQUID</a:t>
+                </a:r>
+                <a:r>
+                  <a:rPr/>
+                  <a:t> readout</a:t>
                 </a:r>
               </a:p>
             </p:txBody>
           </p:sp>
         </mc:Choice>
       </mc:AlternateContent>
-    </p:spTree>
-  </p:cSld>
-</p:sld>
-</file>
-
-<file path=ppt/slides/slide9.xml><?xml version="1.0" encoding="utf-8"?>
-<p:sld xmlns:a="http://schemas.openxmlformats.org/drawingml/2006/main" xmlns:r="http://schemas.openxmlformats.org/officeDocument/2006/relationships" xmlns:p="http://schemas.openxmlformats.org/presentationml/2006/main">
-  <p:cSld>
-    <p:spTree>
-      <p:nvGrpSpPr>
-        <p:cNvPr id="1" name=""/>
-        <p:cNvGrpSpPr/>
-        <p:nvPr/>
-      </p:nvGrpSpPr>
-      <p:grpSpPr>
-        <a:xfrm>
-          <a:off x="0" y="0"/>
-          <a:ext cx="0" cy="0"/>
-          <a:chOff x="0" y="0"/>
-          <a:chExt cx="0" cy="0"/>
-        </a:xfrm>
-      </p:grpSpPr>
-      <p:sp>
-        <p:nvSpPr>
-          <p:cNvPr id="3" name="Content Placeholder 2"/>
-          <p:cNvSpPr>
-            <a:spLocks noGrp="1"/>
-          </p:cNvSpPr>
-          <p:nvPr>
-            <p:ph idx="1"/>
-          </p:nvPr>
-        </p:nvSpPr>
-        <p:spPr/>
-        <p:txBody>
-          <a:bodyPr/>
-          <a:lstStyle/>
-          <a:p>
-            <a:pPr lvl="0" indent="0" marL="0">
-              <a:spcBef>
-                <a:spcPts val="3000"/>
-              </a:spcBef>
-              <a:buNone/>
-            </a:pPr>
-            <a:r>
-              <a:rPr b="1"/>
-              <a:t>Fraunhofer Pattern (AC Josephson Effect)</a:t>
-            </a:r>
-          </a:p>
-        </p:txBody>
-      </p:sp>
     </p:spTree>
   </p:cSld>
 </p:sld>
